--- a/test_output.pptx
+++ b/test_output.pptx
@@ -938,7 +938,7 @@
                 </a:solidFill>
                 <a:latin typeface="Nimbus Roman"/>
               </a:rPr>
-              <a:t>Expansive backyard with distant views—ideal for outdoor play, dining, and relaxed.</a:t>
+              <a:t>Bright, open kitchen with clean cabinetry, recessed lighting, and easy flow into dining.</a:t>
             </a:r>
             <a:endParaRPr lang="en-CA" sz="1000" b="0" u="none" strike="noStrike">
               <a:solidFill>
@@ -994,7 +994,7 @@
                 </a:solidFill>
                 <a:latin typeface="Nimbus Roman"/>
               </a:rPr>
-              <a:t>Light-filled kitchen with modern finishes, generous counter space, and a smooth, functional.</a:t>
+              <a:t>Inviting living room with comfortable seating and a large window that fills the space.</a:t>
             </a:r>
             <a:endParaRPr lang="en-CA" sz="1000" b="0" u="none" strike="noStrike">
               <a:solidFill>
@@ -1050,7 +1050,7 @@
                 </a:solidFill>
                 <a:latin typeface="Nimbus Roman"/>
               </a:rPr>
-              <a:t>Spacious primary bedroom with plush upholstered headboard and tray-style lighting for.</a:t>
+              <a:t>Dining area with slider doors to the backyard, made for indoor-outdoor entertaining.</a:t>
             </a:r>
             <a:endParaRPr lang="en-CA" sz="1000" b="0" u="none" strike="noStrike">
               <a:solidFill>
@@ -1106,7 +1106,7 @@
                 </a:solidFill>
                 <a:latin typeface="Nimbus Roman"/>
               </a:rPr>
-              <a:t>Welcoming front exterior with a long driveway and a well-kept, attractive façade.</a:t>
+              <a:t>Welcoming street view with a well-kept exterior and standout curb appeal on Happyvale Ave.</a:t>
             </a:r>
             <a:endParaRPr lang="en-CA" sz="1000" b="0" u="none" strike="noStrike">
               <a:solidFill>
@@ -1162,7 +1162,7 @@
                 </a:solidFill>
                 <a:latin typeface="Nimbus Roman"/>
               </a:rPr>
-              <a:t>Bright living room with comfortable seating and a large window framing views outside.</a:t>
+              <a:t>Expansive backyard with neighboring views, perfect for relaxing, playing, and hosting.</a:t>
             </a:r>
             <a:endParaRPr lang="en-CA" sz="1000" b="0" u="none" strike="noStrike">
               <a:solidFill>
@@ -1276,7 +1276,7 @@
                 </a:solidFill>
                 <a:latin typeface="Nimbus Roman"/>
               </a:rPr>
-              <a:t>Enjoy over 1,700 sq. ft. in a bright, functional 3-level split townhome on desirable Happyvale Avenue.</a:t>
+              <a:t>Enjoy bright living across three levels in this 1,700+ sq ft townhome on desirable Happyvale Avenue.</a:t>
             </a:r>
             <a:endParaRPr lang="en-CA" sz="1100" b="0" u="none" strike="noStrike">
               <a:solidFill>
@@ -1309,7 +1309,7 @@
                 </a:solidFill>
                 <a:latin typeface="Nimbus Roman"/>
               </a:rPr>
-              <a:t>Cathedral entry and sunny dining flow to a sundeck, overlooking the fenced backyard and nearby green space.</a:t>
+              <a:t>Cathedral entry welcomes you into a spacious main floor with a sunny dining room and convenient laundry.</a:t>
             </a:r>
           </a:p>
           <a:p>
@@ -1334,7 +1334,7 @@
                 </a:solidFill>
                 <a:latin typeface="Nimbus Roman"/>
               </a:rPr>
-              <a:t>Renovated in 2012 with modern kitchen updates, refreshed flooring, appliances, windows, roof, plus upgraded decks and railings.</a:t>
+              <a:t>2012 renovations refreshed the kitchen, flooring, windows, roof, and modernized lighting, railings, and overall finishes.</a:t>
             </a:r>
           </a:p>
           <a:p>
@@ -1359,7 +1359,7 @@
                 </a:solidFill>
                 <a:latin typeface="Nimbus Roman"/>
               </a:rPr>
-              <a:t>Double attached garage with workshop space and four total parking spots provides effortless everyday convenience.</a:t>
+              <a:t>Park with ease using a double attached garage plus four total spaces, ideal for family and guests.</a:t>
             </a:r>
           </a:p>
           <a:p>
@@ -1384,7 +1384,7 @@
                 </a:solidFill>
                 <a:latin typeface="Nimbus Roman"/>
               </a:rPr>
-              <a:t>Pass-through access from the garage leads to the rear yard as the strata refreshes and paints siding.</a:t>
+              <a:t>Backs onto school-district land for a peaceful backdrop, with a sundeck and fenced yard for outdoor living.</a:t>
             </a:r>
           </a:p>
           <a:p>
@@ -1409,7 +1409,7 @@
                 </a:solidFill>
                 <a:latin typeface="Nimbus Roman"/>
               </a:rPr>
-              <a:t>Pet- and rental-friendly complex near schools, shopping, parks, and River’s Trail for a connected lifestyle.</a:t>
+              <a:t>Pet- and rental-friendly strata includes maintenance, insurance, and water for simple, worry-free ownership.</a:t>
             </a:r>
           </a:p>
         </p:txBody>
@@ -1491,7 +1491,7 @@
                 </a:solidFill>
                 <a:latin typeface="Nimbus Roman"/>
               </a:rPr>
-              <a:t>Happyvale Avenue Split-Level Living With Private Deck and Double Garage</a:t>
+              <a:t>Live Comfortably on Happyvale Ave With Space, Light, and a Private Yard</a:t>
             </a:r>
             <a:endParaRPr lang="en-CA" sz="1600" b="0" u="none" strike="noStrike">
               <a:solidFill>
@@ -1596,7 +1596,7 @@
       </p:sp>
       <p:pic>
         <p:nvPicPr>
-          <p:cNvPr id="28" name="Picture 27" descr="DSC03355.jpg"/>
+          <p:cNvPr id="28" name="Picture 27" descr="DSC03381.jpg"/>
           <p:cNvPicPr>
             <a:picLocks noChangeAspect="1"/>
           </p:cNvPicPr>
@@ -1621,7 +1621,7 @@
       </p:pic>
       <p:pic>
         <p:nvPicPr>
-          <p:cNvPr id="29" name="Picture 28" descr="DSC03381.jpg"/>
+          <p:cNvPr id="29" name="Picture 28" descr="DSC03369.jpg"/>
           <p:cNvPicPr>
             <a:picLocks noChangeAspect="1"/>
           </p:cNvPicPr>
@@ -1671,7 +1671,7 @@
       </p:pic>
       <p:pic>
         <p:nvPicPr>
-          <p:cNvPr id="31" name="Picture 30" descr="DSC03411.jpg"/>
+          <p:cNvPr id="31" name="Picture 30" descr="DSC03378.jpg"/>
           <p:cNvPicPr>
             <a:picLocks noChangeAspect="1"/>
           </p:cNvPicPr>
@@ -1679,7 +1679,7 @@
         </p:nvPicPr>
         <p:blipFill>
           <a:blip r:embed="rId6"/>
-          <a:srcRect l="6614" r="6614"/>
+          <a:srcRect l="6512" r="6512"/>
           <a:stretch>
             <a:fillRect/>
           </a:stretch>
@@ -1696,7 +1696,7 @@
       </p:pic>
       <p:pic>
         <p:nvPicPr>
-          <p:cNvPr id="32" name="Picture 31" descr="DSC03369.jpg"/>
+          <p:cNvPr id="32" name="Picture 31" descr="DSC03355.jpg"/>
           <p:cNvPicPr>
             <a:picLocks noChangeAspect="1"/>
           </p:cNvPicPr>
@@ -1721,7 +1721,7 @@
       </p:pic>
       <p:pic>
         <p:nvPicPr>
-          <p:cNvPr id="33" name="Picture 32" descr="DSC03343.jpg"/>
+          <p:cNvPr id="33" name="Picture 32" descr="DSC03341.jpg"/>
           <p:cNvPicPr>
             <a:picLocks noChangeAspect="1"/>
           </p:cNvPicPr>
@@ -1814,7 +1814,7 @@
                 </a:solidFill>
                 <a:latin typeface="Nimbus Roman"/>
               </a:rPr>
-              <a:t>Dining area overlooks lush greenery, creating a sunny everyday space for meals and.</a:t>
+              <a:t>Primary bedroom with a striking upholstered headboard and plenty of natural light.</a:t>
             </a:r>
             <a:endParaRPr lang="en-CA" sz="1000" b="0" u="none" strike="noStrike">
               <a:solidFill>
@@ -1870,7 +1870,7 @@
                 </a:solidFill>
                 <a:latin typeface="Nimbus Roman"/>
               </a:rPr>
-              <a:t>Private deck for outdoor dining and grilling—an easy extension of daily living.</a:t>
+              <a:t>Unwind on the deck while enjoying backyard views, with a built-in grill area.</a:t>
             </a:r>
             <a:endParaRPr lang="en-CA" sz="1000" b="0" u="none" strike="noStrike">
               <a:solidFill>
@@ -1926,7 +1926,7 @@
                 </a:solidFill>
                 <a:latin typeface="Nimbus Roman"/>
               </a:rPr>
-              <a:t>Clean, bright full bath with updated fixtures and a granite-style vanity plus shower/tub.</a:t>
+              <a:t>Clean, bright bathroom with a dual-sink vanity and a full shower/tub surround.</a:t>
             </a:r>
             <a:endParaRPr lang="en-CA" sz="1000" b="0" u="none" strike="noStrike">
               <a:solidFill>
@@ -1982,7 +1982,7 @@
                 </a:solidFill>
                 <a:latin typeface="Nimbus Roman"/>
               </a:rPr>
-              <a:t>Wide driveway and side approach for easy parking, with a clear view toward the garage.</a:t>
+              <a:t>Attractive vanity bathroom with dual mirrors and a tidy, modern countertop finish.</a:t>
             </a:r>
             <a:endParaRPr lang="en-CA" sz="1000" b="0" u="none" strike="noStrike">
               <a:solidFill>
@@ -2038,7 +2038,7 @@
                 </a:solidFill>
                 <a:latin typeface="Nimbus Roman"/>
               </a:rPr>
-              <a:t>Spacious bedroom with fresh paint, ample closet space, and a convenient hallway flow.</a:t>
+              <a:t>Primary bedroom with calm neutral finishes, a comfortable layout, and great everyday.</a:t>
             </a:r>
             <a:endParaRPr lang="en-CA" sz="1000" b="0" u="none" strike="noStrike">
               <a:solidFill>
@@ -2317,6 +2317,34 @@
                 </a:solidFill>
                 <a:latin typeface="Nimbus Roman"/>
               </a:rPr>
+              <a:t>Fireplace:	Year Subst Reno2012Prop Condition</a:t>
+            </a:r>
+          </a:p>
+          <a:p>
+            <a:pPr>
+              <a:lnSpc>
+                <a:spcPct val="100000"/>
+              </a:lnSpc>
+              <a:spcBef>
+                <a:spcPts val="2100"/>
+              </a:spcBef>
+              <a:spcAft>
+                <a:spcPts val="0"/>
+              </a:spcAft>
+              <a:tabLst>
+                <a:tab algn="l" pos="0"/>
+                <a:tab algn="l" pos="347040"/>
+                <a:tab algn="l" pos="898200"/>
+                <a:tab algn="l" pos="4027680"/>
+              </a:tabLst>
+            </a:pPr>
+            <a:r>
+              <a:rPr b="1" sz="1400">
+                <a:solidFill>
+                  <a:srgbClr val="000000"/>
+                </a:solidFill>
+                <a:latin typeface="Nimbus Roman"/>
+              </a:rPr>
               <a:t>Includes:	Dishwasher</a:t>
             </a:r>
           </a:p>
@@ -2466,6 +2494,62 @@
                 <a:spcPct val="100000"/>
               </a:lnSpc>
               <a:spcBef>
+                <a:spcPts val="700"/>
+              </a:spcBef>
+              <a:spcAft>
+                <a:spcPts val="0"/>
+              </a:spcAft>
+              <a:tabLst>
+                <a:tab algn="l" pos="0"/>
+                <a:tab algn="l" pos="347040"/>
+                <a:tab algn="l" pos="898200"/>
+                <a:tab algn="l" pos="4027680"/>
+              </a:tabLst>
+            </a:pPr>
+            <a:r>
+              <a:rPr b="1" sz="1400">
+                <a:solidFill>
+                  <a:srgbClr val="000000"/>
+                </a:solidFill>
+                <a:latin typeface="Nimbus Roman"/>
+              </a:rPr>
+              <a:t>		Pet Friendly</a:t>
+            </a:r>
+          </a:p>
+          <a:p>
+            <a:pPr>
+              <a:lnSpc>
+                <a:spcPct val="100000"/>
+              </a:lnSpc>
+              <a:spcBef>
+                <a:spcPts val="700"/>
+              </a:spcBef>
+              <a:spcAft>
+                <a:spcPts val="0"/>
+              </a:spcAft>
+              <a:tabLst>
+                <a:tab algn="l" pos="0"/>
+                <a:tab algn="l" pos="347040"/>
+                <a:tab algn="l" pos="898200"/>
+                <a:tab algn="l" pos="4027680"/>
+              </a:tabLst>
+            </a:pPr>
+            <a:r>
+              <a:rPr b="1" sz="1400">
+                <a:solidFill>
+                  <a:srgbClr val="000000"/>
+                </a:solidFill>
+                <a:latin typeface="Nimbus Roman"/>
+              </a:rPr>
+              <a:t>		Rental Friendly</a:t>
+            </a:r>
+          </a:p>
+          <a:p>
+            <a:pPr>
+              <a:lnSpc>
+                <a:spcPct val="100000"/>
+              </a:lnSpc>
+              <a:spcBef>
                 <a:spcPts val="2100"/>
               </a:spcBef>
               <a:spcAft>
@@ -2529,7 +2613,7 @@
                 </a:solidFill>
                 <a:latin typeface="Nimbus Roman"/>
               </a:rPr>
-              <a:t>Basement (674.9 sq. ft.)</a:t>
+              <a:t>Home (1,721 sq. ft.)</a:t>
             </a:r>
             <a:endParaRPr lang="en-CA" sz="1400" b="0" u="none" strike="noStrike">
               <a:solidFill>
@@ -2557,7 +2641,7 @@
                 </a:solidFill>
                 <a:latin typeface="Nimbus Roman"/>
               </a:rPr>
-              <a:t>Bedroom	12' 7" x 12' 9"</a:t>
+              <a:t>Kitchen	10' 4" x 13' 11"</a:t>
             </a:r>
           </a:p>
           <a:p>
@@ -2576,7 +2660,7 @@
                 </a:solidFill>
                 <a:latin typeface="Nimbus Roman"/>
               </a:rPr>
-              <a:t>Family Room	19' 3" x 12' 6"</a:t>
+              <a:t>Living Room	14' 4" x 14' 9"</a:t>
             </a:r>
           </a:p>
           <a:p>
@@ -2595,29 +2679,9 @@
                 </a:solidFill>
                 <a:latin typeface="Nimbus Roman"/>
               </a:rPr>
-              <a:t>Storage	18' 9" x 6' </a:t>
-            </a:r>
-          </a:p>
-          <a:p>
-            <a:pPr algn="ctr">
-              <a:lnSpc>
-                <a:spcPct val="150000"/>
-              </a:lnSpc>
-              <a:tabLst>
-                <a:tab algn="l" pos="1619280"/>
-              </a:tabLst>
-            </a:pPr>
-            <a:r>
-              <a:rPr b="1" sz="1400" i="1">
-                <a:solidFill>
-                  <a:srgbClr val="000000"/>
-                </a:solidFill>
-                <a:latin typeface="Nimbus Roman"/>
-              </a:rPr>
-              <a:t>Main (1,046 sq. ft.)</a:t>
-            </a:r>
-          </a:p>
-          <a:p/>
+              <a:t>Dining Room	9' 2" x 8' 9"</a:t>
+            </a:r>
+          </a:p>
           <a:p>
             <a:pPr>
               <a:lnSpc>
@@ -2634,7 +2698,7 @@
                 </a:solidFill>
                 <a:latin typeface="Nimbus Roman"/>
               </a:rPr>
-              <a:t>Kitchen	10' 4" x 13' 11"</a:t>
+              <a:t>Primary Bedroom	11' 8" x 10' 6"</a:t>
             </a:r>
           </a:p>
           <a:p>
@@ -2653,7 +2717,7 @@
                 </a:solidFill>
                 <a:latin typeface="Nimbus Roman"/>
               </a:rPr>
-              <a:t>Living Room	14' 4" x 14' 9"</a:t>
+              <a:t>Bedroom	8' 3" x 8' 9"</a:t>
             </a:r>
           </a:p>
           <a:p>
@@ -2672,7 +2736,7 @@
                 </a:solidFill>
                 <a:latin typeface="Nimbus Roman"/>
               </a:rPr>
-              <a:t>Dining Room	9' 2" x 8' 9"</a:t>
+              <a:t>Bedroom	12' 7" x 12' 9" 8' 9" x 9' 9"</a:t>
             </a:r>
           </a:p>
           <a:p>
@@ -2691,7 +2755,7 @@
                 </a:solidFill>
                 <a:latin typeface="Nimbus Roman"/>
               </a:rPr>
-              <a:t>Primary Bedroom	11' 8" x 10' 6"</a:t>
+              <a:t>Bathroom - Full	4 PCE</a:t>
             </a:r>
           </a:p>
           <a:p>
@@ -2710,7 +2774,7 @@
                 </a:solidFill>
                 <a:latin typeface="Nimbus Roman"/>
               </a:rPr>
-              <a:t>Bedroom	8' 3" x 8' 9"</a:t>
+              <a:t>Ensuite - Half	2 PCE</a:t>
             </a:r>
           </a:p>
           <a:p>
@@ -2729,7 +2793,7 @@
                 </a:solidFill>
                 <a:latin typeface="Nimbus Roman"/>
               </a:rPr>
-              <a:t>Bathroom - Full	4 PCE</a:t>
+              <a:t>Laundry	9' 3" x 3' </a:t>
             </a:r>
           </a:p>
           <a:p>
@@ -2748,7 +2812,7 @@
                 </a:solidFill>
                 <a:latin typeface="Nimbus Roman"/>
               </a:rPr>
-              <a:t>Ensuite - Half	2 PCE</a:t>
+              <a:t>Family Room	19' 3" x 12' 6"</a:t>
             </a:r>
           </a:p>
           <a:p>
@@ -2767,7 +2831,7 @@
                 </a:solidFill>
                 <a:latin typeface="Nimbus Roman"/>
               </a:rPr>
-              <a:t>Laundry	9' 3" x 3' </a:t>
+              <a:t>Storage	18' 9" x 6' </a:t>
             </a:r>
           </a:p>
         </p:txBody>
@@ -2819,7 +2883,7 @@
       </p:sp>
       <p:pic>
         <p:nvPicPr>
-          <p:cNvPr id="43" name="Picture 42" descr="DSC03378.jpg"/>
+          <p:cNvPr id="43" name="Picture 42" descr="DSC03411.jpg"/>
           <p:cNvPicPr>
             <a:picLocks noChangeAspect="1"/>
           </p:cNvPicPr>
@@ -2827,7 +2891,7 @@
         </p:nvPicPr>
         <p:blipFill>
           <a:blip r:embed="rId3"/>
-          <a:srcRect l="6818" r="6818"/>
+          <a:srcRect l="6919" r="6919"/>
           <a:stretch>
             <a:fillRect/>
           </a:stretch>
@@ -2894,7 +2958,7 @@
       </p:pic>
       <p:pic>
         <p:nvPicPr>
-          <p:cNvPr id="46" name="Picture 45" descr="DSC03423.jpg"/>
+          <p:cNvPr id="46" name="Picture 45" descr="DSC03434.jpg"/>
           <p:cNvPicPr>
             <a:picLocks noChangeAspect="1"/>
           </p:cNvPicPr>
@@ -2902,7 +2966,7 @@
         </p:nvPicPr>
         <p:blipFill>
           <a:blip r:embed="rId6"/>
-          <a:srcRect l="13715" r="13715"/>
+          <a:srcRect l="13800" r="13800"/>
           <a:stretch>
             <a:fillRect/>
           </a:stretch>
@@ -2919,7 +2983,7 @@
       </p:pic>
       <p:pic>
         <p:nvPicPr>
-          <p:cNvPr id="47" name="Picture 46" descr="DSC03439.jpg"/>
+          <p:cNvPr id="47" name="Picture 46" descr="DSC03417.jpg"/>
           <p:cNvPicPr>
             <a:picLocks noChangeAspect="1"/>
           </p:cNvPicPr>
@@ -2927,7 +2991,7 @@
         </p:nvPicPr>
         <p:blipFill>
           <a:blip r:embed="rId7"/>
-          <a:srcRect l="6816" r="6816"/>
+          <a:srcRect l="6917" r="6917"/>
           <a:stretch>
             <a:fillRect/>
           </a:stretch>

--- a/test_output.pptx
+++ b/test_output.pptx
@@ -938,7 +938,7 @@
                 </a:solidFill>
                 <a:latin typeface="Nimbus Roman"/>
               </a:rPr>
-              <a:t>Bright, open kitchen with clean cabinetry, recessed lighting, and easy flow into dining.</a:t>
+              <a:t>Open green outlook with mountain views, adding a peaceful backdrop to everyday living.</a:t>
             </a:r>
             <a:endParaRPr lang="en-CA" sz="1000" b="0" u="none" strike="noStrike">
               <a:solidFill>
@@ -994,7 +994,7 @@
                 </a:solidFill>
                 <a:latin typeface="Nimbus Roman"/>
               </a:rPr>
-              <a:t>Inviting living room with comfortable seating and a large window that fills the space.</a:t>
+              <a:t>Dining area connects seamlessly to the kitchen and opens directly onto the sunny deck.</a:t>
             </a:r>
             <a:endParaRPr lang="en-CA" sz="1000" b="0" u="none" strike="noStrike">
               <a:solidFill>
@@ -1050,7 +1050,7 @@
                 </a:solidFill>
                 <a:latin typeface="Nimbus Roman"/>
               </a:rPr>
-              <a:t>Dining area with slider doors to the backyard, made for indoor-outdoor entertaining.</a:t>
+              <a:t>Bright kitchen with peninsula seating, ample prep space, and leafy views from the window.</a:t>
             </a:r>
             <a:endParaRPr lang="en-CA" sz="1000" b="0" u="none" strike="noStrike">
               <a:solidFill>
@@ -1106,7 +1106,7 @@
                 </a:solidFill>
                 <a:latin typeface="Nimbus Roman"/>
               </a:rPr>
-              <a:t>Welcoming street view with a well-kept exterior and standout curb appeal on Happyvale Ave.</a:t>
+              <a:t>Fenced backyard with mature shade, open lawn, and a pleasant green outlook beyond.</a:t>
             </a:r>
             <a:endParaRPr lang="en-CA" sz="1000" b="0" u="none" strike="noStrike">
               <a:solidFill>
@@ -1162,7 +1162,7 @@
                 </a:solidFill>
                 <a:latin typeface="Nimbus Roman"/>
               </a:rPr>
-              <a:t>Expansive backyard with neighboring views, perfect for relaxing, playing, and hosting.</a:t>
+              <a:t>Welcoming living room filled with natural light from the large front-facing window.</a:t>
             </a:r>
             <a:endParaRPr lang="en-CA" sz="1000" b="0" u="none" strike="noStrike">
               <a:solidFill>
@@ -1276,7 +1276,7 @@
                 </a:solidFill>
                 <a:latin typeface="Nimbus Roman"/>
               </a:rPr>
-              <a:t>Enjoy bright living across three levels in this 1,700+ sq ft townhome on desirable Happyvale Avenue.</a:t>
+              <a:t>Bright and functional cathedral-entry townhome offering over 1,700 sq. ft. across a flexible three-level split design.</a:t>
             </a:r>
             <a:endParaRPr lang="en-CA" sz="1100" b="0" u="none" strike="noStrike">
               <a:solidFill>
@@ -1309,7 +1309,7 @@
                 </a:solidFill>
                 <a:latin typeface="Nimbus Roman"/>
               </a:rPr>
-              <a:t>Cathedral entry welcomes you into a spacious main floor with a sunny dining room and convenient laundry.</a:t>
+              <a:t>Thoughtfully renovated in 2012 with updates to the kitchen, flooring, appliances, windows, roof, lighting, decks, and railings.</a:t>
             </a:r>
           </a:p>
           <a:p>
@@ -1334,7 +1334,7 @@
                 </a:solidFill>
                 <a:latin typeface="Nimbus Roman"/>
               </a:rPr>
-              <a:t>2012 renovations refreshed the kitchen, flooring, windows, roof, and modernized lighting, railings, and overall finishes.</a:t>
+              <a:t>The sunny dining area opens to a sundeck overlooking the fenced yard and peaceful green space beyond.</a:t>
             </a:r>
           </a:p>
           <a:p>
@@ -1359,7 +1359,7 @@
                 </a:solidFill>
                 <a:latin typeface="Nimbus Roman"/>
               </a:rPr>
-              <a:t>Park with ease using a double attached garage plus four total spaces, ideal for family and guests.</a:t>
+              <a:t>A versatile layout includes main floor laundry, a spacious family room, and a lower-level bedroom ideal for guests or a home office.</a:t>
             </a:r>
           </a:p>
           <a:p>
@@ -1384,7 +1384,7 @@
                 </a:solidFill>
                 <a:latin typeface="Nimbus Roman"/>
               </a:rPr>
-              <a:t>Backs onto school-district land for a peaceful backdrop, with a sundeck and fenced yard for outdoor living.</a:t>
+              <a:t>The double attached garage provides workshop potential and rear yard access, complemented by driveway parking and an assigned stall.</a:t>
             </a:r>
           </a:p>
           <a:p>
@@ -1409,7 +1409,7 @@
                 </a:solidFill>
                 <a:latin typeface="Nimbus Roman"/>
               </a:rPr>
-              <a:t>Pet- and rental-friendly strata includes maintenance, insurance, and water for simple, worry-free ownership.</a:t>
+              <a:t>Pet- and rental-friendly in Brocklehurst, close to schools, shopping, McArthur Island Park, and the scenic River’s Trail.</a:t>
             </a:r>
           </a:p>
         </p:txBody>
@@ -1491,7 +1491,7 @@
                 </a:solidFill>
                 <a:latin typeface="Nimbus Roman"/>
               </a:rPr>
-              <a:t>Live Comfortably on Happyvale Ave With Space, Light, and a Private Yard</a:t>
+              <a:t>Bright Brocklehurst Townhome With Greenbelt Views And Room To Grow</a:t>
             </a:r>
             <a:endParaRPr lang="en-CA" sz="1600" b="0" u="none" strike="noStrike">
               <a:solidFill>
@@ -1536,7 +1536,7 @@
                 </a:solidFill>
                 <a:latin typeface="Nimbus Roman"/>
               </a:rPr>
-              <a:t>$499,900.00</a:t>
+              <a:t>$499,900</a:t>
             </a:r>
             <a:endParaRPr lang="en-CA" sz="2000" b="0" u="none" strike="noStrike">
               <a:solidFill>
@@ -1596,7 +1596,7 @@
       </p:sp>
       <p:pic>
         <p:nvPicPr>
-          <p:cNvPr id="28" name="Picture 27" descr="DSC03381.jpg"/>
+          <p:cNvPr id="28" name="Picture 27" descr="DSC03355.jpg"/>
           <p:cNvPicPr>
             <a:picLocks noChangeAspect="1"/>
           </p:cNvPicPr>
@@ -1621,7 +1621,7 @@
       </p:pic>
       <p:pic>
         <p:nvPicPr>
-          <p:cNvPr id="29" name="Picture 28" descr="DSC03369.jpg"/>
+          <p:cNvPr id="29" name="Picture 28" descr="DSC03378.jpg"/>
           <p:cNvPicPr>
             <a:picLocks noChangeAspect="1"/>
           </p:cNvPicPr>
@@ -1646,7 +1646,7 @@
       </p:pic>
       <p:pic>
         <p:nvPicPr>
-          <p:cNvPr id="30" name="Picture 29" descr="DSC03442.jpg"/>
+          <p:cNvPr id="30" name="Picture 29" descr="DSC03349.jpg"/>
           <p:cNvPicPr>
             <a:picLocks noChangeAspect="1"/>
           </p:cNvPicPr>
@@ -1671,7 +1671,7 @@
       </p:pic>
       <p:pic>
         <p:nvPicPr>
-          <p:cNvPr id="31" name="Picture 30" descr="DSC03378.jpg"/>
+          <p:cNvPr id="31" name="Picture 30" descr="DSC03381.jpg"/>
           <p:cNvPicPr>
             <a:picLocks noChangeAspect="1"/>
           </p:cNvPicPr>
@@ -1696,7 +1696,7 @@
       </p:pic>
       <p:pic>
         <p:nvPicPr>
-          <p:cNvPr id="32" name="Picture 31" descr="DSC03355.jpg"/>
+          <p:cNvPr id="32" name="Picture 31" descr="DSC03372.jpg"/>
           <p:cNvPicPr>
             <a:picLocks noChangeAspect="1"/>
           </p:cNvPicPr>
@@ -1704,7 +1704,7 @@
         </p:nvPicPr>
         <p:blipFill>
           <a:blip r:embed="rId7"/>
-          <a:srcRect l="7442" r="7442"/>
+          <a:srcRect l="7541" r="7541"/>
           <a:stretch>
             <a:fillRect/>
           </a:stretch>
@@ -1721,7 +1721,7 @@
       </p:pic>
       <p:pic>
         <p:nvPicPr>
-          <p:cNvPr id="33" name="Picture 32" descr="DSC03341.jpg"/>
+          <p:cNvPr id="33" name="Picture 32" descr="DSC03343.jpg"/>
           <p:cNvPicPr>
             <a:picLocks noChangeAspect="1"/>
           </p:cNvPicPr>
@@ -1814,7 +1814,7 @@
                 </a:solidFill>
                 <a:latin typeface="Nimbus Roman"/>
               </a:rPr>
-              <a:t>Primary bedroom with a striking upholstered headboard and plenty of natural light.</a:t>
+              <a:t>Covered deck with room for grilling, dining, and enjoying the private backyard setting.</a:t>
             </a:r>
             <a:endParaRPr lang="en-CA" sz="1000" b="0" u="none" strike="noStrike">
               <a:solidFill>
@@ -1870,7 +1870,7 @@
                 </a:solidFill>
                 <a:latin typeface="Nimbus Roman"/>
               </a:rPr>
-              <a:t>Unwind on the deck while enjoying backyard views, with a built-in grill area.</a:t>
+              <a:t>Spacious primary bedroom featuring soft carpet, natural light, and a stylish accent wall.</a:t>
             </a:r>
             <a:endParaRPr lang="en-CA" sz="1000" b="0" u="none" strike="noStrike">
               <a:solidFill>
@@ -1926,7 +1926,7 @@
                 </a:solidFill>
                 <a:latin typeface="Nimbus Roman"/>
               </a:rPr>
-              <a:t>Clean, bright bathroom with a dual-sink vanity and a full shower/tub surround.</a:t>
+              <a:t>Flexible lower-level rec room suited to media, workouts, hobbies, or work-from-home needs.</a:t>
             </a:r>
             <a:endParaRPr lang="en-CA" sz="1000" b="0" u="none" strike="noStrike">
               <a:solidFill>
@@ -1982,7 +1982,7 @@
                 </a:solidFill>
                 <a:latin typeface="Nimbus Roman"/>
               </a:rPr>
-              <a:t>Attractive vanity bathroom with dual mirrors and a tidy, modern countertop finish.</a:t>
+              <a:t>Versatile bedroom works equally well for guests, a nursery, or a bright home office.</a:t>
             </a:r>
             <a:endParaRPr lang="en-CA" sz="1000" b="0" u="none" strike="noStrike">
               <a:solidFill>
@@ -2038,7 +2038,7 @@
                 </a:solidFill>
                 <a:latin typeface="Nimbus Roman"/>
               </a:rPr>
-              <a:t>Primary bedroom with calm neutral finishes, a comfortable layout, and great everyday.</a:t>
+              <a:t>Clean, bright full bathroom with natural light and a practical everyday layout.</a:t>
             </a:r>
             <a:endParaRPr lang="en-CA" sz="1000" b="0" u="none" strike="noStrike">
               <a:solidFill>
@@ -2317,7 +2317,203 @@
                 </a:solidFill>
                 <a:latin typeface="Nimbus Roman"/>
               </a:rPr>
-              <a:t>Fireplace:	Year Subst Reno2012Prop Condition</a:t>
+              <a:t>Includes:	Dishwasher</a:t>
+            </a:r>
+          </a:p>
+          <a:p>
+            <a:pPr>
+              <a:lnSpc>
+                <a:spcPct val="100000"/>
+              </a:lnSpc>
+              <a:spcBef>
+                <a:spcPts val="700"/>
+              </a:spcBef>
+              <a:spcAft>
+                <a:spcPts val="0"/>
+              </a:spcAft>
+              <a:tabLst>
+                <a:tab algn="l" pos="0"/>
+                <a:tab algn="l" pos="347040"/>
+                <a:tab algn="l" pos="898200"/>
+                <a:tab algn="l" pos="4027680"/>
+              </a:tabLst>
+            </a:pPr>
+            <a:r>
+              <a:rPr b="1" sz="1400">
+                <a:solidFill>
+                  <a:srgbClr val="000000"/>
+                </a:solidFill>
+                <a:latin typeface="Nimbus Roman"/>
+              </a:rPr>
+              <a:t>		Electric Range</a:t>
+            </a:r>
+          </a:p>
+          <a:p>
+            <a:pPr>
+              <a:lnSpc>
+                <a:spcPct val="100000"/>
+              </a:lnSpc>
+              <a:spcBef>
+                <a:spcPts val="700"/>
+              </a:spcBef>
+              <a:spcAft>
+                <a:spcPts val="0"/>
+              </a:spcAft>
+              <a:tabLst>
+                <a:tab algn="l" pos="0"/>
+                <a:tab algn="l" pos="347040"/>
+                <a:tab algn="l" pos="898200"/>
+                <a:tab algn="l" pos="4027680"/>
+              </a:tabLst>
+            </a:pPr>
+            <a:r>
+              <a:rPr b="1" sz="1400">
+                <a:solidFill>
+                  <a:srgbClr val="000000"/>
+                </a:solidFill>
+                <a:latin typeface="Nimbus Roman"/>
+              </a:rPr>
+              <a:t>		Refrigerator</a:t>
+            </a:r>
+          </a:p>
+          <a:p>
+            <a:pPr>
+              <a:lnSpc>
+                <a:spcPct val="100000"/>
+              </a:lnSpc>
+              <a:spcBef>
+                <a:spcPts val="700"/>
+              </a:spcBef>
+              <a:spcAft>
+                <a:spcPts val="0"/>
+              </a:spcAft>
+              <a:tabLst>
+                <a:tab algn="l" pos="0"/>
+                <a:tab algn="l" pos="347040"/>
+                <a:tab algn="l" pos="898200"/>
+                <a:tab algn="l" pos="4027680"/>
+              </a:tabLst>
+            </a:pPr>
+            <a:r>
+              <a:rPr b="1" sz="1400">
+                <a:solidFill>
+                  <a:srgbClr val="000000"/>
+                </a:solidFill>
+                <a:latin typeface="Nimbus Roman"/>
+              </a:rPr>
+              <a:t>		Washer/Dryer</a:t>
+            </a:r>
+          </a:p>
+          <a:p>
+            <a:pPr>
+              <a:lnSpc>
+                <a:spcPct val="100000"/>
+              </a:lnSpc>
+              <a:spcBef>
+                <a:spcPts val="700"/>
+              </a:spcBef>
+              <a:spcAft>
+                <a:spcPts val="0"/>
+              </a:spcAft>
+              <a:tabLst>
+                <a:tab algn="l" pos="0"/>
+                <a:tab algn="l" pos="347040"/>
+                <a:tab algn="l" pos="898200"/>
+                <a:tab algn="l" pos="4027680"/>
+              </a:tabLst>
+            </a:pPr>
+            <a:r>
+              <a:rPr b="1" sz="1400">
+                <a:solidFill>
+                  <a:srgbClr val="000000"/>
+                </a:solidFill>
+                <a:latin typeface="Nimbus Roman"/>
+              </a:rPr>
+              <a:t>		Deck</a:t>
+            </a:r>
+          </a:p>
+          <a:p>
+            <a:pPr>
+              <a:lnSpc>
+                <a:spcPct val="100000"/>
+              </a:lnSpc>
+              <a:spcBef>
+                <a:spcPts val="700"/>
+              </a:spcBef>
+              <a:spcAft>
+                <a:spcPts val="0"/>
+              </a:spcAft>
+              <a:tabLst>
+                <a:tab algn="l" pos="0"/>
+                <a:tab algn="l" pos="347040"/>
+                <a:tab algn="l" pos="898200"/>
+                <a:tab algn="l" pos="4027680"/>
+              </a:tabLst>
+            </a:pPr>
+            <a:r>
+              <a:rPr b="1" sz="1400">
+                <a:solidFill>
+                  <a:srgbClr val="000000"/>
+                </a:solidFill>
+                <a:latin typeface="Nimbus Roman"/>
+              </a:rPr>
+              <a:t>		Private Yard</a:t>
+            </a:r>
+          </a:p>
+          <a:p>
+            <a:pPr>
+              <a:lnSpc>
+                <a:spcPct val="100000"/>
+              </a:lnSpc>
+              <a:spcBef>
+                <a:spcPts val="700"/>
+              </a:spcBef>
+              <a:spcAft>
+                <a:spcPts val="0"/>
+              </a:spcAft>
+              <a:tabLst>
+                <a:tab algn="l" pos="0"/>
+                <a:tab algn="l" pos="347040"/>
+                <a:tab algn="l" pos="898200"/>
+                <a:tab algn="l" pos="4027680"/>
+              </a:tabLst>
+            </a:pPr>
+            <a:r>
+              <a:rPr b="1" sz="1400">
+                <a:solidFill>
+                  <a:srgbClr val="000000"/>
+                </a:solidFill>
+                <a:latin typeface="Nimbus Roman"/>
+              </a:rPr>
+              <a:t>		Pet Friendly</a:t>
+            </a:r>
+          </a:p>
+          <a:p>
+            <a:pPr>
+              <a:lnSpc>
+                <a:spcPct val="100000"/>
+              </a:lnSpc>
+              <a:spcBef>
+                <a:spcPts val="700"/>
+              </a:spcBef>
+              <a:spcAft>
+                <a:spcPts val="0"/>
+              </a:spcAft>
+              <a:tabLst>
+                <a:tab algn="l" pos="0"/>
+                <a:tab algn="l" pos="347040"/>
+                <a:tab algn="l" pos="898200"/>
+                <a:tab algn="l" pos="4027680"/>
+              </a:tabLst>
+            </a:pPr>
+            <a:r>
+              <a:rPr b="1" sz="1400">
+                <a:solidFill>
+                  <a:srgbClr val="000000"/>
+                </a:solidFill>
+                <a:latin typeface="Nimbus Roman"/>
+              </a:rPr>
+              <a:t>		Rental Friendly</a:t>
             </a:r>
           </a:p>
           <a:p>
@@ -2345,203 +2541,7 @@
                 </a:solidFill>
                 <a:latin typeface="Nimbus Roman"/>
               </a:rPr>
-              <a:t>Includes:	Dishwasher</a:t>
-            </a:r>
-          </a:p>
-          <a:p>
-            <a:pPr>
-              <a:lnSpc>
-                <a:spcPct val="100000"/>
-              </a:lnSpc>
-              <a:spcBef>
-                <a:spcPts val="700"/>
-              </a:spcBef>
-              <a:spcAft>
-                <a:spcPts val="0"/>
-              </a:spcAft>
-              <a:tabLst>
-                <a:tab algn="l" pos="0"/>
-                <a:tab algn="l" pos="347040"/>
-                <a:tab algn="l" pos="898200"/>
-                <a:tab algn="l" pos="4027680"/>
-              </a:tabLst>
-            </a:pPr>
-            <a:r>
-              <a:rPr b="1" sz="1400">
-                <a:solidFill>
-                  <a:srgbClr val="000000"/>
-                </a:solidFill>
-                <a:latin typeface="Nimbus Roman"/>
-              </a:rPr>
-              <a:t>		Electric Range</a:t>
-            </a:r>
-          </a:p>
-          <a:p>
-            <a:pPr>
-              <a:lnSpc>
-                <a:spcPct val="100000"/>
-              </a:lnSpc>
-              <a:spcBef>
-                <a:spcPts val="700"/>
-              </a:spcBef>
-              <a:spcAft>
-                <a:spcPts val="0"/>
-              </a:spcAft>
-              <a:tabLst>
-                <a:tab algn="l" pos="0"/>
-                <a:tab algn="l" pos="347040"/>
-                <a:tab algn="l" pos="898200"/>
-                <a:tab algn="l" pos="4027680"/>
-              </a:tabLst>
-            </a:pPr>
-            <a:r>
-              <a:rPr b="1" sz="1400">
-                <a:solidFill>
-                  <a:srgbClr val="000000"/>
-                </a:solidFill>
-                <a:latin typeface="Nimbus Roman"/>
-              </a:rPr>
-              <a:t>		Refrigerator</a:t>
-            </a:r>
-          </a:p>
-          <a:p>
-            <a:pPr>
-              <a:lnSpc>
-                <a:spcPct val="100000"/>
-              </a:lnSpc>
-              <a:spcBef>
-                <a:spcPts val="700"/>
-              </a:spcBef>
-              <a:spcAft>
-                <a:spcPts val="0"/>
-              </a:spcAft>
-              <a:tabLst>
-                <a:tab algn="l" pos="0"/>
-                <a:tab algn="l" pos="347040"/>
-                <a:tab algn="l" pos="898200"/>
-                <a:tab algn="l" pos="4027680"/>
-              </a:tabLst>
-            </a:pPr>
-            <a:r>
-              <a:rPr b="1" sz="1400">
-                <a:solidFill>
-                  <a:srgbClr val="000000"/>
-                </a:solidFill>
-                <a:latin typeface="Nimbus Roman"/>
-              </a:rPr>
-              <a:t>		Washer/Dryer</a:t>
-            </a:r>
-          </a:p>
-          <a:p>
-            <a:pPr>
-              <a:lnSpc>
-                <a:spcPct val="100000"/>
-              </a:lnSpc>
-              <a:spcBef>
-                <a:spcPts val="700"/>
-              </a:spcBef>
-              <a:spcAft>
-                <a:spcPts val="0"/>
-              </a:spcAft>
-              <a:tabLst>
-                <a:tab algn="l" pos="0"/>
-                <a:tab algn="l" pos="347040"/>
-                <a:tab algn="l" pos="898200"/>
-                <a:tab algn="l" pos="4027680"/>
-              </a:tabLst>
-            </a:pPr>
-            <a:r>
-              <a:rPr b="1" sz="1400">
-                <a:solidFill>
-                  <a:srgbClr val="000000"/>
-                </a:solidFill>
-                <a:latin typeface="Nimbus Roman"/>
-              </a:rPr>
-              <a:t>		Deck</a:t>
-            </a:r>
-          </a:p>
-          <a:p>
-            <a:pPr>
-              <a:lnSpc>
-                <a:spcPct val="100000"/>
-              </a:lnSpc>
-              <a:spcBef>
-                <a:spcPts val="700"/>
-              </a:spcBef>
-              <a:spcAft>
-                <a:spcPts val="0"/>
-              </a:spcAft>
-              <a:tabLst>
-                <a:tab algn="l" pos="0"/>
-                <a:tab algn="l" pos="347040"/>
-                <a:tab algn="l" pos="898200"/>
-                <a:tab algn="l" pos="4027680"/>
-              </a:tabLst>
-            </a:pPr>
-            <a:r>
-              <a:rPr b="1" sz="1400">
-                <a:solidFill>
-                  <a:srgbClr val="000000"/>
-                </a:solidFill>
-                <a:latin typeface="Nimbus Roman"/>
-              </a:rPr>
-              <a:t>		Private Yard</a:t>
-            </a:r>
-          </a:p>
-          <a:p>
-            <a:pPr>
-              <a:lnSpc>
-                <a:spcPct val="100000"/>
-              </a:lnSpc>
-              <a:spcBef>
-                <a:spcPts val="700"/>
-              </a:spcBef>
-              <a:spcAft>
-                <a:spcPts val="0"/>
-              </a:spcAft>
-              <a:tabLst>
-                <a:tab algn="l" pos="0"/>
-                <a:tab algn="l" pos="347040"/>
-                <a:tab algn="l" pos="898200"/>
-                <a:tab algn="l" pos="4027680"/>
-              </a:tabLst>
-            </a:pPr>
-            <a:r>
-              <a:rPr b="1" sz="1400">
-                <a:solidFill>
-                  <a:srgbClr val="000000"/>
-                </a:solidFill>
-                <a:latin typeface="Nimbus Roman"/>
-              </a:rPr>
-              <a:t>		Pet Friendly</a:t>
-            </a:r>
-          </a:p>
-          <a:p>
-            <a:pPr>
-              <a:lnSpc>
-                <a:spcPct val="100000"/>
-              </a:lnSpc>
-              <a:spcBef>
-                <a:spcPts val="700"/>
-              </a:spcBef>
-              <a:spcAft>
-                <a:spcPts val="0"/>
-              </a:spcAft>
-              <a:tabLst>
-                <a:tab algn="l" pos="0"/>
-                <a:tab algn="l" pos="347040"/>
-                <a:tab algn="l" pos="898200"/>
-                <a:tab algn="l" pos="4027680"/>
-              </a:tabLst>
-            </a:pPr>
-            <a:r>
-              <a:rPr b="1" sz="1400">
-                <a:solidFill>
-                  <a:srgbClr val="000000"/>
-                </a:solidFill>
-                <a:latin typeface="Nimbus Roman"/>
-              </a:rPr>
-              <a:t>		Rental Friendly</a:t>
+              <a:t>Age:		42 Years</a:t>
             </a:r>
           </a:p>
           <a:p>
@@ -2613,7 +2613,7 @@
                 </a:solidFill>
                 <a:latin typeface="Nimbus Roman"/>
               </a:rPr>
-              <a:t>Home (1,721 sq. ft.)</a:t>
+              <a:t>Main &amp; Upper (1,046 sq. ft.)</a:t>
             </a:r>
             <a:endParaRPr lang="en-CA" sz="1400" b="0" u="none" strike="noStrike">
               <a:solidFill>
@@ -2736,7 +2736,7 @@
                 </a:solidFill>
                 <a:latin typeface="Nimbus Roman"/>
               </a:rPr>
-              <a:t>Bedroom	12' 7" x 12' 9" 8' 9" x 9' 9"</a:t>
+              <a:t>Bedroom	12' 7" x 12'</a:t>
             </a:r>
           </a:p>
           <a:p>
@@ -2755,7 +2755,7 @@
                 </a:solidFill>
                 <a:latin typeface="Nimbus Roman"/>
               </a:rPr>
-              <a:t>Bathroom - Full	4 PCE</a:t>
+              <a:t>Bathroom	4 piece</a:t>
             </a:r>
           </a:p>
           <a:p>
@@ -2774,7 +2774,7 @@
                 </a:solidFill>
                 <a:latin typeface="Nimbus Roman"/>
               </a:rPr>
-              <a:t>Ensuite - Half	2 PCE</a:t>
+              <a:t>Ensuite	2 piece</a:t>
             </a:r>
           </a:p>
           <a:p>
@@ -2793,9 +2793,29 @@
                 </a:solidFill>
                 <a:latin typeface="Nimbus Roman"/>
               </a:rPr>
-              <a:t>Laundry	9' 3" x 3' </a:t>
-            </a:r>
-          </a:p>
+              <a:t>Laundry	9' 3" x 3'</a:t>
+            </a:r>
+          </a:p>
+          <a:p>
+            <a:pPr algn="ctr">
+              <a:lnSpc>
+                <a:spcPct val="150000"/>
+              </a:lnSpc>
+              <a:tabLst>
+                <a:tab algn="l" pos="1619280"/>
+              </a:tabLst>
+            </a:pPr>
+            <a:r>
+              <a:rPr b="1" sz="1400" i="1">
+                <a:solidFill>
+                  <a:srgbClr val="000000"/>
+                </a:solidFill>
+                <a:latin typeface="Nimbus Roman"/>
+              </a:rPr>
+              <a:t>Lower (675 sq. ft.)</a:t>
+            </a:r>
+          </a:p>
+          <a:p/>
           <a:p>
             <a:pPr>
               <a:lnSpc>
@@ -2812,7 +2832,7 @@
                 </a:solidFill>
                 <a:latin typeface="Nimbus Roman"/>
               </a:rPr>
-              <a:t>Family Room	19' 3" x 12' 6"</a:t>
+              <a:t>Bedroom	9' 8" x 9' 9"</a:t>
             </a:r>
           </a:p>
           <a:p>
@@ -2831,7 +2851,26 @@
                 </a:solidFill>
                 <a:latin typeface="Nimbus Roman"/>
               </a:rPr>
-              <a:t>Storage	18' 9" x 6' </a:t>
+              <a:t>Family Room	19' 3" x 12' 6"</a:t>
+            </a:r>
+          </a:p>
+          <a:p>
+            <a:pPr>
+              <a:lnSpc>
+                <a:spcPct val="150000"/>
+              </a:lnSpc>
+              <a:tabLst>
+                <a:tab algn="l" pos="1619280"/>
+              </a:tabLst>
+            </a:pPr>
+            <a:r>
+              <a:rPr b="1" sz="1400">
+                <a:solidFill>
+                  <a:srgbClr val="000000"/>
+                </a:solidFill>
+                <a:latin typeface="Nimbus Roman"/>
+              </a:rPr>
+              <a:t>Storage	18' 9" x 6'</a:t>
             </a:r>
           </a:p>
         </p:txBody>
@@ -2883,7 +2922,7 @@
       </p:sp>
       <p:pic>
         <p:nvPicPr>
-          <p:cNvPr id="43" name="Picture 42" descr="DSC03411.jpg"/>
+          <p:cNvPr id="43" name="Picture 42" descr="DSC03388.jpg"/>
           <p:cNvPicPr>
             <a:picLocks noChangeAspect="1"/>
           </p:cNvPicPr>
@@ -2891,7 +2930,7 @@
         </p:nvPicPr>
         <p:blipFill>
           <a:blip r:embed="rId3"/>
-          <a:srcRect l="6919" r="6919"/>
+          <a:srcRect l="6818" r="6818"/>
           <a:stretch>
             <a:fillRect/>
           </a:stretch>
@@ -2908,7 +2947,7 @@
       </p:pic>
       <p:pic>
         <p:nvPicPr>
-          <p:cNvPr id="44" name="Picture 43" descr="DSC03388.jpg"/>
+          <p:cNvPr id="44" name="Picture 43" descr="DSC03411.jpg"/>
           <p:cNvPicPr>
             <a:picLocks noChangeAspect="1"/>
           </p:cNvPicPr>
@@ -2916,7 +2955,7 @@
         </p:nvPicPr>
         <p:blipFill>
           <a:blip r:embed="rId4"/>
-          <a:srcRect l="8510" r="8510"/>
+          <a:srcRect l="8607" r="8607"/>
           <a:stretch>
             <a:fillRect/>
           </a:stretch>
@@ -2933,7 +2972,7 @@
       </p:pic>
       <p:pic>
         <p:nvPicPr>
-          <p:cNvPr id="45" name="Picture 44" descr="DSC03399.jpg"/>
+          <p:cNvPr id="45" name="Picture 44" descr="DSC03428.jpg"/>
           <p:cNvPicPr>
             <a:picLocks noChangeAspect="1"/>
           </p:cNvPicPr>
@@ -2941,7 +2980,7 @@
         </p:nvPicPr>
         <p:blipFill>
           <a:blip r:embed="rId5"/>
-          <a:srcRect l="8910" r="8910"/>
+          <a:srcRect l="8814" r="8814"/>
           <a:stretch>
             <a:fillRect/>
           </a:stretch>
@@ -2958,7 +2997,7 @@
       </p:pic>
       <p:pic>
         <p:nvPicPr>
-          <p:cNvPr id="46" name="Picture 45" descr="DSC03434.jpg"/>
+          <p:cNvPr id="46" name="Picture 45" descr="DSC03399.jpg"/>
           <p:cNvPicPr>
             <a:picLocks noChangeAspect="1"/>
           </p:cNvPicPr>
@@ -2983,7 +3022,7 @@
       </p:pic>
       <p:pic>
         <p:nvPicPr>
-          <p:cNvPr id="47" name="Picture 46" descr="DSC03417.jpg"/>
+          <p:cNvPr id="47" name="Picture 46" descr="DSC03408.jpg"/>
           <p:cNvPicPr>
             <a:picLocks noChangeAspect="1"/>
           </p:cNvPicPr>

--- a/test_output.pptx
+++ b/test_output.pptx
@@ -938,7 +938,7 @@
                 </a:solidFill>
                 <a:latin typeface="Nimbus Roman"/>
               </a:rPr>
-              <a:t>Open green outlook with mountain views, adding a peaceful backdrop to everyday living.</a:t>
+              <a:t>Fenced backyard with mature shade and a peaceful setting backing onto open green space.</a:t>
             </a:r>
             <a:endParaRPr lang="en-CA" sz="1000" b="0" u="none" strike="noStrike">
               <a:solidFill>
@@ -994,7 +994,7 @@
                 </a:solidFill>
                 <a:latin typeface="Nimbus Roman"/>
               </a:rPr>
-              <a:t>Dining area connects seamlessly to the kitchen and opens directly onto the sunny deck.</a:t>
+              <a:t>Open green space and mountain views extend the sense of privacy behind the home.</a:t>
             </a:r>
             <a:endParaRPr lang="en-CA" sz="1000" b="0" u="none" strike="noStrike">
               <a:solidFill>
@@ -1050,7 +1050,7 @@
                 </a:solidFill>
                 <a:latin typeface="Nimbus Roman"/>
               </a:rPr>
-              <a:t>Bright kitchen with peninsula seating, ample prep space, and leafy views from the window.</a:t>
+              <a:t>Bright dining area connects seamlessly to the deck for easy everyday indoor-outdoor living.</a:t>
             </a:r>
             <a:endParaRPr lang="en-CA" sz="1000" b="0" u="none" strike="noStrike">
               <a:solidFill>
@@ -1106,7 +1106,7 @@
                 </a:solidFill>
                 <a:latin typeface="Nimbus Roman"/>
               </a:rPr>
-              <a:t>Fenced backyard with mature shade, open lawn, and a pleasant green outlook beyond.</a:t>
+              <a:t>Light-filled kitchen offers efficient workspace and pleasant outlooks to the greenery.</a:t>
             </a:r>
             <a:endParaRPr lang="en-CA" sz="1000" b="0" u="none" strike="noStrike">
               <a:solidFill>
@@ -1162,7 +1162,7 @@
                 </a:solidFill>
                 <a:latin typeface="Nimbus Roman"/>
               </a:rPr>
-              <a:t>Welcoming living room filled with natural light from the large front-facing window.</a:t>
+              <a:t>Inviting living room filled with natural light and comfortable space to gather or unwind.</a:t>
             </a:r>
             <a:endParaRPr lang="en-CA" sz="1000" b="0" u="none" strike="noStrike">
               <a:solidFill>
@@ -1256,6 +1256,9 @@
           </a:bodyPr>
           <a:p>
             <a:pPr marL="216000" indent="-216000">
+              <a:lnSpc>
+                <a:spcPct val="100000"/>
+              </a:lnSpc>
               <a:spcBef>
                 <a:spcPts val="0"/>
               </a:spcBef>
@@ -1276,7 +1279,7 @@
                 </a:solidFill>
                 <a:latin typeface="Nimbus Roman"/>
               </a:rPr>
-              <a:t>Bright and functional cathedral-entry townhome offering over 1,700 sq. ft. across a flexible three-level split design.</a:t>
+              <a:t>This bright cathedral-entry townhome offers more than 1,700 square feet of flexible living space in a convenient Brocklehurst location.</a:t>
             </a:r>
             <a:endParaRPr lang="en-CA" sz="1100" b="0" u="none" strike="noStrike">
               <a:solidFill>
@@ -1289,8 +1292,11 @@
           </a:p>
           <a:p>
             <a:pPr marL="216000" indent="-216000">
+              <a:lnSpc>
+                <a:spcPct val="100000"/>
+              </a:lnSpc>
               <a:spcBef>
-                <a:spcPts val="600"/>
+                <a:spcPts val="1800"/>
               </a:spcBef>
               <a:spcAft>
                 <a:spcPts val="0"/>
@@ -1309,13 +1315,16 @@
                 </a:solidFill>
                 <a:latin typeface="Nimbus Roman"/>
               </a:rPr>
-              <a:t>Thoughtfully renovated in 2012 with updates to the kitchen, flooring, appliances, windows, roof, lighting, decks, and railings.</a:t>
+              <a:t>Thoughtful 2012 renovations updated the kitchen, flooring, appliances, windows, roof, light fixtures, decks, and railings for lasting appeal.</a:t>
             </a:r>
           </a:p>
           <a:p>
             <a:pPr marL="216000" indent="-216000">
+              <a:lnSpc>
+                <a:spcPct val="100000"/>
+              </a:lnSpc>
               <a:spcBef>
-                <a:spcPts val="600"/>
+                <a:spcPts val="1800"/>
               </a:spcBef>
               <a:spcAft>
                 <a:spcPts val="0"/>
@@ -1334,13 +1343,16 @@
                 </a:solidFill>
                 <a:latin typeface="Nimbus Roman"/>
               </a:rPr>
-              <a:t>The sunny dining area opens to a sundeck overlooking the fenced yard and peaceful green space beyond.</a:t>
+              <a:t>The sunny dining area opens to a covered sundeck overlooking the fenced yard and peaceful green space beyond.</a:t>
             </a:r>
           </a:p>
           <a:p>
             <a:pPr marL="216000" indent="-216000">
+              <a:lnSpc>
+                <a:spcPct val="100000"/>
+              </a:lnSpc>
               <a:spcBef>
-                <a:spcPts val="600"/>
+                <a:spcPts val="1800"/>
               </a:spcBef>
               <a:spcAft>
                 <a:spcPts val="0"/>
@@ -1359,13 +1371,16 @@
                 </a:solidFill>
                 <a:latin typeface="Nimbus Roman"/>
               </a:rPr>
-              <a:t>A versatile layout includes main floor laundry, a spacious family room, and a lower-level bedroom ideal for guests or a home office.</a:t>
+              <a:t>A spacious family room and basement bedroom provide versatile options for guests, a home office, hobbies, or recreation.</a:t>
             </a:r>
           </a:p>
           <a:p>
             <a:pPr marL="216000" indent="-216000">
+              <a:lnSpc>
+                <a:spcPct val="100000"/>
+              </a:lnSpc>
               <a:spcBef>
-                <a:spcPts val="600"/>
+                <a:spcPts val="1800"/>
               </a:spcBef>
               <a:spcAft>
                 <a:spcPts val="0"/>
@@ -1384,13 +1399,16 @@
                 </a:solidFill>
                 <a:latin typeface="Nimbus Roman"/>
               </a:rPr>
-              <a:t>The double attached garage provides workshop potential and rear yard access, complemented by driveway parking and an assigned stall.</a:t>
+              <a:t>The double attached garage includes workshop space and rear yard pass-through access, complemented by four total parking spaces.</a:t>
             </a:r>
           </a:p>
           <a:p>
             <a:pPr marL="216000" indent="-216000">
+              <a:lnSpc>
+                <a:spcPct val="100000"/>
+              </a:lnSpc>
               <a:spcBef>
-                <a:spcPts val="600"/>
+                <a:spcPts val="1800"/>
               </a:spcBef>
               <a:spcAft>
                 <a:spcPts val="0"/>
@@ -1409,7 +1427,7 @@
                 </a:solidFill>
                 <a:latin typeface="Nimbus Roman"/>
               </a:rPr>
-              <a:t>Pet- and rental-friendly in Brocklehurst, close to schools, shopping, McArthur Island Park, and the scenic River’s Trail.</a:t>
+              <a:t>Pet- and rental-friendly, this home is close to schools, shopping, McArthur Island Park, and the scenic River’s Trail.</a:t>
             </a:r>
           </a:p>
         </p:txBody>
@@ -1491,7 +1509,7 @@
                 </a:solidFill>
                 <a:latin typeface="Nimbus Roman"/>
               </a:rPr>
-              <a:t>Bright Brocklehurst Townhome With Greenbelt Views And Room To Grow</a:t>
+              <a:t>Bright Brocklehurst Living Backing Onto Green Space</a:t>
             </a:r>
             <a:endParaRPr lang="en-CA" sz="1600" b="0" u="none" strike="noStrike">
               <a:solidFill>
@@ -1596,7 +1614,7 @@
       </p:sp>
       <p:pic>
         <p:nvPicPr>
-          <p:cNvPr id="28" name="Picture 27" descr="DSC03355.jpg"/>
+          <p:cNvPr id="28" name="Picture 27" descr="DSC03349.jpg"/>
           <p:cNvPicPr>
             <a:picLocks noChangeAspect="1"/>
           </p:cNvPicPr>
@@ -1621,7 +1639,7 @@
       </p:pic>
       <p:pic>
         <p:nvPicPr>
-          <p:cNvPr id="29" name="Picture 28" descr="DSC03378.jpg"/>
+          <p:cNvPr id="29" name="Picture 28" descr="DSC03355.jpg"/>
           <p:cNvPicPr>
             <a:picLocks noChangeAspect="1"/>
           </p:cNvPicPr>
@@ -1646,7 +1664,7 @@
       </p:pic>
       <p:pic>
         <p:nvPicPr>
-          <p:cNvPr id="30" name="Picture 29" descr="DSC03349.jpg"/>
+          <p:cNvPr id="30" name="Picture 29" descr="DSC03381.jpg"/>
           <p:cNvPicPr>
             <a:picLocks noChangeAspect="1"/>
           </p:cNvPicPr>
@@ -1671,7 +1689,7 @@
       </p:pic>
       <p:pic>
         <p:nvPicPr>
-          <p:cNvPr id="31" name="Picture 30" descr="DSC03381.jpg"/>
+          <p:cNvPr id="31" name="Picture 30" descr="DSC03378.jpg"/>
           <p:cNvPicPr>
             <a:picLocks noChangeAspect="1"/>
           </p:cNvPicPr>
@@ -1814,7 +1832,7 @@
                 </a:solidFill>
                 <a:latin typeface="Nimbus Roman"/>
               </a:rPr>
-              <a:t>Covered deck with room for grilling, dining, and enjoying the private backyard setting.</a:t>
+              <a:t>Covered deck offers room to dine, grill, and relax while overlooking mature trees.</a:t>
             </a:r>
             <a:endParaRPr lang="en-CA" sz="1000" b="0" u="none" strike="noStrike">
               <a:solidFill>
@@ -1870,7 +1888,7 @@
                 </a:solidFill>
                 <a:latin typeface="Nimbus Roman"/>
               </a:rPr>
-              <a:t>Spacious primary bedroom featuring soft carpet, natural light, and a stylish accent wall.</a:t>
+              <a:t>Spacious primary bedroom features soft finishes and abundant natural light for a calm.</a:t>
             </a:r>
             <a:endParaRPr lang="en-CA" sz="1000" b="0" u="none" strike="noStrike">
               <a:solidFill>
@@ -1926,7 +1944,7 @@
                 </a:solidFill>
                 <a:latin typeface="Nimbus Roman"/>
               </a:rPr>
-              <a:t>Flexible lower-level rec room suited to media, workouts, hobbies, or work-from-home needs.</a:t>
+              <a:t>Full bathroom with natural light and a clean, functional design for daily ease.</a:t>
             </a:r>
             <a:endParaRPr lang="en-CA" sz="1000" b="0" u="none" strike="noStrike">
               <a:solidFill>
@@ -1982,7 +2000,7 @@
                 </a:solidFill>
                 <a:latin typeface="Nimbus Roman"/>
               </a:rPr>
-              <a:t>Versatile bedroom works equally well for guests, a nursery, or a bright home office.</a:t>
+              <a:t>Large lower-level rec room offers flexible space for work, fitness, media, or play.</a:t>
             </a:r>
             <a:endParaRPr lang="en-CA" sz="1000" b="0" u="none" strike="noStrike">
               <a:solidFill>
@@ -2038,7 +2056,7 @@
                 </a:solidFill>
                 <a:latin typeface="Nimbus Roman"/>
               </a:rPr>
-              <a:t>Clean, bright full bathroom with natural light and a practical everyday layout.</a:t>
+              <a:t>Generous bedroom with soft natural tones and convenient access nearby for added comfort.</a:t>
             </a:r>
             <a:endParaRPr lang="en-CA" sz="1000" b="0" u="none" strike="noStrike">
               <a:solidFill>
@@ -2233,7 +2251,7 @@
                 </a:solidFill>
                 <a:latin typeface="Nimbus Roman"/>
               </a:rPr>
-              <a:t>Style:		Cathedral Entry</a:t>
+              <a:t>Style:	Cathedral Entry</a:t>
             </a:r>
           </a:p>
           <a:p>
@@ -2541,35 +2559,7 @@
                 </a:solidFill>
                 <a:latin typeface="Nimbus Roman"/>
               </a:rPr>
-              <a:t>Age:		42 Years</a:t>
-            </a:r>
-          </a:p>
-          <a:p>
-            <a:pPr>
-              <a:lnSpc>
-                <a:spcPct val="100000"/>
-              </a:lnSpc>
-              <a:spcBef>
-                <a:spcPts val="2100"/>
-              </a:spcBef>
-              <a:spcAft>
-                <a:spcPts val="0"/>
-              </a:spcAft>
-              <a:tabLst>
-                <a:tab algn="l" pos="0"/>
-                <a:tab algn="l" pos="347040"/>
-                <a:tab algn="l" pos="898200"/>
-                <a:tab algn="l" pos="4027680"/>
-              </a:tabLst>
-            </a:pPr>
-            <a:r>
-              <a:rPr b="1" sz="1400">
-                <a:solidFill>
-                  <a:srgbClr val="000000"/>
-                </a:solidFill>
-                <a:latin typeface="Nimbus Roman"/>
-              </a:rPr>
-              <a:t>Taxes:		$3,145 (2025)</a:t>
+              <a:t>Taxes:	$3,145 (2025)</a:t>
             </a:r>
           </a:p>
         </p:txBody>
@@ -2597,34 +2587,6 @@
           <a:bodyPr lIns="90000" rIns="90000" tIns="45000" bIns="45000" anchor="t">
             <a:spAutoFit/>
           </a:bodyPr>
-          <a:p>
-            <a:pPr algn="ctr">
-              <a:lnSpc>
-                <a:spcPct val="150000"/>
-              </a:lnSpc>
-              <a:tabLst>
-                <a:tab algn="l" pos="1619280"/>
-              </a:tabLst>
-            </a:pPr>
-            <a:r>
-              <a:rPr b="1" sz="1400" i="1">
-                <a:solidFill>
-                  <a:srgbClr val="000000"/>
-                </a:solidFill>
-                <a:latin typeface="Nimbus Roman"/>
-              </a:rPr>
-              <a:t>Main &amp; Upper (1,046 sq. ft.)</a:t>
-            </a:r>
-            <a:endParaRPr lang="en-CA" sz="1400" b="0" u="none" strike="noStrike">
-              <a:solidFill>
-                <a:srgbClr val="000000"/>
-              </a:solidFill>
-              <a:effectLst/>
-              <a:uFillTx/>
-              <a:latin typeface="Arial"/>
-            </a:endParaRPr>
-          </a:p>
-          <a:p/>
           <a:p>
             <a:pPr>
               <a:lnSpc>
@@ -2634,244 +2596,14 @@
                 <a:tab algn="l" pos="1619280"/>
               </a:tabLst>
             </a:pPr>
-            <a:r>
-              <a:rPr b="1" sz="1400">
-                <a:solidFill>
-                  <a:srgbClr val="000000"/>
-                </a:solidFill>
-                <a:latin typeface="Nimbus Roman"/>
-              </a:rPr>
-              <a:t>Kitchen	10' 4" x 13' 11"</a:t>
-            </a:r>
-          </a:p>
-          <a:p>
-            <a:pPr>
-              <a:lnSpc>
-                <a:spcPct val="150000"/>
-              </a:lnSpc>
-              <a:tabLst>
-                <a:tab algn="l" pos="1619280"/>
-              </a:tabLst>
-            </a:pPr>
-            <a:r>
-              <a:rPr b="1" sz="1400">
-                <a:solidFill>
-                  <a:srgbClr val="000000"/>
-                </a:solidFill>
-                <a:latin typeface="Nimbus Roman"/>
-              </a:rPr>
-              <a:t>Living Room	14' 4" x 14' 9"</a:t>
-            </a:r>
-          </a:p>
-          <a:p>
-            <a:pPr>
-              <a:lnSpc>
-                <a:spcPct val="150000"/>
-              </a:lnSpc>
-              <a:tabLst>
-                <a:tab algn="l" pos="1619280"/>
-              </a:tabLst>
-            </a:pPr>
-            <a:r>
-              <a:rPr b="1" sz="1400">
-                <a:solidFill>
-                  <a:srgbClr val="000000"/>
-                </a:solidFill>
-                <a:latin typeface="Nimbus Roman"/>
-              </a:rPr>
-              <a:t>Dining Room	9' 2" x 8' 9"</a:t>
-            </a:r>
-          </a:p>
-          <a:p>
-            <a:pPr>
-              <a:lnSpc>
-                <a:spcPct val="150000"/>
-              </a:lnSpc>
-              <a:tabLst>
-                <a:tab algn="l" pos="1619280"/>
-              </a:tabLst>
-            </a:pPr>
-            <a:r>
-              <a:rPr b="1" sz="1400">
-                <a:solidFill>
-                  <a:srgbClr val="000000"/>
-                </a:solidFill>
-                <a:latin typeface="Nimbus Roman"/>
-              </a:rPr>
-              <a:t>Primary Bedroom	11' 8" x 10' 6"</a:t>
-            </a:r>
-          </a:p>
-          <a:p>
-            <a:pPr>
-              <a:lnSpc>
-                <a:spcPct val="150000"/>
-              </a:lnSpc>
-              <a:tabLst>
-                <a:tab algn="l" pos="1619280"/>
-              </a:tabLst>
-            </a:pPr>
-            <a:r>
-              <a:rPr b="1" sz="1400">
-                <a:solidFill>
-                  <a:srgbClr val="000000"/>
-                </a:solidFill>
-                <a:latin typeface="Nimbus Roman"/>
-              </a:rPr>
-              <a:t>Bedroom	8' 3" x 8' 9"</a:t>
-            </a:r>
-          </a:p>
-          <a:p>
-            <a:pPr>
-              <a:lnSpc>
-                <a:spcPct val="150000"/>
-              </a:lnSpc>
-              <a:tabLst>
-                <a:tab algn="l" pos="1619280"/>
-              </a:tabLst>
-            </a:pPr>
-            <a:r>
-              <a:rPr b="1" sz="1400">
-                <a:solidFill>
-                  <a:srgbClr val="000000"/>
-                </a:solidFill>
-                <a:latin typeface="Nimbus Roman"/>
-              </a:rPr>
-              <a:t>Bedroom	12' 7" x 12'</a:t>
-            </a:r>
-          </a:p>
-          <a:p>
-            <a:pPr>
-              <a:lnSpc>
-                <a:spcPct val="150000"/>
-              </a:lnSpc>
-              <a:tabLst>
-                <a:tab algn="l" pos="1619280"/>
-              </a:tabLst>
-            </a:pPr>
-            <a:r>
-              <a:rPr b="1" sz="1400">
-                <a:solidFill>
-                  <a:srgbClr val="000000"/>
-                </a:solidFill>
-                <a:latin typeface="Nimbus Roman"/>
-              </a:rPr>
-              <a:t>Bathroom	4 piece</a:t>
-            </a:r>
-          </a:p>
-          <a:p>
-            <a:pPr>
-              <a:lnSpc>
-                <a:spcPct val="150000"/>
-              </a:lnSpc>
-              <a:tabLst>
-                <a:tab algn="l" pos="1619280"/>
-              </a:tabLst>
-            </a:pPr>
-            <a:r>
-              <a:rPr b="1" sz="1400">
-                <a:solidFill>
-                  <a:srgbClr val="000000"/>
-                </a:solidFill>
-                <a:latin typeface="Nimbus Roman"/>
-              </a:rPr>
-              <a:t>Ensuite	2 piece</a:t>
-            </a:r>
-          </a:p>
-          <a:p>
-            <a:pPr>
-              <a:lnSpc>
-                <a:spcPct val="150000"/>
-              </a:lnSpc>
-              <a:tabLst>
-                <a:tab algn="l" pos="1619280"/>
-              </a:tabLst>
-            </a:pPr>
-            <a:r>
-              <a:rPr b="1" sz="1400">
-                <a:solidFill>
-                  <a:srgbClr val="000000"/>
-                </a:solidFill>
-                <a:latin typeface="Nimbus Roman"/>
-              </a:rPr>
-              <a:t>Laundry	9' 3" x 3'</a:t>
-            </a:r>
-          </a:p>
-          <a:p>
-            <a:pPr algn="ctr">
-              <a:lnSpc>
-                <a:spcPct val="150000"/>
-              </a:lnSpc>
-              <a:tabLst>
-                <a:tab algn="l" pos="1619280"/>
-              </a:tabLst>
-            </a:pPr>
-            <a:r>
-              <a:rPr b="1" sz="1400" i="1">
-                <a:solidFill>
-                  <a:srgbClr val="000000"/>
-                </a:solidFill>
-                <a:latin typeface="Nimbus Roman"/>
-              </a:rPr>
-              <a:t>Lower (675 sq. ft.)</a:t>
-            </a:r>
-          </a:p>
-          <a:p/>
-          <a:p>
-            <a:pPr>
-              <a:lnSpc>
-                <a:spcPct val="150000"/>
-              </a:lnSpc>
-              <a:tabLst>
-                <a:tab algn="l" pos="1619280"/>
-              </a:tabLst>
-            </a:pPr>
-            <a:r>
-              <a:rPr b="1" sz="1400">
-                <a:solidFill>
-                  <a:srgbClr val="000000"/>
-                </a:solidFill>
-                <a:latin typeface="Nimbus Roman"/>
-              </a:rPr>
-              <a:t>Bedroom	9' 8" x 9' 9"</a:t>
-            </a:r>
-          </a:p>
-          <a:p>
-            <a:pPr>
-              <a:lnSpc>
-                <a:spcPct val="150000"/>
-              </a:lnSpc>
-              <a:tabLst>
-                <a:tab algn="l" pos="1619280"/>
-              </a:tabLst>
-            </a:pPr>
-            <a:r>
-              <a:rPr b="1" sz="1400">
-                <a:solidFill>
-                  <a:srgbClr val="000000"/>
-                </a:solidFill>
-                <a:latin typeface="Nimbus Roman"/>
-              </a:rPr>
-              <a:t>Family Room	19' 3" x 12' 6"</a:t>
-            </a:r>
-          </a:p>
-          <a:p>
-            <a:pPr>
-              <a:lnSpc>
-                <a:spcPct val="150000"/>
-              </a:lnSpc>
-              <a:tabLst>
-                <a:tab algn="l" pos="1619280"/>
-              </a:tabLst>
-            </a:pPr>
-            <a:r>
-              <a:rPr b="1" sz="1400">
-                <a:solidFill>
-                  <a:srgbClr val="000000"/>
-                </a:solidFill>
-                <a:latin typeface="Nimbus Roman"/>
-              </a:rPr>
-              <a:t>Storage	18' 9" x 6'</a:t>
-            </a:r>
+            <a:endParaRPr lang="en-CA" sz="1400" b="0" u="none" strike="noStrike">
+              <a:solidFill>
+                <a:srgbClr val="000000"/>
+              </a:solidFill>
+              <a:effectLst/>
+              <a:uFillTx/>
+              <a:latin typeface="Arial"/>
+            </a:endParaRPr>
           </a:p>
         </p:txBody>
       </p:sp>
@@ -2972,7 +2704,7 @@
       </p:pic>
       <p:pic>
         <p:nvPicPr>
-          <p:cNvPr id="45" name="Picture 44" descr="DSC03428.jpg"/>
+          <p:cNvPr id="45" name="Picture 44" descr="DSC03399.jpg"/>
           <p:cNvPicPr>
             <a:picLocks noChangeAspect="1"/>
           </p:cNvPicPr>
@@ -2980,7 +2712,7 @@
         </p:nvPicPr>
         <p:blipFill>
           <a:blip r:embed="rId5"/>
-          <a:srcRect l="8814" r="8814"/>
+          <a:srcRect l="8910" r="8910"/>
           <a:stretch>
             <a:fillRect/>
           </a:stretch>
@@ -2997,7 +2729,7 @@
       </p:pic>
       <p:pic>
         <p:nvPicPr>
-          <p:cNvPr id="46" name="Picture 45" descr="DSC03399.jpg"/>
+          <p:cNvPr id="46" name="Picture 45" descr="DSC03423.jpg"/>
           <p:cNvPicPr>
             <a:picLocks noChangeAspect="1"/>
           </p:cNvPicPr>
@@ -3005,7 +2737,7 @@
         </p:nvPicPr>
         <p:blipFill>
           <a:blip r:embed="rId6"/>
-          <a:srcRect l="13800" r="13800"/>
+          <a:srcRect l="13715" r="13715"/>
           <a:stretch>
             <a:fillRect/>
           </a:stretch>
@@ -3022,7 +2754,7 @@
       </p:pic>
       <p:pic>
         <p:nvPicPr>
-          <p:cNvPr id="47" name="Picture 46" descr="DSC03408.jpg"/>
+          <p:cNvPr id="47" name="Picture 46" descr="DSC03428.jpg"/>
           <p:cNvPicPr>
             <a:picLocks noChangeAspect="1"/>
           </p:cNvPicPr>
@@ -3030,7 +2762,7 @@
         </p:nvPicPr>
         <p:blipFill>
           <a:blip r:embed="rId7"/>
-          <a:srcRect l="6917" r="6917"/>
+          <a:srcRect l="6816" r="6816"/>
           <a:stretch>
             <a:fillRect/>
           </a:stretch>

--- a/test_output.pptx
+++ b/test_output.pptx
@@ -938,7 +938,7 @@
                 </a:solidFill>
                 <a:latin typeface="Nimbus Roman"/>
               </a:rPr>
-              <a:t>Fenced backyard with mature shade and a peaceful setting backing onto open green space.</a:t>
+              <a:t>Wide open field and mountain views create a peaceful backdrop just beyond the home.</a:t>
             </a:r>
             <a:endParaRPr lang="en-CA" sz="1000" b="0" u="none" strike="noStrike">
               <a:solidFill>
@@ -994,7 +994,7 @@
                 </a:solidFill>
                 <a:latin typeface="Nimbus Roman"/>
               </a:rPr>
-              <a:t>Open green space and mountain views extend the sense of privacy behind the home.</a:t>
+              <a:t>Spacious primary bedroom with a striking accent wall and great natural light.</a:t>
             </a:r>
             <a:endParaRPr lang="en-CA" sz="1000" b="0" u="none" strike="noStrike">
               <a:solidFill>
@@ -1050,7 +1050,7 @@
                 </a:solidFill>
                 <a:latin typeface="Nimbus Roman"/>
               </a:rPr>
-              <a:t>Bright dining area connects seamlessly to the deck for easy everyday indoor-outdoor living.</a:t>
+              <a:t>Fenced backyard opens toward lush green space and a broad field beyond.</a:t>
             </a:r>
             <a:endParaRPr lang="en-CA" sz="1000" b="0" u="none" strike="noStrike">
               <a:solidFill>
@@ -1106,7 +1106,7 @@
                 </a:solidFill>
                 <a:latin typeface="Nimbus Roman"/>
               </a:rPr>
-              <a:t>Light-filled kitchen offers efficient workspace and pleasant outlooks to the greenery.</a:t>
+              <a:t>Sunny dining area connects easily to the covered deck and backyard outlook.</a:t>
             </a:r>
             <a:endParaRPr lang="en-CA" sz="1000" b="0" u="none" strike="noStrike">
               <a:solidFill>
@@ -1162,7 +1162,7 @@
                 </a:solidFill>
                 <a:latin typeface="Nimbus Roman"/>
               </a:rPr>
-              <a:t>Inviting living room filled with natural light and comfortable space to gather or unwind.</a:t>
+              <a:t>Light-filled kitchen offers an efficient layout and calming views of mature greenery.</a:t>
             </a:r>
             <a:endParaRPr lang="en-CA" sz="1000" b="0" u="none" strike="noStrike">
               <a:solidFill>
@@ -1279,7 +1279,7 @@
                 </a:solidFill>
                 <a:latin typeface="Nimbus Roman"/>
               </a:rPr>
-              <a:t>This bright cathedral-entry townhome offers more than 1,700 square feet of flexible living space in a convenient Brocklehurst location.</a:t>
+              <a:t>This bright and functional three-level split townhome offers over 1,700 square feet of well-planned living space in Brocklehurst.</a:t>
             </a:r>
             <a:endParaRPr lang="en-CA" sz="1100" b="0" u="none" strike="noStrike">
               <a:solidFill>
@@ -1315,7 +1315,7 @@
                 </a:solidFill>
                 <a:latin typeface="Nimbus Roman"/>
               </a:rPr>
-              <a:t>Thoughtful 2012 renovations updated the kitchen, flooring, appliances, windows, roof, light fixtures, decks, and railings for lasting appeal.</a:t>
+              <a:t>A 2012 renovation updated the kitchen, flooring, appliances, windows, roof, lighting, decks, and railings for lasting everyday appeal.</a:t>
             </a:r>
           </a:p>
           <a:p>
@@ -1343,7 +1343,7 @@
                 </a:solidFill>
                 <a:latin typeface="Nimbus Roman"/>
               </a:rPr>
-              <a:t>The sunny dining area opens to a covered sundeck overlooking the fenced yard and peaceful green space beyond.</a:t>
+              <a:t>The sunny dining area opens to a covered sundeck overlooking the fenced backyard and peaceful green space beyond.</a:t>
             </a:r>
           </a:p>
           <a:p>
@@ -1371,7 +1371,7 @@
                 </a:solidFill>
                 <a:latin typeface="Nimbus Roman"/>
               </a:rPr>
-              <a:t>A spacious family room and basement bedroom provide versatile options for guests, a home office, hobbies, or recreation.</a:t>
+              <a:t>A flexible four-bedroom layout includes main floor laundry, a generous family room, and excellent storage for busy households.</a:t>
             </a:r>
           </a:p>
           <a:p>
@@ -1399,7 +1399,7 @@
                 </a:solidFill>
                 <a:latin typeface="Nimbus Roman"/>
               </a:rPr>
-              <a:t>The double attached garage includes workshop space and rear yard pass-through access, complemented by four total parking spaces.</a:t>
+              <a:t>The double attached garage includes workshop space and rear yard access, complemented by extra driveway and assigned parking.</a:t>
             </a:r>
           </a:p>
           <a:p>
@@ -1427,7 +1427,7 @@
                 </a:solidFill>
                 <a:latin typeface="Nimbus Roman"/>
               </a:rPr>
-              <a:t>Pet- and rental-friendly, this home is close to schools, shopping, McArthur Island Park, and the scenic River’s Trail.</a:t>
+              <a:t>Pet-friendly and rental-friendly, this home is close to schools, shopping, McArthur Island Park, and River’s Trail.</a:t>
             </a:r>
           </a:p>
         </p:txBody>
@@ -1614,7 +1614,7 @@
       </p:sp>
       <p:pic>
         <p:nvPicPr>
-          <p:cNvPr id="28" name="Picture 27" descr="DSC03349.jpg"/>
+          <p:cNvPr id="28" name="Picture 27" descr="DSC03355.jpg"/>
           <p:cNvPicPr>
             <a:picLocks noChangeAspect="1"/>
           </p:cNvPicPr>
@@ -1639,7 +1639,7 @@
       </p:pic>
       <p:pic>
         <p:nvPicPr>
-          <p:cNvPr id="29" name="Picture 28" descr="DSC03355.jpg"/>
+          <p:cNvPr id="29" name="Picture 28" descr="DSC03411.jpg"/>
           <p:cNvPicPr>
             <a:picLocks noChangeAspect="1"/>
           </p:cNvPicPr>
@@ -1647,7 +1647,7 @@
         </p:nvPicPr>
         <p:blipFill>
           <a:blip r:embed="rId4"/>
-          <a:srcRect l="7407" r="7407"/>
+          <a:srcRect l="7507" r="7507"/>
           <a:stretch>
             <a:fillRect/>
           </a:stretch>
@@ -1664,7 +1664,7 @@
       </p:pic>
       <p:pic>
         <p:nvPicPr>
-          <p:cNvPr id="30" name="Picture 29" descr="DSC03381.jpg"/>
+          <p:cNvPr id="30" name="Picture 29" descr="DSC03378.jpg"/>
           <p:cNvPicPr>
             <a:picLocks noChangeAspect="1"/>
           </p:cNvPicPr>
@@ -1689,7 +1689,7 @@
       </p:pic>
       <p:pic>
         <p:nvPicPr>
-          <p:cNvPr id="31" name="Picture 30" descr="DSC03378.jpg"/>
+          <p:cNvPr id="31" name="Picture 30" descr="DSC03349.jpg"/>
           <p:cNvPicPr>
             <a:picLocks noChangeAspect="1"/>
           </p:cNvPicPr>
@@ -1714,7 +1714,7 @@
       </p:pic>
       <p:pic>
         <p:nvPicPr>
-          <p:cNvPr id="32" name="Picture 31" descr="DSC03372.jpg"/>
+          <p:cNvPr id="32" name="Picture 31" descr="DSC03381.jpg"/>
           <p:cNvPicPr>
             <a:picLocks noChangeAspect="1"/>
           </p:cNvPicPr>
@@ -1722,7 +1722,7 @@
         </p:nvPicPr>
         <p:blipFill>
           <a:blip r:embed="rId7"/>
-          <a:srcRect l="7541" r="7541"/>
+          <a:srcRect l="7442" r="7442"/>
           <a:stretch>
             <a:fillRect/>
           </a:stretch>
@@ -1832,7 +1832,7 @@
                 </a:solidFill>
                 <a:latin typeface="Nimbus Roman"/>
               </a:rPr>
-              <a:t>Covered deck offers room to dine, grill, and relax while overlooking mature trees.</a:t>
+              <a:t>Covered deck provides space to barbeque, relax, and enjoy the leafy setting.</a:t>
             </a:r>
             <a:endParaRPr lang="en-CA" sz="1000" b="0" u="none" strike="noStrike">
               <a:solidFill>
@@ -1888,7 +1888,7 @@
                 </a:solidFill>
                 <a:latin typeface="Nimbus Roman"/>
               </a:rPr>
-              <a:t>Spacious primary bedroom features soft finishes and abundant natural light for a calm.</a:t>
+              <a:t>Bright living room feels welcoming and open with soft natural light throughout.</a:t>
             </a:r>
             <a:endParaRPr lang="en-CA" sz="1000" b="0" u="none" strike="noStrike">
               <a:solidFill>
@@ -1944,7 +1944,7 @@
                 </a:solidFill>
                 <a:latin typeface="Nimbus Roman"/>
               </a:rPr>
-              <a:t>Full bathroom with natural light and a clean, functional design for daily ease.</a:t>
+              <a:t>Clean full bathroom with natural light and timeless neutral finishes.</a:t>
             </a:r>
             <a:endParaRPr lang="en-CA" sz="1000" b="0" u="none" strike="noStrike">
               <a:solidFill>
@@ -2000,7 +2000,7 @@
                 </a:solidFill>
                 <a:latin typeface="Nimbus Roman"/>
               </a:rPr>
-              <a:t>Large lower-level rec room offers flexible space for work, fitness, media, or play.</a:t>
+              <a:t>Neighborhood green space offers an open feel with lovely mountain views nearby.</a:t>
             </a:r>
             <a:endParaRPr lang="en-CA" sz="1000" b="0" u="none" strike="noStrike">
               <a:solidFill>
@@ -2056,7 +2056,7 @@
                 </a:solidFill>
                 <a:latin typeface="Nimbus Roman"/>
               </a:rPr>
-              <a:t>Generous bedroom with soft natural tones and convenient access nearby for added comfort.</a:t>
+              <a:t>Versatile lower-level flex room suits hobbies, workouts, work, or family use.</a:t>
             </a:r>
             <a:endParaRPr lang="en-CA" sz="1000" b="0" u="none" strike="noStrike">
               <a:solidFill>
@@ -2559,6 +2559,34 @@
                 </a:solidFill>
                 <a:latin typeface="Nimbus Roman"/>
               </a:rPr>
+              <a:t>Age:	42 Years</a:t>
+            </a:r>
+          </a:p>
+          <a:p>
+            <a:pPr>
+              <a:lnSpc>
+                <a:spcPct val="100000"/>
+              </a:lnSpc>
+              <a:spcBef>
+                <a:spcPts val="2100"/>
+              </a:spcBef>
+              <a:spcAft>
+                <a:spcPts val="0"/>
+              </a:spcAft>
+              <a:tabLst>
+                <a:tab algn="l" pos="0"/>
+                <a:tab algn="l" pos="347040"/>
+                <a:tab algn="l" pos="898200"/>
+                <a:tab algn="l" pos="4027680"/>
+              </a:tabLst>
+            </a:pPr>
+            <a:r>
+              <a:rPr b="1" sz="1400">
+                <a:solidFill>
+                  <a:srgbClr val="000000"/>
+                </a:solidFill>
+                <a:latin typeface="Nimbus Roman"/>
+              </a:rPr>
               <a:t>Taxes:	$3,145 (2025)</a:t>
             </a:r>
           </a:p>
@@ -2588,7 +2616,7 @@
             <a:spAutoFit/>
           </a:bodyPr>
           <a:p>
-            <a:pPr>
+            <a:pPr algn="ctr">
               <a:lnSpc>
                 <a:spcPct val="150000"/>
               </a:lnSpc>
@@ -2596,6 +2624,15 @@
                 <a:tab algn="l" pos="1619280"/>
               </a:tabLst>
             </a:pPr>
+            <a:r>
+              <a:rPr b="1" sz="1400" i="1">
+                <a:solidFill>
+                  <a:srgbClr val="000000"/>
+                </a:solidFill>
+                <a:latin typeface="Nimbus Roman"/>
+              </a:rPr>
+              <a:t>Main (1,046 sq. ft.)</a:t>
+            </a:r>
             <a:endParaRPr lang="en-CA" sz="1400" b="0" u="none" strike="noStrike">
               <a:solidFill>
                 <a:srgbClr val="000000"/>
@@ -2604,6 +2641,255 @@
               <a:uFillTx/>
               <a:latin typeface="Arial"/>
             </a:endParaRPr>
+          </a:p>
+          <a:p/>
+          <a:p>
+            <a:pPr>
+              <a:lnSpc>
+                <a:spcPct val="150000"/>
+              </a:lnSpc>
+              <a:tabLst>
+                <a:tab algn="l" pos="1619280"/>
+              </a:tabLst>
+            </a:pPr>
+            <a:r>
+              <a:rPr b="1" sz="1400">
+                <a:solidFill>
+                  <a:srgbClr val="000000"/>
+                </a:solidFill>
+                <a:latin typeface="Nimbus Roman"/>
+              </a:rPr>
+              <a:t>Kitchen	10' 4" x 13' 11"</a:t>
+            </a:r>
+          </a:p>
+          <a:p>
+            <a:pPr>
+              <a:lnSpc>
+                <a:spcPct val="150000"/>
+              </a:lnSpc>
+              <a:tabLst>
+                <a:tab algn="l" pos="1619280"/>
+              </a:tabLst>
+            </a:pPr>
+            <a:r>
+              <a:rPr b="1" sz="1400">
+                <a:solidFill>
+                  <a:srgbClr val="000000"/>
+                </a:solidFill>
+                <a:latin typeface="Nimbus Roman"/>
+              </a:rPr>
+              <a:t>Living Room	14' 4" x 14' 9"</a:t>
+            </a:r>
+          </a:p>
+          <a:p>
+            <a:pPr>
+              <a:lnSpc>
+                <a:spcPct val="150000"/>
+              </a:lnSpc>
+              <a:tabLst>
+                <a:tab algn="l" pos="1619280"/>
+              </a:tabLst>
+            </a:pPr>
+            <a:r>
+              <a:rPr b="1" sz="1400">
+                <a:solidFill>
+                  <a:srgbClr val="000000"/>
+                </a:solidFill>
+                <a:latin typeface="Nimbus Roman"/>
+              </a:rPr>
+              <a:t>Dining Room	9' 2" x 8' 9"</a:t>
+            </a:r>
+          </a:p>
+          <a:p>
+            <a:pPr>
+              <a:lnSpc>
+                <a:spcPct val="150000"/>
+              </a:lnSpc>
+              <a:tabLst>
+                <a:tab algn="l" pos="1619280"/>
+              </a:tabLst>
+            </a:pPr>
+            <a:r>
+              <a:rPr b="1" sz="1400">
+                <a:solidFill>
+                  <a:srgbClr val="000000"/>
+                </a:solidFill>
+                <a:latin typeface="Nimbus Roman"/>
+              </a:rPr>
+              <a:t>Primary Bedroom	11' 8" x 10' 6"</a:t>
+            </a:r>
+          </a:p>
+          <a:p>
+            <a:pPr>
+              <a:lnSpc>
+                <a:spcPct val="150000"/>
+              </a:lnSpc>
+              <a:tabLst>
+                <a:tab algn="l" pos="1619280"/>
+              </a:tabLst>
+            </a:pPr>
+            <a:r>
+              <a:rPr b="1" sz="1400">
+                <a:solidFill>
+                  <a:srgbClr val="000000"/>
+                </a:solidFill>
+                <a:latin typeface="Nimbus Roman"/>
+              </a:rPr>
+              <a:t>Bedroom	8' 3" x 8' 9"</a:t>
+            </a:r>
+          </a:p>
+          <a:p>
+            <a:pPr>
+              <a:lnSpc>
+                <a:spcPct val="150000"/>
+              </a:lnSpc>
+              <a:tabLst>
+                <a:tab algn="l" pos="1619280"/>
+              </a:tabLst>
+            </a:pPr>
+            <a:r>
+              <a:rPr b="1" sz="1400">
+                <a:solidFill>
+                  <a:srgbClr val="000000"/>
+                </a:solidFill>
+                <a:latin typeface="Nimbus Roman"/>
+              </a:rPr>
+              <a:t>Bathroom - Full	4 piece</a:t>
+            </a:r>
+          </a:p>
+          <a:p>
+            <a:pPr algn="ctr">
+              <a:lnSpc>
+                <a:spcPct val="150000"/>
+              </a:lnSpc>
+              <a:tabLst>
+                <a:tab algn="l" pos="1619280"/>
+              </a:tabLst>
+            </a:pPr>
+            <a:r>
+              <a:rPr b="1" sz="1400" i="1">
+                <a:solidFill>
+                  <a:srgbClr val="000000"/>
+                </a:solidFill>
+                <a:latin typeface="Nimbus Roman"/>
+              </a:rPr>
+              <a:t>Basement (674.9 sq. ft.)</a:t>
+            </a:r>
+          </a:p>
+          <a:p/>
+          <a:p>
+            <a:pPr>
+              <a:lnSpc>
+                <a:spcPct val="150000"/>
+              </a:lnSpc>
+              <a:tabLst>
+                <a:tab algn="l" pos="1619280"/>
+              </a:tabLst>
+            </a:pPr>
+            <a:r>
+              <a:rPr b="1" sz="1400">
+                <a:solidFill>
+                  <a:srgbClr val="000000"/>
+                </a:solidFill>
+                <a:latin typeface="Nimbus Roman"/>
+              </a:rPr>
+              <a:t>Bedroom	12' 7" x 12'</a:t>
+            </a:r>
+          </a:p>
+          <a:p>
+            <a:pPr>
+              <a:lnSpc>
+                <a:spcPct val="150000"/>
+              </a:lnSpc>
+              <a:tabLst>
+                <a:tab algn="l" pos="1619280"/>
+              </a:tabLst>
+            </a:pPr>
+            <a:r>
+              <a:rPr b="1" sz="1400">
+                <a:solidFill>
+                  <a:srgbClr val="000000"/>
+                </a:solidFill>
+                <a:latin typeface="Nimbus Roman"/>
+              </a:rPr>
+              <a:t>Bedroom	9' 8" x 9' 9"</a:t>
+            </a:r>
+          </a:p>
+          <a:p>
+            <a:pPr>
+              <a:lnSpc>
+                <a:spcPct val="150000"/>
+              </a:lnSpc>
+              <a:tabLst>
+                <a:tab algn="l" pos="1619280"/>
+              </a:tabLst>
+            </a:pPr>
+            <a:r>
+              <a:rPr b="1" sz="1400">
+                <a:solidFill>
+                  <a:srgbClr val="000000"/>
+                </a:solidFill>
+                <a:latin typeface="Nimbus Roman"/>
+              </a:rPr>
+              <a:t>Ensuite - Half	2 piece</a:t>
+            </a:r>
+          </a:p>
+          <a:p>
+            <a:pPr>
+              <a:lnSpc>
+                <a:spcPct val="150000"/>
+              </a:lnSpc>
+              <a:tabLst>
+                <a:tab algn="l" pos="1619280"/>
+              </a:tabLst>
+            </a:pPr>
+            <a:r>
+              <a:rPr b="1" sz="1400">
+                <a:solidFill>
+                  <a:srgbClr val="000000"/>
+                </a:solidFill>
+                <a:latin typeface="Nimbus Roman"/>
+              </a:rPr>
+              <a:t>Laundry	9' 3" x 3'</a:t>
+            </a:r>
+          </a:p>
+          <a:p>
+            <a:pPr>
+              <a:lnSpc>
+                <a:spcPct val="150000"/>
+              </a:lnSpc>
+              <a:tabLst>
+                <a:tab algn="l" pos="1619280"/>
+              </a:tabLst>
+            </a:pPr>
+            <a:r>
+              <a:rPr b="1" sz="1400">
+                <a:solidFill>
+                  <a:srgbClr val="000000"/>
+                </a:solidFill>
+                <a:latin typeface="Nimbus Roman"/>
+              </a:rPr>
+              <a:t>Family Room	19' 3" x 12' 6"</a:t>
+            </a:r>
+          </a:p>
+          <a:p>
+            <a:pPr>
+              <a:lnSpc>
+                <a:spcPct val="150000"/>
+              </a:lnSpc>
+              <a:tabLst>
+                <a:tab algn="l" pos="1619280"/>
+              </a:tabLst>
+            </a:pPr>
+            <a:r>
+              <a:rPr b="1" sz="1400">
+                <a:solidFill>
+                  <a:srgbClr val="000000"/>
+                </a:solidFill>
+                <a:latin typeface="Nimbus Roman"/>
+              </a:rPr>
+              <a:t>Storage	18' 9" x 6'</a:t>
+            </a:r>
           </a:p>
         </p:txBody>
       </p:sp>
@@ -2679,7 +2965,7 @@
       </p:pic>
       <p:pic>
         <p:nvPicPr>
-          <p:cNvPr id="44" name="Picture 43" descr="DSC03411.jpg"/>
+          <p:cNvPr id="44" name="Picture 43" descr="DSC03372.jpg"/>
           <p:cNvPicPr>
             <a:picLocks noChangeAspect="1"/>
           </p:cNvPicPr>
@@ -2729,7 +3015,7 @@
       </p:pic>
       <p:pic>
         <p:nvPicPr>
-          <p:cNvPr id="46" name="Picture 45" descr="DSC03423.jpg"/>
+          <p:cNvPr id="46" name="Picture 45" descr="DSC03428.jpg"/>
           <p:cNvPicPr>
             <a:picLocks noChangeAspect="1"/>
           </p:cNvPicPr>
@@ -2754,7 +3040,7 @@
       </p:pic>
       <p:pic>
         <p:nvPicPr>
-          <p:cNvPr id="47" name="Picture 46" descr="DSC03428.jpg"/>
+          <p:cNvPr id="47" name="Picture 46" descr="DSC03356.jpg"/>
           <p:cNvPicPr>
             <a:picLocks noChangeAspect="1"/>
           </p:cNvPicPr>

--- a/test_output.pptx
+++ b/test_output.pptx
@@ -32,7 +32,7 @@
       </p:grpSpPr>
       <p:sp>
         <p:nvSpPr>
-          <p:cNvPr id="7" name="PlaceHolder 1"/>
+          <p:cNvPr id="2" name="PlaceHolder 1"/>
           <p:cNvSpPr>
             <a:spLocks noGrp="1"/>
           </p:cNvSpPr>
@@ -42,8 +42,8 @@
         </p:nvSpPr>
         <p:spPr>
           <a:xfrm>
-            <a:off x="502920" y="309600"/>
-            <a:ext cx="9052200" cy="1297440"/>
+            <a:off x="502920" y="820800"/>
+            <a:ext cx="9051840" cy="274680"/>
           </a:xfrm>
           <a:prstGeom prst="rect">
             <a:avLst/>
@@ -58,10 +58,21 @@
             <a:spAutoFit/>
           </a:bodyPr>
           <a:p>
-            <a:pPr indent="0" algn="ctr">
+            <a:pPr indent="0">
               <a:buNone/>
             </a:pPr>
-            <a:endParaRPr lang="en-CA" sz="6030" b="0" u="none" strike="noStrike">
+            <a:r>
+              <a:rPr lang="en-CA" sz="1800" b="0" u="none" strike="noStrike">
+                <a:solidFill>
+                  <a:srgbClr val="000000"/>
+                </a:solidFill>
+                <a:effectLst/>
+                <a:uFillTx/>
+                <a:latin typeface="Arial"/>
+              </a:rPr>
+              <a:t>Click to edit the title text format</a:t>
+            </a:r>
+            <a:endParaRPr lang="en-CA" sz="1800" b="0" u="none" strike="noStrike">
               <a:solidFill>
                 <a:srgbClr val="000000"/>
               </a:solidFill>
@@ -74,18 +85,18 @@
       </p:sp>
       <p:sp>
         <p:nvSpPr>
-          <p:cNvPr id="8" name="PlaceHolder 2"/>
+          <p:cNvPr id="3" name="PlaceHolder 2"/>
           <p:cNvSpPr>
             <a:spLocks noGrp="1"/>
           </p:cNvSpPr>
           <p:nvPr>
-            <p:ph/>
+            <p:ph type="body"/>
           </p:nvPr>
         </p:nvSpPr>
         <p:spPr>
           <a:xfrm>
             <a:off x="502920" y="1818000"/>
-            <a:ext cx="9052200" cy="4507560"/>
+            <a:ext cx="9051840" cy="4507200"/>
           </a:xfrm>
           <a:prstGeom prst="rect">
             <a:avLst/>
@@ -100,13 +111,221 @@
             <a:normAutofit/>
           </a:bodyPr>
           <a:p>
-            <a:pPr indent="0">
+            <a:pPr marL="432000" indent="-324000">
               <a:spcBef>
-                <a:spcPts val="1939"/>
+                <a:spcPts val="1417"/>
               </a:spcBef>
-              <a:buNone/>
-            </a:pPr>
-            <a:endParaRPr lang="en-CA" sz="4390" b="0" u="none" strike="noStrike">
+              <a:buClr>
+                <a:srgbClr val="000000"/>
+              </a:buClr>
+              <a:buSzPct val="45000"/>
+              <a:buFont typeface="Wingdings" charset="2"/>
+              <a:buChar char=""/>
+            </a:pPr>
+            <a:r>
+              <a:rPr lang="en-CA" sz="1800" b="0" u="none" strike="noStrike">
+                <a:solidFill>
+                  <a:srgbClr val="000000"/>
+                </a:solidFill>
+                <a:effectLst/>
+                <a:uFillTx/>
+                <a:latin typeface="Arial"/>
+              </a:rPr>
+              <a:t>Click to edit the outline text format</a:t>
+            </a:r>
+            <a:endParaRPr lang="en-CA" sz="1800" b="0" u="none" strike="noStrike">
+              <a:solidFill>
+                <a:srgbClr val="000000"/>
+              </a:solidFill>
+              <a:effectLst/>
+              <a:uFillTx/>
+              <a:latin typeface="Arial"/>
+            </a:endParaRPr>
+          </a:p>
+          <a:p>
+            <a:pPr marL="864000" lvl="1" indent="-324000">
+              <a:spcBef>
+                <a:spcPts val="1134"/>
+              </a:spcBef>
+              <a:buClr>
+                <a:srgbClr val="000000"/>
+              </a:buClr>
+              <a:buSzPct val="75000"/>
+              <a:buFont typeface="Symbol" charset="2"/>
+              <a:buChar char=""/>
+            </a:pPr>
+            <a:r>
+              <a:rPr lang="en-CA" sz="1800" b="0" u="none" strike="noStrike">
+                <a:solidFill>
+                  <a:srgbClr val="000000"/>
+                </a:solidFill>
+                <a:effectLst/>
+                <a:uFillTx/>
+                <a:latin typeface="Arial"/>
+              </a:rPr>
+              <a:t>Second Outline Level</a:t>
+            </a:r>
+            <a:endParaRPr lang="en-CA" sz="1800" b="0" u="none" strike="noStrike">
+              <a:solidFill>
+                <a:srgbClr val="000000"/>
+              </a:solidFill>
+              <a:effectLst/>
+              <a:uFillTx/>
+              <a:latin typeface="Arial"/>
+            </a:endParaRPr>
+          </a:p>
+          <a:p>
+            <a:pPr marL="1296000" lvl="2" indent="-288000">
+              <a:spcBef>
+                <a:spcPts val="850"/>
+              </a:spcBef>
+              <a:buClr>
+                <a:srgbClr val="000000"/>
+              </a:buClr>
+              <a:buSzPct val="45000"/>
+              <a:buFont typeface="Wingdings" charset="2"/>
+              <a:buChar char=""/>
+            </a:pPr>
+            <a:r>
+              <a:rPr lang="en-CA" sz="1800" b="0" u="none" strike="noStrike">
+                <a:solidFill>
+                  <a:srgbClr val="000000"/>
+                </a:solidFill>
+                <a:effectLst/>
+                <a:uFillTx/>
+                <a:latin typeface="Arial"/>
+              </a:rPr>
+              <a:t>Third Outline Level</a:t>
+            </a:r>
+            <a:endParaRPr lang="en-CA" sz="1800" b="0" u="none" strike="noStrike">
+              <a:solidFill>
+                <a:srgbClr val="000000"/>
+              </a:solidFill>
+              <a:effectLst/>
+              <a:uFillTx/>
+              <a:latin typeface="Arial"/>
+            </a:endParaRPr>
+          </a:p>
+          <a:p>
+            <a:pPr marL="1728000" lvl="3" indent="-216000">
+              <a:spcBef>
+                <a:spcPts val="567"/>
+              </a:spcBef>
+              <a:buClr>
+                <a:srgbClr val="000000"/>
+              </a:buClr>
+              <a:buSzPct val="75000"/>
+              <a:buFont typeface="Symbol" charset="2"/>
+              <a:buChar char=""/>
+            </a:pPr>
+            <a:r>
+              <a:rPr lang="en-CA" sz="1800" b="0" u="none" strike="noStrike">
+                <a:solidFill>
+                  <a:srgbClr val="000000"/>
+                </a:solidFill>
+                <a:effectLst/>
+                <a:uFillTx/>
+                <a:latin typeface="Arial"/>
+              </a:rPr>
+              <a:t>Fourth Outline Level</a:t>
+            </a:r>
+            <a:endParaRPr lang="en-CA" sz="1800" b="0" u="none" strike="noStrike">
+              <a:solidFill>
+                <a:srgbClr val="000000"/>
+              </a:solidFill>
+              <a:effectLst/>
+              <a:uFillTx/>
+              <a:latin typeface="Arial"/>
+            </a:endParaRPr>
+          </a:p>
+          <a:p>
+            <a:pPr marL="2160000" lvl="4" indent="-216000">
+              <a:spcBef>
+                <a:spcPts val="283"/>
+              </a:spcBef>
+              <a:buClr>
+                <a:srgbClr val="000000"/>
+              </a:buClr>
+              <a:buSzPct val="45000"/>
+              <a:buFont typeface="Wingdings" charset="2"/>
+              <a:buChar char=""/>
+            </a:pPr>
+            <a:r>
+              <a:rPr lang="en-CA" sz="1800" b="0" u="none" strike="noStrike">
+                <a:solidFill>
+                  <a:srgbClr val="000000"/>
+                </a:solidFill>
+                <a:effectLst/>
+                <a:uFillTx/>
+                <a:latin typeface="Arial"/>
+              </a:rPr>
+              <a:t>Fifth Outline Level</a:t>
+            </a:r>
+            <a:endParaRPr lang="en-CA" sz="1800" b="0" u="none" strike="noStrike">
+              <a:solidFill>
+                <a:srgbClr val="000000"/>
+              </a:solidFill>
+              <a:effectLst/>
+              <a:uFillTx/>
+              <a:latin typeface="Arial"/>
+            </a:endParaRPr>
+          </a:p>
+          <a:p>
+            <a:pPr marL="2592000" lvl="5" indent="-216000">
+              <a:spcBef>
+                <a:spcPts val="283"/>
+              </a:spcBef>
+              <a:buClr>
+                <a:srgbClr val="000000"/>
+              </a:buClr>
+              <a:buSzPct val="45000"/>
+              <a:buFont typeface="Wingdings" charset="2"/>
+              <a:buChar char=""/>
+            </a:pPr>
+            <a:r>
+              <a:rPr lang="en-CA" sz="1800" b="0" u="none" strike="noStrike">
+                <a:solidFill>
+                  <a:srgbClr val="000000"/>
+                </a:solidFill>
+                <a:effectLst/>
+                <a:uFillTx/>
+                <a:latin typeface="Arial"/>
+              </a:rPr>
+              <a:t>Sixth Outline Level</a:t>
+            </a:r>
+            <a:endParaRPr lang="en-CA" sz="1800" b="0" u="none" strike="noStrike">
+              <a:solidFill>
+                <a:srgbClr val="000000"/>
+              </a:solidFill>
+              <a:effectLst/>
+              <a:uFillTx/>
+              <a:latin typeface="Arial"/>
+            </a:endParaRPr>
+          </a:p>
+          <a:p>
+            <a:pPr marL="3024000" lvl="6" indent="-216000">
+              <a:spcBef>
+                <a:spcPts val="283"/>
+              </a:spcBef>
+              <a:buClr>
+                <a:srgbClr val="000000"/>
+              </a:buClr>
+              <a:buSzPct val="45000"/>
+              <a:buFont typeface="Wingdings" charset="2"/>
+              <a:buChar char=""/>
+            </a:pPr>
+            <a:r>
+              <a:rPr lang="en-CA" sz="1800" b="0" u="none" strike="noStrike">
+                <a:solidFill>
+                  <a:srgbClr val="000000"/>
+                </a:solidFill>
+                <a:effectLst/>
+                <a:uFillTx/>
+                <a:latin typeface="Arial"/>
+              </a:rPr>
+              <a:t>Seventh Outline Level</a:t>
+            </a:r>
+            <a:endParaRPr lang="en-CA" sz="1800" b="0" u="none" strike="noStrike">
               <a:solidFill>
                 <a:srgbClr val="000000"/>
               </a:solidFill>
@@ -124,16 +343,74 @@
             <a:spLocks noGrp="1"/>
           </p:cNvSpPr>
           <p:nvPr>
-            <p:ph type="ftr" idx="2"/>
+            <p:ph type="ftr" idx="1"/>
           </p:nvPr>
         </p:nvSpPr>
-        <p:spPr/>
+        <p:spPr>
+          <a:xfrm>
+            <a:off x="3439440" y="7080120"/>
+            <a:ext cx="3187800" cy="535320"/>
+          </a:xfrm>
+          <a:prstGeom prst="rect">
+            <a:avLst/>
+          </a:prstGeom>
+          <a:noFill/>
+          <a:ln w="0">
+            <a:noFill/>
+          </a:ln>
+        </p:spPr>
         <p:txBody>
-          <a:bodyPr/>
-          <a:p>
-            <a:r>
-              <a:t>Footer</a:t>
-            </a:r>
+          <a:bodyPr lIns="0" rIns="0" tIns="0" bIns="0" anchor="t">
+            <a:noAutofit/>
+          </a:bodyPr>
+          <a:lstStyle>
+            <a:lvl1pPr indent="0" algn="ctr">
+              <a:lnSpc>
+                <a:spcPct val="100000"/>
+              </a:lnSpc>
+              <a:buNone/>
+              <a:tabLst>
+                <a:tab algn="l" pos="0"/>
+              </a:tabLst>
+              <a:defRPr lang="en-CA" sz="1400" b="0" u="none" strike="noStrike">
+                <a:solidFill>
+                  <a:srgbClr val="000000"/>
+                </a:solidFill>
+                <a:effectLst/>
+                <a:uFillTx/>
+                <a:latin typeface="Times New Roman"/>
+              </a:defRPr>
+            </a:lvl1pPr>
+          </a:lstStyle>
+          <a:p>
+            <a:pPr indent="0" algn="ctr">
+              <a:lnSpc>
+                <a:spcPct val="100000"/>
+              </a:lnSpc>
+              <a:buNone/>
+              <a:tabLst>
+                <a:tab algn="l" pos="0"/>
+              </a:tabLst>
+            </a:pPr>
+            <a:r>
+              <a:rPr lang="en-CA" sz="1400" b="0" u="none" strike="noStrike">
+                <a:solidFill>
+                  <a:srgbClr val="000000"/>
+                </a:solidFill>
+                <a:effectLst/>
+                <a:uFillTx/>
+                <a:latin typeface="Times New Roman"/>
+              </a:rPr>
+              <a:t>&lt;footer&gt;</a:t>
+            </a:r>
+            <a:endParaRPr lang="en-CA" sz="1400" b="0" u="none" strike="noStrike">
+              <a:solidFill>
+                <a:srgbClr val="000000"/>
+              </a:solidFill>
+              <a:effectLst/>
+              <a:uFillTx/>
+              <a:latin typeface="Times New Roman"/>
+            </a:endParaRPr>
           </a:p>
         </p:txBody>
       </p:sp>
@@ -144,16 +421,74 @@
             <a:spLocks noGrp="1"/>
           </p:cNvSpPr>
           <p:nvPr>
-            <p:ph type="sldNum" idx="3"/>
+            <p:ph type="sldNum" idx="2"/>
           </p:nvPr>
         </p:nvSpPr>
-        <p:spPr/>
+        <p:spPr>
+          <a:xfrm>
+            <a:off x="7211160" y="7080120"/>
+            <a:ext cx="2342880" cy="535320"/>
+          </a:xfrm>
+          <a:prstGeom prst="rect">
+            <a:avLst/>
+          </a:prstGeom>
+          <a:noFill/>
+          <a:ln w="0">
+            <a:noFill/>
+          </a:ln>
+        </p:spPr>
         <p:txBody>
-          <a:bodyPr/>
-          <a:p>
-            <a:fld id="{4BE6EA2E-1044-4035-B8B1-770E18CFC9EF}" type="slidenum">
-              <a:t>&lt;#&gt;</a:t>
+          <a:bodyPr lIns="0" rIns="0" tIns="0" bIns="0" anchor="t">
+            <a:noAutofit/>
+          </a:bodyPr>
+          <a:lstStyle>
+            <a:lvl1pPr indent="0" algn="r">
+              <a:lnSpc>
+                <a:spcPct val="100000"/>
+              </a:lnSpc>
+              <a:buNone/>
+              <a:tabLst>
+                <a:tab algn="l" pos="0"/>
+              </a:tabLst>
+              <a:defRPr lang="en-CA" sz="1400" b="0" u="none" strike="noStrike">
+                <a:solidFill>
+                  <a:srgbClr val="000000"/>
+                </a:solidFill>
+                <a:effectLst/>
+                <a:uFillTx/>
+                <a:latin typeface="Times New Roman"/>
+              </a:defRPr>
+            </a:lvl1pPr>
+          </a:lstStyle>
+          <a:p>
+            <a:pPr indent="0" algn="r">
+              <a:lnSpc>
+                <a:spcPct val="100000"/>
+              </a:lnSpc>
+              <a:buNone/>
+              <a:tabLst>
+                <a:tab algn="l" pos="0"/>
+              </a:tabLst>
+            </a:pPr>
+            <a:fld id="{81952E31-A23B-4DEC-8964-D0E38E3DDF2D}" type="slidenum">
+              <a:rPr lang="en-CA" sz="1400" b="0" u="none" strike="noStrike">
+                <a:solidFill>
+                  <a:srgbClr val="000000"/>
+                </a:solidFill>
+                <a:effectLst/>
+                <a:uFillTx/>
+                <a:latin typeface="Times New Roman"/>
+              </a:rPr>
+              <a:t>&lt;number&gt;</a:t>
             </a:fld>
+            <a:endParaRPr lang="en-CA" sz="1400" b="0" u="none" strike="noStrike">
+              <a:solidFill>
+                <a:srgbClr val="000000"/>
+              </a:solidFill>
+              <a:effectLst/>
+              <a:uFillTx/>
+              <a:latin typeface="Times New Roman"/>
+            </a:endParaRPr>
           </a:p>
         </p:txBody>
       </p:sp>
@@ -164,17 +499,62 @@
             <a:spLocks noGrp="1"/>
           </p:cNvSpPr>
           <p:nvPr>
-            <p:ph type="dt" idx="1"/>
+            <p:ph type="dt" idx="3"/>
           </p:nvPr>
         </p:nvSpPr>
-        <p:spPr/>
+        <p:spPr>
+          <a:xfrm>
+            <a:off x="502920" y="7080120"/>
+            <a:ext cx="2342880" cy="535320"/>
+          </a:xfrm>
+          <a:prstGeom prst="rect">
+            <a:avLst/>
+          </a:prstGeom>
+          <a:noFill/>
+          <a:ln w="0">
+            <a:noFill/>
+          </a:ln>
+        </p:spPr>
         <p:txBody>
-          <a:bodyPr/>
-          <a:p>
-            <a:r>
-              <a:rPr lang="en-CA"/>
-              <a:t/>
-            </a:r>
+          <a:bodyPr lIns="0" rIns="0" tIns="0" bIns="0" anchor="t">
+            <a:noAutofit/>
+          </a:bodyPr>
+          <a:lstStyle>
+            <a:lvl1pPr indent="0">
+              <a:buNone/>
+              <a:defRPr lang="en-CA" sz="1400" b="0" u="none" strike="noStrike">
+                <a:solidFill>
+                  <a:srgbClr val="000000"/>
+                </a:solidFill>
+                <a:effectLst/>
+                <a:uFillTx/>
+                <a:latin typeface="Times New Roman"/>
+              </a:defRPr>
+            </a:lvl1pPr>
+          </a:lstStyle>
+          <a:p>
+            <a:pPr indent="0">
+              <a:buNone/>
+            </a:pPr>
+            <a:r>
+              <a:rPr lang="en-CA" sz="1400" b="0" u="none" strike="noStrike">
+                <a:solidFill>
+                  <a:srgbClr val="000000"/>
+                </a:solidFill>
+                <a:effectLst/>
+                <a:uFillTx/>
+                <a:latin typeface="Times New Roman"/>
+              </a:rPr>
+              <a:t>&lt;date/time&gt;</a:t>
+            </a:r>
+            <a:endParaRPr lang="en-CA" sz="1400" b="0" u="none" strike="noStrike">
+              <a:solidFill>
+                <a:srgbClr val="000000"/>
+              </a:solidFill>
+              <a:effectLst/>
+              <a:uFillTx/>
+              <a:latin typeface="Times New Roman"/>
+            </a:endParaRPr>
           </a:p>
         </p:txBody>
       </p:sp>
@@ -185,7 +565,7 @@
 
 <file path=ppt/slideLayouts/slideLayout2.xml><?xml version="1.0" encoding="utf-8"?>
 <p:sldLayout xmlns:a="http://schemas.openxmlformats.org/drawingml/2006/main" xmlns:p="http://schemas.openxmlformats.org/presentationml/2006/main" xmlns:r="http://schemas.openxmlformats.org/officeDocument/2006/relationships" xmlns:p14="http://schemas.microsoft.com/office/powerpoint/2010/main" xmlns:p15="http://schemas.microsoft.com/office/powerpoint/2012/main" xmlns:mc="http://schemas.openxmlformats.org/markup-compatibility/2006" type="title" preserve="1">
-  <p:cSld name="Default">
+  <p:cSld name="Default 1">
     <p:spTree>
       <p:nvGrpSpPr>
         <p:cNvPr id="1" name=""/>
@@ -202,7 +582,7 @@
       </p:grpSpPr>
       <p:sp>
         <p:nvSpPr>
-          <p:cNvPr id="9" name="PlaceHolder 1"/>
+          <p:cNvPr id="7" name="PlaceHolder 1"/>
           <p:cNvSpPr>
             <a:spLocks noGrp="1"/>
           </p:cNvSpPr>
@@ -212,8 +592,8 @@
         </p:nvSpPr>
         <p:spPr>
           <a:xfrm>
-            <a:off x="502920" y="309600"/>
-            <a:ext cx="9052200" cy="1297440"/>
+            <a:off x="502920" y="820800"/>
+            <a:ext cx="9051840" cy="274680"/>
           </a:xfrm>
           <a:prstGeom prst="rect">
             <a:avLst/>
@@ -228,10 +608,21 @@
             <a:spAutoFit/>
           </a:bodyPr>
           <a:p>
-            <a:pPr indent="0" algn="ctr">
+            <a:pPr indent="0">
               <a:buNone/>
             </a:pPr>
-            <a:endParaRPr lang="en-CA" sz="6030" b="0" u="none" strike="noStrike">
+            <a:r>
+              <a:rPr lang="en-CA" sz="1800" b="0" u="none" strike="noStrike">
+                <a:solidFill>
+                  <a:srgbClr val="000000"/>
+                </a:solidFill>
+                <a:effectLst/>
+                <a:uFillTx/>
+                <a:latin typeface="Arial"/>
+              </a:rPr>
+              <a:t>Click to edit the title text format</a:t>
+            </a:r>
+            <a:endParaRPr lang="en-CA" sz="1800" b="0" u="none" strike="noStrike">
               <a:solidFill>
                 <a:srgbClr val="000000"/>
               </a:solidFill>
@@ -244,18 +635,18 @@
       </p:sp>
       <p:sp>
         <p:nvSpPr>
-          <p:cNvPr id="10" name="PlaceHolder 2"/>
+          <p:cNvPr id="8" name="PlaceHolder 2"/>
           <p:cNvSpPr>
             <a:spLocks noGrp="1"/>
           </p:cNvSpPr>
           <p:nvPr>
-            <p:ph type="subTitle"/>
+            <p:ph type="ftr" idx="4"/>
           </p:nvPr>
         </p:nvSpPr>
         <p:spPr>
           <a:xfrm>
-            <a:off x="502920" y="1818000"/>
-            <a:ext cx="9052200" cy="4507560"/>
+            <a:off x="3439440" y="7080120"/>
+            <a:ext cx="3187800" cy="535320"/>
           </a:xfrm>
           <a:prstGeom prst="rect">
             <a:avLst/>
@@ -266,82 +657,454 @@
           </a:ln>
         </p:spPr>
         <p:txBody>
-          <a:bodyPr lIns="0" rIns="0" tIns="0" bIns="0" anchor="ctr">
-            <a:spAutoFit/>
+          <a:bodyPr lIns="0" rIns="0" tIns="0" bIns="0" anchor="t">
+            <a:noAutofit/>
           </a:bodyPr>
+          <a:lstStyle>
+            <a:lvl1pPr indent="0" algn="ctr">
+              <a:lnSpc>
+                <a:spcPct val="100000"/>
+              </a:lnSpc>
+              <a:buNone/>
+              <a:tabLst>
+                <a:tab algn="l" pos="0"/>
+              </a:tabLst>
+              <a:defRPr lang="en-CA" sz="1400" b="0" u="none" strike="noStrike">
+                <a:solidFill>
+                  <a:srgbClr val="000000"/>
+                </a:solidFill>
+                <a:effectLst/>
+                <a:uFillTx/>
+                <a:latin typeface="Times New Roman"/>
+              </a:defRPr>
+            </a:lvl1pPr>
+          </a:lstStyle>
           <a:p>
             <a:pPr indent="0" algn="ctr">
+              <a:lnSpc>
+                <a:spcPct val="100000"/>
+              </a:lnSpc>
               <a:buNone/>
-            </a:pPr>
-            <a:endParaRPr lang="en-CA" sz="3200" b="0" u="none" strike="noStrike">
-              <a:solidFill>
-                <a:srgbClr val="000000"/>
-              </a:solidFill>
-              <a:effectLst/>
-              <a:uFillTx/>
-              <a:latin typeface="Arial"/>
+              <a:tabLst>
+                <a:tab algn="l" pos="0"/>
+              </a:tabLst>
+            </a:pPr>
+            <a:r>
+              <a:rPr lang="en-CA" sz="1400" b="0" u="none" strike="noStrike">
+                <a:solidFill>
+                  <a:srgbClr val="000000"/>
+                </a:solidFill>
+                <a:effectLst/>
+                <a:uFillTx/>
+                <a:latin typeface="Times New Roman"/>
+              </a:rPr>
+              <a:t>&lt;footer&gt;</a:t>
+            </a:r>
+            <a:endParaRPr lang="en-CA" sz="1400" b="0" u="none" strike="noStrike">
+              <a:solidFill>
+                <a:srgbClr val="000000"/>
+              </a:solidFill>
+              <a:effectLst/>
+              <a:uFillTx/>
+              <a:latin typeface="Times New Roman"/>
             </a:endParaRPr>
           </a:p>
         </p:txBody>
       </p:sp>
       <p:sp>
         <p:nvSpPr>
-          <p:cNvPr id="4" name="PlaceHolder 3"/>
+          <p:cNvPr id="9" name="PlaceHolder 3"/>
           <p:cNvSpPr>
             <a:spLocks noGrp="1"/>
           </p:cNvSpPr>
           <p:nvPr>
-            <p:ph type="ftr" idx="2"/>
+            <p:ph type="sldNum" idx="5"/>
           </p:nvPr>
         </p:nvSpPr>
-        <p:spPr/>
+        <p:spPr>
+          <a:xfrm>
+            <a:off x="7211160" y="7080120"/>
+            <a:ext cx="2342880" cy="535320"/>
+          </a:xfrm>
+          <a:prstGeom prst="rect">
+            <a:avLst/>
+          </a:prstGeom>
+          <a:noFill/>
+          <a:ln w="0">
+            <a:noFill/>
+          </a:ln>
+        </p:spPr>
         <p:txBody>
-          <a:bodyPr/>
-          <a:p>
-            <a:r>
-              <a:t>Footer</a:t>
-            </a:r>
+          <a:bodyPr lIns="0" rIns="0" tIns="0" bIns="0" anchor="t">
+            <a:noAutofit/>
+          </a:bodyPr>
+          <a:lstStyle>
+            <a:lvl1pPr indent="0" algn="r">
+              <a:lnSpc>
+                <a:spcPct val="100000"/>
+              </a:lnSpc>
+              <a:buNone/>
+              <a:tabLst>
+                <a:tab algn="l" pos="0"/>
+              </a:tabLst>
+              <a:defRPr lang="en-CA" sz="1400" b="0" u="none" strike="noStrike">
+                <a:solidFill>
+                  <a:srgbClr val="000000"/>
+                </a:solidFill>
+                <a:effectLst/>
+                <a:uFillTx/>
+                <a:latin typeface="Times New Roman"/>
+              </a:defRPr>
+            </a:lvl1pPr>
+          </a:lstStyle>
+          <a:p>
+            <a:pPr indent="0" algn="r">
+              <a:lnSpc>
+                <a:spcPct val="100000"/>
+              </a:lnSpc>
+              <a:buNone/>
+              <a:tabLst>
+                <a:tab algn="l" pos="0"/>
+              </a:tabLst>
+            </a:pPr>
+            <a:fld id="{7DF18875-C1AF-4AC0-BC80-21A96445EAB5}" type="slidenum">
+              <a:rPr lang="en-CA" sz="1400" b="0" u="none" strike="noStrike">
+                <a:solidFill>
+                  <a:srgbClr val="000000"/>
+                </a:solidFill>
+                <a:effectLst/>
+                <a:uFillTx/>
+                <a:latin typeface="Times New Roman"/>
+              </a:rPr>
+              <a:t>&lt;number&gt;</a:t>
+            </a:fld>
+            <a:endParaRPr lang="en-CA" sz="1400" b="0" u="none" strike="noStrike">
+              <a:solidFill>
+                <a:srgbClr val="000000"/>
+              </a:solidFill>
+              <a:effectLst/>
+              <a:uFillTx/>
+              <a:latin typeface="Times New Roman"/>
+            </a:endParaRPr>
           </a:p>
         </p:txBody>
       </p:sp>
       <p:sp>
         <p:nvSpPr>
-          <p:cNvPr id="5" name="PlaceHolder 4"/>
+          <p:cNvPr id="10" name="PlaceHolder 4"/>
           <p:cNvSpPr>
             <a:spLocks noGrp="1"/>
           </p:cNvSpPr>
           <p:nvPr>
-            <p:ph type="sldNum" idx="3"/>
+            <p:ph type="dt" idx="6"/>
           </p:nvPr>
         </p:nvSpPr>
-        <p:spPr/>
+        <p:spPr>
+          <a:xfrm>
+            <a:off x="502920" y="7080120"/>
+            <a:ext cx="2342880" cy="535320"/>
+          </a:xfrm>
+          <a:prstGeom prst="rect">
+            <a:avLst/>
+          </a:prstGeom>
+          <a:noFill/>
+          <a:ln w="0">
+            <a:noFill/>
+          </a:ln>
+        </p:spPr>
         <p:txBody>
-          <a:bodyPr/>
-          <a:p>
-            <a:fld id="{3FC8A656-510F-4744-B956-C3D2173D0929}" type="slidenum">
-              <a:t>&lt;#&gt;</a:t>
-            </a:fld>
+          <a:bodyPr lIns="0" rIns="0" tIns="0" bIns="0" anchor="t">
+            <a:noAutofit/>
+          </a:bodyPr>
+          <a:lstStyle>
+            <a:lvl1pPr indent="0">
+              <a:buNone/>
+              <a:defRPr lang="en-CA" sz="1400" b="0" u="none" strike="noStrike">
+                <a:solidFill>
+                  <a:srgbClr val="000000"/>
+                </a:solidFill>
+                <a:effectLst/>
+                <a:uFillTx/>
+                <a:latin typeface="Times New Roman"/>
+              </a:defRPr>
+            </a:lvl1pPr>
+          </a:lstStyle>
+          <a:p>
+            <a:pPr indent="0">
+              <a:buNone/>
+            </a:pPr>
+            <a:r>
+              <a:rPr lang="en-CA" sz="1400" b="0" u="none" strike="noStrike">
+                <a:solidFill>
+                  <a:srgbClr val="000000"/>
+                </a:solidFill>
+                <a:effectLst/>
+                <a:uFillTx/>
+                <a:latin typeface="Times New Roman"/>
+              </a:rPr>
+              <a:t>&lt;date/time&gt;</a:t>
+            </a:r>
+            <a:endParaRPr lang="en-CA" sz="1400" b="0" u="none" strike="noStrike">
+              <a:solidFill>
+                <a:srgbClr val="000000"/>
+              </a:solidFill>
+              <a:effectLst/>
+              <a:uFillTx/>
+              <a:latin typeface="Times New Roman"/>
+            </a:endParaRPr>
           </a:p>
         </p:txBody>
       </p:sp>
       <p:sp>
         <p:nvSpPr>
-          <p:cNvPr id="6" name="PlaceHolder 5"/>
+          <p:cNvPr id="11" name="PlaceHolder 5"/>
           <p:cNvSpPr>
             <a:spLocks noGrp="1"/>
           </p:cNvSpPr>
           <p:nvPr>
-            <p:ph type="dt" idx="1"/>
+            <p:ph type="body"/>
           </p:nvPr>
         </p:nvSpPr>
-        <p:spPr/>
+        <p:spPr>
+          <a:xfrm>
+            <a:off x="502920" y="1818720"/>
+            <a:ext cx="9052200" cy="4507560"/>
+          </a:xfrm>
+          <a:prstGeom prst="rect">
+            <a:avLst/>
+          </a:prstGeom>
+          <a:noFill/>
+          <a:ln w="0">
+            <a:noFill/>
+          </a:ln>
+        </p:spPr>
         <p:txBody>
-          <a:bodyPr/>
-          <a:p>
-            <a:r>
-              <a:rPr lang="en-CA"/>
-              <a:t/>
-            </a:r>
+          <a:bodyPr lIns="0" rIns="0" tIns="0" bIns="0" anchor="t">
+            <a:normAutofit/>
+          </a:bodyPr>
+          <a:p>
+            <a:pPr marL="432000" indent="-324000">
+              <a:spcBef>
+                <a:spcPts val="1417"/>
+              </a:spcBef>
+              <a:buClr>
+                <a:srgbClr val="000000"/>
+              </a:buClr>
+              <a:buSzPct val="45000"/>
+              <a:buFont typeface="Wingdings" charset="2"/>
+              <a:buChar char=""/>
+            </a:pPr>
+            <a:r>
+              <a:rPr lang="en-CA" sz="3200" b="0" u="none" strike="noStrike">
+                <a:solidFill>
+                  <a:srgbClr val="000000"/>
+                </a:solidFill>
+                <a:effectLst/>
+                <a:uFillTx/>
+                <a:latin typeface="Arial"/>
+              </a:rPr>
+              <a:t>Click to edit the outline text format</a:t>
+            </a:r>
+            <a:endParaRPr lang="en-CA" sz="3200" b="0" u="none" strike="noStrike">
+              <a:solidFill>
+                <a:srgbClr val="000000"/>
+              </a:solidFill>
+              <a:effectLst/>
+              <a:uFillTx/>
+              <a:latin typeface="Arial"/>
+            </a:endParaRPr>
+          </a:p>
+          <a:p>
+            <a:pPr marL="864000" lvl="1" indent="-324000">
+              <a:spcBef>
+                <a:spcPts val="1134"/>
+              </a:spcBef>
+              <a:buClr>
+                <a:srgbClr val="000000"/>
+              </a:buClr>
+              <a:buSzPct val="75000"/>
+              <a:buFont typeface="Symbol" charset="2"/>
+              <a:buChar char=""/>
+            </a:pPr>
+            <a:r>
+              <a:rPr lang="en-CA" sz="2800" b="0" u="none" strike="noStrike">
+                <a:solidFill>
+                  <a:srgbClr val="000000"/>
+                </a:solidFill>
+                <a:effectLst/>
+                <a:uFillTx/>
+                <a:latin typeface="Arial"/>
+              </a:rPr>
+              <a:t>Second Outline Level</a:t>
+            </a:r>
+            <a:endParaRPr lang="en-CA" sz="2800" b="0" u="none" strike="noStrike">
+              <a:solidFill>
+                <a:srgbClr val="000000"/>
+              </a:solidFill>
+              <a:effectLst/>
+              <a:uFillTx/>
+              <a:latin typeface="Arial"/>
+            </a:endParaRPr>
+          </a:p>
+          <a:p>
+            <a:pPr marL="1296000" lvl="2" indent="-288000">
+              <a:spcBef>
+                <a:spcPts val="850"/>
+              </a:spcBef>
+              <a:buClr>
+                <a:srgbClr val="000000"/>
+              </a:buClr>
+              <a:buSzPct val="45000"/>
+              <a:buFont typeface="Wingdings" charset="2"/>
+              <a:buChar char=""/>
+            </a:pPr>
+            <a:r>
+              <a:rPr lang="en-CA" sz="2400" b="0" u="none" strike="noStrike">
+                <a:solidFill>
+                  <a:srgbClr val="000000"/>
+                </a:solidFill>
+                <a:effectLst/>
+                <a:uFillTx/>
+                <a:latin typeface="Arial"/>
+              </a:rPr>
+              <a:t>Third Outline Level</a:t>
+            </a:r>
+            <a:endParaRPr lang="en-CA" sz="2400" b="0" u="none" strike="noStrike">
+              <a:solidFill>
+                <a:srgbClr val="000000"/>
+              </a:solidFill>
+              <a:effectLst/>
+              <a:uFillTx/>
+              <a:latin typeface="Arial"/>
+            </a:endParaRPr>
+          </a:p>
+          <a:p>
+            <a:pPr marL="1728000" lvl="3" indent="-216000">
+              <a:spcBef>
+                <a:spcPts val="567"/>
+              </a:spcBef>
+              <a:buClr>
+                <a:srgbClr val="000000"/>
+              </a:buClr>
+              <a:buSzPct val="75000"/>
+              <a:buFont typeface="Symbol" charset="2"/>
+              <a:buChar char=""/>
+            </a:pPr>
+            <a:r>
+              <a:rPr lang="en-CA" sz="2000" b="0" u="none" strike="noStrike">
+                <a:solidFill>
+                  <a:srgbClr val="000000"/>
+                </a:solidFill>
+                <a:effectLst/>
+                <a:uFillTx/>
+                <a:latin typeface="Arial"/>
+              </a:rPr>
+              <a:t>Fourth Outline Level</a:t>
+            </a:r>
+            <a:endParaRPr lang="en-CA" sz="2000" b="0" u="none" strike="noStrike">
+              <a:solidFill>
+                <a:srgbClr val="000000"/>
+              </a:solidFill>
+              <a:effectLst/>
+              <a:uFillTx/>
+              <a:latin typeface="Arial"/>
+            </a:endParaRPr>
+          </a:p>
+          <a:p>
+            <a:pPr marL="2160000" lvl="4" indent="-216000">
+              <a:spcBef>
+                <a:spcPts val="283"/>
+              </a:spcBef>
+              <a:buClr>
+                <a:srgbClr val="000000"/>
+              </a:buClr>
+              <a:buSzPct val="45000"/>
+              <a:buFont typeface="Wingdings" charset="2"/>
+              <a:buChar char=""/>
+            </a:pPr>
+            <a:r>
+              <a:rPr lang="en-CA" sz="2000" b="0" u="none" strike="noStrike">
+                <a:solidFill>
+                  <a:srgbClr val="000000"/>
+                </a:solidFill>
+                <a:effectLst/>
+                <a:uFillTx/>
+                <a:latin typeface="Arial"/>
+              </a:rPr>
+              <a:t>Fifth Outline Level</a:t>
+            </a:r>
+            <a:endParaRPr lang="en-CA" sz="2000" b="0" u="none" strike="noStrike">
+              <a:solidFill>
+                <a:srgbClr val="000000"/>
+              </a:solidFill>
+              <a:effectLst/>
+              <a:uFillTx/>
+              <a:latin typeface="Arial"/>
+            </a:endParaRPr>
+          </a:p>
+          <a:p>
+            <a:pPr marL="2592000" lvl="5" indent="-216000">
+              <a:spcBef>
+                <a:spcPts val="283"/>
+              </a:spcBef>
+              <a:buClr>
+                <a:srgbClr val="000000"/>
+              </a:buClr>
+              <a:buSzPct val="45000"/>
+              <a:buFont typeface="Wingdings" charset="2"/>
+              <a:buChar char=""/>
+            </a:pPr>
+            <a:r>
+              <a:rPr lang="en-CA" sz="2000" b="0" u="none" strike="noStrike">
+                <a:solidFill>
+                  <a:srgbClr val="000000"/>
+                </a:solidFill>
+                <a:effectLst/>
+                <a:uFillTx/>
+                <a:latin typeface="Arial"/>
+              </a:rPr>
+              <a:t>Sixth Outline Level</a:t>
+            </a:r>
+            <a:endParaRPr lang="en-CA" sz="2000" b="0" u="none" strike="noStrike">
+              <a:solidFill>
+                <a:srgbClr val="000000"/>
+              </a:solidFill>
+              <a:effectLst/>
+              <a:uFillTx/>
+              <a:latin typeface="Arial"/>
+            </a:endParaRPr>
+          </a:p>
+          <a:p>
+            <a:pPr marL="3024000" lvl="6" indent="-216000">
+              <a:spcBef>
+                <a:spcPts val="283"/>
+              </a:spcBef>
+              <a:buClr>
+                <a:srgbClr val="000000"/>
+              </a:buClr>
+              <a:buSzPct val="45000"/>
+              <a:buFont typeface="Wingdings" charset="2"/>
+              <a:buChar char=""/>
+            </a:pPr>
+            <a:r>
+              <a:rPr lang="en-CA" sz="2000" b="0" u="none" strike="noStrike">
+                <a:solidFill>
+                  <a:srgbClr val="000000"/>
+                </a:solidFill>
+                <a:effectLst/>
+                <a:uFillTx/>
+                <a:latin typeface="Arial"/>
+              </a:rPr>
+              <a:t>Seventh Outline Level</a:t>
+            </a:r>
+            <a:endParaRPr lang="en-CA" sz="2000" b="0" u="none" strike="noStrike">
+              <a:solidFill>
+                <a:srgbClr val="000000"/>
+              </a:solidFill>
+              <a:effectLst/>
+              <a:uFillTx/>
+              <a:latin typeface="Arial"/>
+            </a:endParaRPr>
           </a:p>
         </p:txBody>
       </p:sp>
@@ -367,510 +1130,6 @@
           <a:chExt cx="0" cy="0"/>
         </a:xfrm>
       </p:grpSpPr>
-      <p:sp>
-        <p:nvSpPr>
-          <p:cNvPr id="2" name="PlaceHolder 1"/>
-          <p:cNvSpPr>
-            <a:spLocks noGrp="1"/>
-          </p:cNvSpPr>
-          <p:nvPr>
-            <p:ph type="title"/>
-          </p:nvPr>
-        </p:nvSpPr>
-        <p:spPr>
-          <a:xfrm>
-            <a:off x="502920" y="309600"/>
-            <a:ext cx="9052200" cy="1297440"/>
-          </a:xfrm>
-          <a:prstGeom prst="rect">
-            <a:avLst/>
-          </a:prstGeom>
-          <a:noFill/>
-          <a:ln w="0">
-            <a:noFill/>
-          </a:ln>
-        </p:spPr>
-        <p:txBody>
-          <a:bodyPr lIns="0" rIns="0" tIns="0" bIns="0" anchor="ctr">
-            <a:noAutofit/>
-          </a:bodyPr>
-          <a:p>
-            <a:pPr indent="0" algn="ctr">
-              <a:buNone/>
-            </a:pPr>
-            <a:r>
-              <a:rPr lang="en-CA" sz="6030" b="0" u="none" strike="noStrike">
-                <a:solidFill>
-                  <a:srgbClr val="000000"/>
-                </a:solidFill>
-                <a:effectLst/>
-                <a:uFillTx/>
-                <a:latin typeface="Arial"/>
-              </a:rPr>
-              <a:t>Click to edit the title text format</a:t>
-            </a:r>
-            <a:endParaRPr lang="en-CA" sz="6030" b="0" u="none" strike="noStrike">
-              <a:solidFill>
-                <a:srgbClr val="000000"/>
-              </a:solidFill>
-              <a:effectLst/>
-              <a:uFillTx/>
-              <a:latin typeface="Arial"/>
-            </a:endParaRPr>
-          </a:p>
-        </p:txBody>
-      </p:sp>
-      <p:sp>
-        <p:nvSpPr>
-          <p:cNvPr id="3" name="PlaceHolder 2"/>
-          <p:cNvSpPr>
-            <a:spLocks noGrp="1"/>
-          </p:cNvSpPr>
-          <p:nvPr>
-            <p:ph type="body"/>
-          </p:nvPr>
-        </p:nvSpPr>
-        <p:spPr>
-          <a:xfrm>
-            <a:off x="502920" y="1818000"/>
-            <a:ext cx="9052200" cy="4507560"/>
-          </a:xfrm>
-          <a:prstGeom prst="rect">
-            <a:avLst/>
-          </a:prstGeom>
-          <a:noFill/>
-          <a:ln w="0">
-            <a:noFill/>
-          </a:ln>
-        </p:spPr>
-        <p:txBody>
-          <a:bodyPr lIns="0" rIns="0" tIns="0" bIns="0" anchor="t">
-            <a:normAutofit/>
-          </a:bodyPr>
-          <a:p>
-            <a:pPr marL="432000" indent="-324000">
-              <a:spcBef>
-                <a:spcPts val="1939"/>
-              </a:spcBef>
-              <a:buClr>
-                <a:srgbClr val="000000"/>
-              </a:buClr>
-              <a:buSzPct val="45000"/>
-              <a:buFont typeface="Wingdings" charset="2"/>
-              <a:buChar char=""/>
-            </a:pPr>
-            <a:r>
-              <a:rPr lang="en-CA" sz="4390" b="0" u="none" strike="noStrike">
-                <a:solidFill>
-                  <a:srgbClr val="000000"/>
-                </a:solidFill>
-                <a:effectLst/>
-                <a:uFillTx/>
-                <a:latin typeface="Arial"/>
-              </a:rPr>
-              <a:t>Click to edit the outline text format</a:t>
-            </a:r>
-            <a:endParaRPr lang="en-CA" sz="4390" b="0" u="none" strike="noStrike">
-              <a:solidFill>
-                <a:srgbClr val="000000"/>
-              </a:solidFill>
-              <a:effectLst/>
-              <a:uFillTx/>
-              <a:latin typeface="Arial"/>
-            </a:endParaRPr>
-          </a:p>
-          <a:p>
-            <a:pPr marL="864000" lvl="1" indent="-324000">
-              <a:spcBef>
-                <a:spcPts val="1551"/>
-              </a:spcBef>
-              <a:buClr>
-                <a:srgbClr val="000000"/>
-              </a:buClr>
-              <a:buSzPct val="75000"/>
-              <a:buFont typeface="Symbol" charset="2"/>
-              <a:buChar char=""/>
-            </a:pPr>
-            <a:r>
-              <a:rPr lang="en-CA" sz="3840" b="0" u="none" strike="noStrike">
-                <a:solidFill>
-                  <a:srgbClr val="000000"/>
-                </a:solidFill>
-                <a:effectLst/>
-                <a:uFillTx/>
-                <a:latin typeface="Arial"/>
-              </a:rPr>
-              <a:t>Second Outline Level</a:t>
-            </a:r>
-            <a:endParaRPr lang="en-CA" sz="3840" b="0" u="none" strike="noStrike">
-              <a:solidFill>
-                <a:srgbClr val="000000"/>
-              </a:solidFill>
-              <a:effectLst/>
-              <a:uFillTx/>
-              <a:latin typeface="Arial"/>
-            </a:endParaRPr>
-          </a:p>
-          <a:p>
-            <a:pPr marL="1296000" lvl="2" indent="-288000">
-              <a:spcBef>
-                <a:spcPts val="1159"/>
-              </a:spcBef>
-              <a:buClr>
-                <a:srgbClr val="000000"/>
-              </a:buClr>
-              <a:buSzPct val="45000"/>
-              <a:buFont typeface="Wingdings" charset="2"/>
-              <a:buChar char=""/>
-            </a:pPr>
-            <a:r>
-              <a:rPr lang="en-CA" sz="3290" b="0" u="none" strike="noStrike">
-                <a:solidFill>
-                  <a:srgbClr val="000000"/>
-                </a:solidFill>
-                <a:effectLst/>
-                <a:uFillTx/>
-                <a:latin typeface="Arial"/>
-              </a:rPr>
-              <a:t>Third Outline Level</a:t>
-            </a:r>
-            <a:endParaRPr lang="en-CA" sz="3290" b="0" u="none" strike="noStrike">
-              <a:solidFill>
-                <a:srgbClr val="000000"/>
-              </a:solidFill>
-              <a:effectLst/>
-              <a:uFillTx/>
-              <a:latin typeface="Arial"/>
-            </a:endParaRPr>
-          </a:p>
-          <a:p>
-            <a:pPr marL="1728000" lvl="3" indent="-216000">
-              <a:spcBef>
-                <a:spcPts val="774"/>
-              </a:spcBef>
-              <a:buClr>
-                <a:srgbClr val="000000"/>
-              </a:buClr>
-              <a:buSzPct val="75000"/>
-              <a:buFont typeface="Symbol" charset="2"/>
-              <a:buChar char=""/>
-            </a:pPr>
-            <a:r>
-              <a:rPr lang="en-CA" sz="2740" b="0" u="none" strike="noStrike">
-                <a:solidFill>
-                  <a:srgbClr val="000000"/>
-                </a:solidFill>
-                <a:effectLst/>
-                <a:uFillTx/>
-                <a:latin typeface="Arial"/>
-              </a:rPr>
-              <a:t>Fourth Outline Level</a:t>
-            </a:r>
-            <a:endParaRPr lang="en-CA" sz="2740" b="0" u="none" strike="noStrike">
-              <a:solidFill>
-                <a:srgbClr val="000000"/>
-              </a:solidFill>
-              <a:effectLst/>
-              <a:uFillTx/>
-              <a:latin typeface="Arial"/>
-            </a:endParaRPr>
-          </a:p>
-          <a:p>
-            <a:pPr marL="2160000" lvl="4" indent="-216000">
-              <a:spcBef>
-                <a:spcPts val="386"/>
-              </a:spcBef>
-              <a:buClr>
-                <a:srgbClr val="000000"/>
-              </a:buClr>
-              <a:buSzPct val="45000"/>
-              <a:buFont typeface="Wingdings" charset="2"/>
-              <a:buChar char=""/>
-            </a:pPr>
-            <a:r>
-              <a:rPr lang="en-CA" sz="2740" b="0" u="none" strike="noStrike">
-                <a:solidFill>
-                  <a:srgbClr val="000000"/>
-                </a:solidFill>
-                <a:effectLst/>
-                <a:uFillTx/>
-                <a:latin typeface="Arial"/>
-              </a:rPr>
-              <a:t>Fifth Outline Level</a:t>
-            </a:r>
-            <a:endParaRPr lang="en-CA" sz="2740" b="0" u="none" strike="noStrike">
-              <a:solidFill>
-                <a:srgbClr val="000000"/>
-              </a:solidFill>
-              <a:effectLst/>
-              <a:uFillTx/>
-              <a:latin typeface="Arial"/>
-            </a:endParaRPr>
-          </a:p>
-          <a:p>
-            <a:pPr marL="2592000" lvl="5" indent="-216000">
-              <a:spcBef>
-                <a:spcPts val="386"/>
-              </a:spcBef>
-              <a:buClr>
-                <a:srgbClr val="000000"/>
-              </a:buClr>
-              <a:buSzPct val="45000"/>
-              <a:buFont typeface="Wingdings" charset="2"/>
-              <a:buChar char=""/>
-            </a:pPr>
-            <a:r>
-              <a:rPr lang="en-CA" sz="2740" b="0" u="none" strike="noStrike">
-                <a:solidFill>
-                  <a:srgbClr val="000000"/>
-                </a:solidFill>
-                <a:effectLst/>
-                <a:uFillTx/>
-                <a:latin typeface="Arial"/>
-              </a:rPr>
-              <a:t>Sixth Outline Level</a:t>
-            </a:r>
-            <a:endParaRPr lang="en-CA" sz="2740" b="0" u="none" strike="noStrike">
-              <a:solidFill>
-                <a:srgbClr val="000000"/>
-              </a:solidFill>
-              <a:effectLst/>
-              <a:uFillTx/>
-              <a:latin typeface="Arial"/>
-            </a:endParaRPr>
-          </a:p>
-          <a:p>
-            <a:pPr marL="3024000" lvl="6" indent="-216000">
-              <a:spcBef>
-                <a:spcPts val="386"/>
-              </a:spcBef>
-              <a:buClr>
-                <a:srgbClr val="000000"/>
-              </a:buClr>
-              <a:buSzPct val="45000"/>
-              <a:buFont typeface="Wingdings" charset="2"/>
-              <a:buChar char=""/>
-            </a:pPr>
-            <a:r>
-              <a:rPr lang="en-CA" sz="2740" b="0" u="none" strike="noStrike">
-                <a:solidFill>
-                  <a:srgbClr val="000000"/>
-                </a:solidFill>
-                <a:effectLst/>
-                <a:uFillTx/>
-                <a:latin typeface="Arial"/>
-              </a:rPr>
-              <a:t>Seventh Outline Level</a:t>
-            </a:r>
-            <a:endParaRPr lang="en-CA" sz="2740" b="0" u="none" strike="noStrike">
-              <a:solidFill>
-                <a:srgbClr val="000000"/>
-              </a:solidFill>
-              <a:effectLst/>
-              <a:uFillTx/>
-              <a:latin typeface="Arial"/>
-            </a:endParaRPr>
-          </a:p>
-        </p:txBody>
-      </p:sp>
-      <p:sp>
-        <p:nvSpPr>
-          <p:cNvPr id="4" name="PlaceHolder 3"/>
-          <p:cNvSpPr>
-            <a:spLocks noGrp="1"/>
-          </p:cNvSpPr>
-          <p:nvPr>
-            <p:ph type="dt" idx="1"/>
-          </p:nvPr>
-        </p:nvSpPr>
-        <p:spPr>
-          <a:xfrm>
-            <a:off x="502920" y="7080120"/>
-            <a:ext cx="2343240" cy="535680"/>
-          </a:xfrm>
-          <a:prstGeom prst="rect">
-            <a:avLst/>
-          </a:prstGeom>
-          <a:noFill/>
-          <a:ln w="0">
-            <a:noFill/>
-          </a:ln>
-        </p:spPr>
-        <p:txBody>
-          <a:bodyPr lIns="0" rIns="0" tIns="0" bIns="0" anchor="t">
-            <a:noAutofit/>
-          </a:bodyPr>
-          <a:lstStyle>
-            <a:lvl1pPr indent="0">
-              <a:buNone/>
-              <a:defRPr lang="en-CA" sz="1400" b="0" u="none" strike="noStrike">
-                <a:solidFill>
-                  <a:srgbClr val="000000"/>
-                </a:solidFill>
-                <a:effectLst/>
-                <a:uFillTx/>
-                <a:latin typeface="Times New Roman"/>
-              </a:defRPr>
-            </a:lvl1pPr>
-          </a:lstStyle>
-          <a:p>
-            <a:pPr indent="0">
-              <a:buNone/>
-            </a:pPr>
-            <a:r>
-              <a:rPr lang="en-CA" sz="1400" b="0" u="none" strike="noStrike">
-                <a:solidFill>
-                  <a:srgbClr val="000000"/>
-                </a:solidFill>
-                <a:effectLst/>
-                <a:uFillTx/>
-                <a:latin typeface="Times New Roman"/>
-              </a:rPr>
-              <a:t>&lt;date/time&gt;</a:t>
-            </a:r>
-            <a:endParaRPr lang="en-CA" sz="1400" b="0" u="none" strike="noStrike">
-              <a:solidFill>
-                <a:srgbClr val="000000"/>
-              </a:solidFill>
-              <a:effectLst/>
-              <a:uFillTx/>
-              <a:latin typeface="Times New Roman"/>
-            </a:endParaRPr>
-          </a:p>
-        </p:txBody>
-      </p:sp>
-      <p:sp>
-        <p:nvSpPr>
-          <p:cNvPr id="5" name="PlaceHolder 4"/>
-          <p:cNvSpPr>
-            <a:spLocks noGrp="1"/>
-          </p:cNvSpPr>
-          <p:nvPr>
-            <p:ph type="ftr" idx="2"/>
-          </p:nvPr>
-        </p:nvSpPr>
-        <p:spPr>
-          <a:xfrm>
-            <a:off x="3439440" y="7080120"/>
-            <a:ext cx="3188160" cy="535680"/>
-          </a:xfrm>
-          <a:prstGeom prst="rect">
-            <a:avLst/>
-          </a:prstGeom>
-          <a:noFill/>
-          <a:ln w="0">
-            <a:noFill/>
-          </a:ln>
-        </p:spPr>
-        <p:txBody>
-          <a:bodyPr lIns="0" rIns="0" tIns="0" bIns="0" anchor="t">
-            <a:noAutofit/>
-          </a:bodyPr>
-          <a:lstStyle>
-            <a:lvl1pPr indent="0" algn="ctr">
-              <a:buNone/>
-              <a:defRPr lang="en-CA" sz="1400" b="0" u="none" strike="noStrike">
-                <a:solidFill>
-                  <a:srgbClr val="000000"/>
-                </a:solidFill>
-                <a:effectLst/>
-                <a:uFillTx/>
-                <a:latin typeface="Times New Roman"/>
-              </a:defRPr>
-            </a:lvl1pPr>
-          </a:lstStyle>
-          <a:p>
-            <a:pPr indent="0" algn="ctr">
-              <a:buNone/>
-            </a:pPr>
-            <a:r>
-              <a:rPr lang="en-CA" sz="1400" b="0" u="none" strike="noStrike">
-                <a:solidFill>
-                  <a:srgbClr val="000000"/>
-                </a:solidFill>
-                <a:effectLst/>
-                <a:uFillTx/>
-                <a:latin typeface="Times New Roman"/>
-              </a:rPr>
-              <a:t>&lt;footer&gt;</a:t>
-            </a:r>
-            <a:endParaRPr lang="en-CA" sz="1400" b="0" u="none" strike="noStrike">
-              <a:solidFill>
-                <a:srgbClr val="000000"/>
-              </a:solidFill>
-              <a:effectLst/>
-              <a:uFillTx/>
-              <a:latin typeface="Times New Roman"/>
-            </a:endParaRPr>
-          </a:p>
-        </p:txBody>
-      </p:sp>
-      <p:sp>
-        <p:nvSpPr>
-          <p:cNvPr id="6" name="PlaceHolder 5"/>
-          <p:cNvSpPr>
-            <a:spLocks noGrp="1"/>
-          </p:cNvSpPr>
-          <p:nvPr>
-            <p:ph type="sldNum" idx="3"/>
-          </p:nvPr>
-        </p:nvSpPr>
-        <p:spPr>
-          <a:xfrm>
-            <a:off x="7211160" y="7080120"/>
-            <a:ext cx="2343240" cy="535680"/>
-          </a:xfrm>
-          <a:prstGeom prst="rect">
-            <a:avLst/>
-          </a:prstGeom>
-          <a:noFill/>
-          <a:ln w="0">
-            <a:noFill/>
-          </a:ln>
-        </p:spPr>
-        <p:txBody>
-          <a:bodyPr lIns="0" rIns="0" tIns="0" bIns="0" anchor="t">
-            <a:noAutofit/>
-          </a:bodyPr>
-          <a:lstStyle>
-            <a:lvl1pPr indent="0" algn="r">
-              <a:buNone/>
-              <a:defRPr lang="en-CA" sz="1400" b="0" u="none" strike="noStrike">
-                <a:solidFill>
-                  <a:srgbClr val="000000"/>
-                </a:solidFill>
-                <a:effectLst/>
-                <a:uFillTx/>
-                <a:latin typeface="Times New Roman"/>
-              </a:defRPr>
-            </a:lvl1pPr>
-          </a:lstStyle>
-          <a:p>
-            <a:pPr indent="0" algn="r">
-              <a:buNone/>
-            </a:pPr>
-            <a:fld id="{F4070A7C-E51E-4D25-B410-6E8711AC9FE0}" type="slidenum">
-              <a:rPr lang="en-CA" sz="1400" b="0" u="none" strike="noStrike">
-                <a:solidFill>
-                  <a:srgbClr val="000000"/>
-                </a:solidFill>
-                <a:effectLst/>
-                <a:uFillTx/>
-                <a:latin typeface="Times New Roman"/>
-              </a:rPr>
-              <a:t>&lt;number&gt;</a:t>
-            </a:fld>
-            <a:endParaRPr lang="en-CA" sz="1400" b="0" u="none" strike="noStrike">
-              <a:solidFill>
-                <a:srgbClr val="000000"/>
-              </a:solidFill>
-              <a:effectLst/>
-              <a:uFillTx/>
-              <a:latin typeface="Times New Roman"/>
-            </a:endParaRPr>
-          </a:p>
-        </p:txBody>
-      </p:sp>
     </p:spTree>
   </p:cSld>
   <p:clrMap bg1="lt1" tx1="dk1" bg2="lt2" tx2="dk2" accent1="accent1" accent2="accent2" accent3="accent3" accent4="accent4" accent5="accent5" accent6="accent6" hlink="hlink" folHlink="folHlink"/>
@@ -908,14 +1167,14 @@
       </p:grpSpPr>
       <p:sp>
         <p:nvSpPr>
-          <p:cNvPr id="11" name=""/>
-          <p:cNvSpPr txBox="1"/>
+          <p:cNvPr id="12" name=""/>
+          <p:cNvSpPr/>
           <p:nvPr/>
         </p:nvSpPr>
         <p:spPr>
           <a:xfrm>
             <a:off x="244800" y="282600"/>
-            <a:ext cx="996840" cy="1346040"/>
+            <a:ext cx="996480" cy="1345680"/>
           </a:xfrm>
           <a:prstGeom prst="rect">
             <a:avLst/>
@@ -925,12 +1184,22 @@
             <a:noFill/>
           </a:ln>
         </p:spPr>
+        <p:style>
+          <a:lnRef idx="0"/>
+          <a:fillRef idx="0"/>
+          <a:effectRef idx="0"/>
+          <a:fontRef idx="minor"/>
+        </p:style>
         <p:txBody>
           <a:bodyPr lIns="90000" rIns="90000" tIns="45000" bIns="45000" anchor="t" anchorCtr="1">
             <a:spAutoFit/>
           </a:bodyPr>
           <a:p>
-            <a:pPr algn="ctr"/>
+            <a:pPr algn="ctr">
+              <a:lnSpc>
+                <a:spcPct val="100000"/>
+              </a:lnSpc>
+            </a:pPr>
             <a:r>
               <a:rPr b="0" i="1" sz="1000">
                 <a:solidFill>
@@ -938,7 +1207,7 @@
                 </a:solidFill>
                 <a:latin typeface="Nimbus Roman"/>
               </a:rPr>
-              <a:t>Wide open field and mountain views create a peaceful backdrop just beyond the home.</a:t>
+              <a:t>A bright living room offers comfortable space for relaxing or entertaining.</a:t>
             </a:r>
             <a:endParaRPr lang="en-CA" sz="1000" b="0" u="none" strike="noStrike">
               <a:solidFill>
@@ -950,63 +1219,11 @@
             </a:endParaRPr>
           </a:p>
           <a:p>
-            <a:pPr algn="ctr"/>
-            <a:endParaRPr lang="en-CA" sz="1000" b="0" u="none" strike="noStrike">
-              <a:solidFill>
-                <a:srgbClr val="000000"/>
-              </a:solidFill>
-              <a:effectLst/>
-              <a:uFillTx/>
-              <a:latin typeface="Arial"/>
-            </a:endParaRPr>
-          </a:p>
-        </p:txBody>
-      </p:sp>
-      <p:sp>
-        <p:nvSpPr>
-          <p:cNvPr id="12" name=""/>
-          <p:cNvSpPr txBox="1"/>
-          <p:nvPr/>
-        </p:nvSpPr>
-        <p:spPr>
-          <a:xfrm>
-            <a:off x="2037600" y="1746360"/>
-            <a:ext cx="996840" cy="1405800"/>
-          </a:xfrm>
-          <a:prstGeom prst="rect">
-            <a:avLst/>
-          </a:prstGeom>
-          <a:noFill/>
-          <a:ln w="0">
-            <a:noFill/>
-          </a:ln>
-        </p:spPr>
-        <p:txBody>
-          <a:bodyPr lIns="90000" rIns="90000" tIns="45000" bIns="45000" anchor="t" anchorCtr="1">
-            <a:spAutoFit/>
-          </a:bodyPr>
-          <a:p>
-            <a:pPr algn="ctr"/>
-            <a:r>
-              <a:rPr b="0" i="1" sz="1000">
-                <a:solidFill>
-                  <a:srgbClr val="000000"/>
-                </a:solidFill>
-                <a:latin typeface="Nimbus Roman"/>
-              </a:rPr>
-              <a:t>Spacious primary bedroom with a striking accent wall and great natural light.</a:t>
-            </a:r>
-            <a:endParaRPr lang="en-CA" sz="1000" b="0" u="none" strike="noStrike">
-              <a:solidFill>
-                <a:srgbClr val="000000"/>
-              </a:solidFill>
-              <a:effectLst/>
-              <a:uFillTx/>
-              <a:latin typeface="Arial"/>
-            </a:endParaRPr>
-          </a:p>
-          <a:p>
-            <a:pPr algn="ctr"/>
+            <a:pPr algn="ctr">
+              <a:lnSpc>
+                <a:spcPct val="100000"/>
+              </a:lnSpc>
+            </a:pPr>
             <a:endParaRPr lang="en-CA" sz="1000" b="0" u="none" strike="noStrike">
               <a:solidFill>
                 <a:srgbClr val="000000"/>
@@ -1021,13 +1238,13 @@
       <p:sp>
         <p:nvSpPr>
           <p:cNvPr id="13" name=""/>
-          <p:cNvSpPr txBox="1"/>
+          <p:cNvSpPr/>
           <p:nvPr/>
         </p:nvSpPr>
         <p:spPr>
           <a:xfrm>
-            <a:off x="254160" y="3244320"/>
-            <a:ext cx="996840" cy="1346040"/>
+            <a:off x="2037600" y="1746360"/>
+            <a:ext cx="996480" cy="1405440"/>
           </a:xfrm>
           <a:prstGeom prst="rect">
             <a:avLst/>
@@ -1037,12 +1254,22 @@
             <a:noFill/>
           </a:ln>
         </p:spPr>
+        <p:style>
+          <a:lnRef idx="0"/>
+          <a:fillRef idx="0"/>
+          <a:effectRef idx="0"/>
+          <a:fontRef idx="minor"/>
+        </p:style>
         <p:txBody>
           <a:bodyPr lIns="90000" rIns="90000" tIns="45000" bIns="45000" anchor="t" anchorCtr="1">
             <a:spAutoFit/>
           </a:bodyPr>
           <a:p>
-            <a:pPr algn="ctr"/>
+            <a:pPr algn="ctr">
+              <a:lnSpc>
+                <a:spcPct val="100000"/>
+              </a:lnSpc>
+            </a:pPr>
             <a:r>
               <a:rPr b="0" i="1" sz="1000">
                 <a:solidFill>
@@ -1050,7 +1277,7 @@
                 </a:solidFill>
                 <a:latin typeface="Nimbus Roman"/>
               </a:rPr>
-              <a:t>Fenced backyard opens toward lush green space and a broad field beyond.</a:t>
+              <a:t>The open kitchen features ample cabinetry and an easy connection to dining.</a:t>
             </a:r>
             <a:endParaRPr lang="en-CA" sz="1000" b="0" u="none" strike="noStrike">
               <a:solidFill>
@@ -1062,7 +1289,11 @@
             </a:endParaRPr>
           </a:p>
           <a:p>
-            <a:pPr algn="ctr"/>
+            <a:pPr algn="ctr">
+              <a:lnSpc>
+                <a:spcPct val="100000"/>
+              </a:lnSpc>
+            </a:pPr>
             <a:endParaRPr lang="en-CA" sz="1000" b="0" u="none" strike="noStrike">
               <a:solidFill>
                 <a:srgbClr val="000000"/>
@@ -1077,13 +1308,13 @@
       <p:sp>
         <p:nvSpPr>
           <p:cNvPr id="14" name=""/>
-          <p:cNvSpPr txBox="1"/>
+          <p:cNvSpPr/>
           <p:nvPr/>
         </p:nvSpPr>
         <p:spPr>
           <a:xfrm>
-            <a:off x="1995120" y="4647600"/>
-            <a:ext cx="996840" cy="1346040"/>
+            <a:off x="254160" y="3244320"/>
+            <a:ext cx="996480" cy="1345680"/>
           </a:xfrm>
           <a:prstGeom prst="rect">
             <a:avLst/>
@@ -1093,12 +1324,22 @@
             <a:noFill/>
           </a:ln>
         </p:spPr>
+        <p:style>
+          <a:lnRef idx="0"/>
+          <a:fillRef idx="0"/>
+          <a:effectRef idx="0"/>
+          <a:fontRef idx="minor"/>
+        </p:style>
         <p:txBody>
           <a:bodyPr lIns="90000" rIns="90000" tIns="45000" bIns="45000" anchor="t" anchorCtr="1">
             <a:spAutoFit/>
           </a:bodyPr>
           <a:p>
-            <a:pPr algn="ctr"/>
+            <a:pPr algn="ctr">
+              <a:lnSpc>
+                <a:spcPct val="100000"/>
+              </a:lnSpc>
+            </a:pPr>
             <a:r>
               <a:rPr b="0" i="1" sz="1000">
                 <a:solidFill>
@@ -1106,7 +1347,7 @@
                 </a:solidFill>
                 <a:latin typeface="Nimbus Roman"/>
               </a:rPr>
-              <a:t>Sunny dining area connects easily to the covered deck and backyard outlook.</a:t>
+              <a:t>Sliding doors bring natural light into the dining area and extend living outdoors.</a:t>
             </a:r>
             <a:endParaRPr lang="en-CA" sz="1000" b="0" u="none" strike="noStrike">
               <a:solidFill>
@@ -1118,7 +1359,11 @@
             </a:endParaRPr>
           </a:p>
           <a:p>
-            <a:pPr algn="ctr"/>
+            <a:pPr algn="ctr">
+              <a:lnSpc>
+                <a:spcPct val="100000"/>
+              </a:lnSpc>
+            </a:pPr>
             <a:endParaRPr lang="en-CA" sz="1000" b="0" u="none" strike="noStrike">
               <a:solidFill>
                 <a:srgbClr val="000000"/>
@@ -1133,13 +1378,13 @@
       <p:sp>
         <p:nvSpPr>
           <p:cNvPr id="15" name=""/>
-          <p:cNvSpPr txBox="1"/>
+          <p:cNvSpPr/>
           <p:nvPr/>
         </p:nvSpPr>
         <p:spPr>
           <a:xfrm>
-            <a:off x="280440" y="6067800"/>
-            <a:ext cx="996840" cy="1346040"/>
+            <a:off x="1995120" y="4647600"/>
+            <a:ext cx="996480" cy="1345680"/>
           </a:xfrm>
           <a:prstGeom prst="rect">
             <a:avLst/>
@@ -1149,12 +1394,22 @@
             <a:noFill/>
           </a:ln>
         </p:spPr>
+        <p:style>
+          <a:lnRef idx="0"/>
+          <a:fillRef idx="0"/>
+          <a:effectRef idx="0"/>
+          <a:fontRef idx="minor"/>
+        </p:style>
         <p:txBody>
           <a:bodyPr lIns="90000" rIns="90000" tIns="45000" bIns="45000" anchor="t" anchorCtr="1">
             <a:spAutoFit/>
           </a:bodyPr>
           <a:p>
-            <a:pPr algn="ctr"/>
+            <a:pPr algn="ctr">
+              <a:lnSpc>
+                <a:spcPct val="100000"/>
+              </a:lnSpc>
+            </a:pPr>
             <a:r>
               <a:rPr b="0" i="1" sz="1000">
                 <a:solidFill>
@@ -1162,7 +1417,7 @@
                 </a:solidFill>
                 <a:latin typeface="Nimbus Roman"/>
               </a:rPr>
-              <a:t>Light-filled kitchen offers an efficient layout and calming views of mature greenery.</a:t>
+              <a:t>The primary bedroom feels calm and comfortable with a large window and accent wall.</a:t>
             </a:r>
             <a:endParaRPr lang="en-CA" sz="1000" b="0" u="none" strike="noStrike">
               <a:solidFill>
@@ -1174,7 +1429,11 @@
             </a:endParaRPr>
           </a:p>
           <a:p>
-            <a:pPr algn="ctr"/>
+            <a:pPr algn="ctr">
+              <a:lnSpc>
+                <a:spcPct val="100000"/>
+              </a:lnSpc>
+            </a:pPr>
             <a:endParaRPr lang="en-CA" sz="1000" b="0" u="none" strike="noStrike">
               <a:solidFill>
                 <a:srgbClr val="000000"/>
@@ -1188,14 +1447,14 @@
       </p:sp>
       <p:sp>
         <p:nvSpPr>
-          <p:cNvPr id="21" name=""/>
-          <p:cNvSpPr txBox="1"/>
+          <p:cNvPr id="16" name=""/>
+          <p:cNvSpPr/>
           <p:nvPr/>
         </p:nvSpPr>
         <p:spPr>
           <a:xfrm>
-            <a:off x="3778200" y="341280"/>
-            <a:ext cx="2587680" cy="444600"/>
+            <a:off x="280440" y="6067800"/>
+            <a:ext cx="996480" cy="1345680"/>
           </a:xfrm>
           <a:prstGeom prst="rect">
             <a:avLst/>
@@ -1205,22 +1464,47 @@
             <a:noFill/>
           </a:ln>
         </p:spPr>
+        <p:style>
+          <a:lnRef idx="0"/>
+          <a:fillRef idx="0"/>
+          <a:effectRef idx="0"/>
+          <a:fontRef idx="minor"/>
+        </p:style>
         <p:txBody>
           <a:bodyPr lIns="90000" rIns="90000" tIns="45000" bIns="45000" anchor="t" anchorCtr="1">
             <a:spAutoFit/>
           </a:bodyPr>
           <a:p>
-            <a:pPr algn="ctr"/>
-            <a:r>
-              <a:rPr b="1" i="1" sz="2000">
-                <a:solidFill>
-                  <a:srgbClr val="000000"/>
-                </a:solidFill>
-                <a:latin typeface="Nimbus Roman"/>
-              </a:rPr>
-              <a:t>4-1616 Happyvale Ave</a:t>
-            </a:r>
-            <a:endParaRPr lang="en-CA" sz="2000" b="0" u="none" strike="noStrike">
+            <a:pPr algn="ctr">
+              <a:lnSpc>
+                <a:spcPct val="100000"/>
+              </a:lnSpc>
+            </a:pPr>
+            <a:r>
+              <a:rPr b="0" i="1" sz="1000">
+                <a:solidFill>
+                  <a:srgbClr val="000000"/>
+                </a:solidFill>
+                <a:latin typeface="Nimbus Roman"/>
+              </a:rPr>
+              <a:t>A flexible bonus room suits reading, media, hobbies, or a quiet workspace.</a:t>
+            </a:r>
+            <a:endParaRPr lang="en-CA" sz="1000" b="0" u="none" strike="noStrike">
+              <a:solidFill>
+                <a:srgbClr val="000000"/>
+              </a:solidFill>
+              <a:effectLst/>
+              <a:uFillTx/>
+              <a:latin typeface="Arial"/>
+            </a:endParaRPr>
+          </a:p>
+          <a:p>
+            <a:pPr algn="ctr">
+              <a:lnSpc>
+                <a:spcPct val="100000"/>
+              </a:lnSpc>
+            </a:pPr>
+            <a:endParaRPr lang="en-CA" sz="1000" b="0" u="none" strike="noStrike">
               <a:solidFill>
                 <a:srgbClr val="000000"/>
               </a:solidFill>
@@ -1234,13 +1518,13 @@
       <p:sp>
         <p:nvSpPr>
           <p:cNvPr id="22" name=""/>
-          <p:cNvSpPr txBox="1"/>
+          <p:cNvSpPr/>
           <p:nvPr/>
         </p:nvSpPr>
         <p:spPr>
           <a:xfrm>
-            <a:off x="3651120" y="785880"/>
-            <a:ext cx="2825640" cy="5514120"/>
+            <a:off x="3778200" y="341280"/>
+            <a:ext cx="2587320" cy="444240"/>
           </a:xfrm>
           <a:prstGeom prst="rect">
             <a:avLst/>
@@ -1250,6 +1534,67 @@
             <a:noFill/>
           </a:ln>
         </p:spPr>
+        <p:style>
+          <a:lnRef idx="0"/>
+          <a:fillRef idx="0"/>
+          <a:effectRef idx="0"/>
+          <a:fontRef idx="minor"/>
+        </p:style>
+        <p:txBody>
+          <a:bodyPr lIns="90000" rIns="90000" tIns="45000" bIns="45000" anchor="t" anchorCtr="1">
+            <a:spAutoFit/>
+          </a:bodyPr>
+          <a:p>
+            <a:pPr algn="ctr">
+              <a:lnSpc>
+                <a:spcPct val="100000"/>
+              </a:lnSpc>
+            </a:pPr>
+            <a:r>
+              <a:rPr b="1" i="1" sz="2000">
+                <a:solidFill>
+                  <a:srgbClr val="000000"/>
+                </a:solidFill>
+                <a:latin typeface="Nimbus Roman"/>
+              </a:rPr>
+              <a:t>4-1616 Happyvale Avenue</a:t>
+            </a:r>
+            <a:endParaRPr lang="en-CA" sz="2000" b="0" u="none" strike="noStrike">
+              <a:solidFill>
+                <a:srgbClr val="000000"/>
+              </a:solidFill>
+              <a:effectLst/>
+              <a:uFillTx/>
+              <a:latin typeface="Arial"/>
+            </a:endParaRPr>
+          </a:p>
+        </p:txBody>
+      </p:sp>
+      <p:sp>
+        <p:nvSpPr>
+          <p:cNvPr id="23" name=""/>
+          <p:cNvSpPr/>
+          <p:nvPr/>
+        </p:nvSpPr>
+        <p:spPr>
+          <a:xfrm>
+            <a:off x="3651120" y="785880"/>
+            <a:ext cx="2825280" cy="5513760"/>
+          </a:xfrm>
+          <a:prstGeom prst="rect">
+            <a:avLst/>
+          </a:prstGeom>
+          <a:noFill/>
+          <a:ln w="0">
+            <a:noFill/>
+          </a:ln>
+        </p:spPr>
+        <p:style>
+          <a:lnRef idx="0"/>
+          <a:fillRef idx="0"/>
+          <a:effectRef idx="0"/>
+          <a:fontRef idx="minor"/>
+        </p:style>
         <p:txBody>
           <a:bodyPr lIns="90000" rIns="90000" tIns="45000" bIns="45000" anchor="t">
             <a:noAutofit/>
@@ -1279,7 +1624,7 @@
                 </a:solidFill>
                 <a:latin typeface="Nimbus Roman"/>
               </a:rPr>
-              <a:t>This bright and functional three-level split townhome offers over 1,700 square feet of well-planned living space in Brocklehurst.</a:t>
+              <a:t>Enjoy a functional three-level split design offering over 1,700 square feet for family living, guests, or home office needs.</a:t>
             </a:r>
             <a:endParaRPr lang="en-CA" sz="1100" b="0" u="none" strike="noStrike">
               <a:solidFill>
@@ -1315,7 +1660,7 @@
                 </a:solidFill>
                 <a:latin typeface="Nimbus Roman"/>
               </a:rPr>
-              <a:t>A 2012 renovation updated the kitchen, flooring, appliances, windows, roof, lighting, decks, and railings for lasting everyday appeal.</a:t>
+              <a:t>The sunny dining room opens to a sundeck with views over the fenced backyard and green space beyond.</a:t>
             </a:r>
           </a:p>
           <a:p>
@@ -1343,7 +1688,7 @@
                 </a:solidFill>
                 <a:latin typeface="Nimbus Roman"/>
               </a:rPr>
-              <a:t>The sunny dining area opens to a covered sundeck overlooking the fenced backyard and peaceful green space beyond.</a:t>
+              <a:t>Thoughtful 2012 updates include the kitchen, flooring, appliances, windows, roof, lighting, decks, and railings.</a:t>
             </a:r>
           </a:p>
           <a:p>
@@ -1371,7 +1716,7 @@
                 </a:solidFill>
                 <a:latin typeface="Nimbus Roman"/>
               </a:rPr>
-              <a:t>A flexible four-bedroom layout includes main floor laundry, a generous family room, and excellent storage for busy households.</a:t>
+              <a:t>A double garage with workshop space, rear pass-through access, and four total parking spots adds everyday convenience.</a:t>
             </a:r>
           </a:p>
           <a:p>
@@ -1399,7 +1744,7 @@
                 </a:solidFill>
                 <a:latin typeface="Nimbus Roman"/>
               </a:rPr>
-              <a:t>The double attached garage includes workshop space and rear yard access, complemented by extra driveway and assigned parking.</a:t>
+              <a:t>This pet- and rental-friendly complex offers flexibility for owners, investors, and households with changing needs.</a:t>
             </a:r>
           </a:p>
           <a:p>
@@ -1427,21 +1772,21 @@
                 </a:solidFill>
                 <a:latin typeface="Nimbus Roman"/>
               </a:rPr>
-              <a:t>Pet-friendly and rental-friendly, this home is close to schools, shopping, McArthur Island Park, and River’s Trail.</a:t>
+              <a:t>Set in Brocklehurst near schools, shopping, McArthur Island Park, and the scenic River’s Trail.</a:t>
             </a:r>
           </a:p>
         </p:txBody>
       </p:sp>
       <p:sp>
         <p:nvSpPr>
-          <p:cNvPr id="23" name=""/>
-          <p:cNvSpPr txBox="1"/>
+          <p:cNvPr id="24" name=""/>
+          <p:cNvSpPr/>
           <p:nvPr/>
         </p:nvSpPr>
         <p:spPr>
           <a:xfrm>
             <a:off x="7111800" y="1428840"/>
-            <a:ext cx="2587680" cy="444600"/>
+            <a:ext cx="2587320" cy="444240"/>
           </a:xfrm>
           <a:prstGeom prst="rect">
             <a:avLst/>
@@ -1451,12 +1796,22 @@
             <a:noFill/>
           </a:ln>
         </p:spPr>
+        <p:style>
+          <a:lnRef idx="0"/>
+          <a:fillRef idx="0"/>
+          <a:effectRef idx="0"/>
+          <a:fontRef idx="minor"/>
+        </p:style>
         <p:txBody>
           <a:bodyPr lIns="90000" rIns="90000" tIns="45000" bIns="45000" anchor="t" anchorCtr="1">
             <a:spAutoFit/>
           </a:bodyPr>
           <a:p>
-            <a:pPr algn="ctr"/>
+            <a:pPr algn="ctr">
+              <a:lnSpc>
+                <a:spcPct val="100000"/>
+              </a:lnSpc>
+            </a:pPr>
             <a:r>
               <a:rPr b="1" i="1" sz="2000">
                 <a:solidFill>
@@ -1464,54 +1819,9 @@
                 </a:solidFill>
                 <a:latin typeface="Nimbus Roman"/>
               </a:rPr>
-              <a:t>4-1616 Happyvale Ave</a:t>
+              <a:t>4-1616 Happyvale Avenue</a:t>
             </a:r>
             <a:endParaRPr lang="en-CA" sz="2000" b="0" u="none" strike="noStrike">
-              <a:solidFill>
-                <a:srgbClr val="000000"/>
-              </a:solidFill>
-              <a:effectLst/>
-              <a:uFillTx/>
-              <a:latin typeface="Arial"/>
-            </a:endParaRPr>
-          </a:p>
-        </p:txBody>
-      </p:sp>
-      <p:sp>
-        <p:nvSpPr>
-          <p:cNvPr id="25" name=""/>
-          <p:cNvSpPr txBox="1"/>
-          <p:nvPr/>
-        </p:nvSpPr>
-        <p:spPr>
-          <a:xfrm>
-            <a:off x="7139160" y="4844520"/>
-            <a:ext cx="2587680" cy="444600"/>
-          </a:xfrm>
-          <a:prstGeom prst="rect">
-            <a:avLst/>
-          </a:prstGeom>
-          <a:noFill/>
-          <a:ln w="0">
-            <a:noFill/>
-          </a:ln>
-        </p:spPr>
-        <p:txBody>
-          <a:bodyPr lIns="90000" rIns="90000" tIns="45000" bIns="45000" anchor="t" anchorCtr="1">
-            <a:spAutoFit/>
-          </a:bodyPr>
-          <a:p>
-            <a:pPr algn="ctr"/>
-            <a:r>
-              <a:rPr b="1" i="1" sz="1600">
-                <a:solidFill>
-                  <a:srgbClr val="000000"/>
-                </a:solidFill>
-                <a:latin typeface="Nimbus Roman"/>
-              </a:rPr>
-              <a:t>Bright Brocklehurst Living Backing Onto Green Space</a:t>
-            </a:r>
-            <a:endParaRPr lang="en-CA" sz="1600" b="0" u="none" strike="noStrike">
               <a:solidFill>
                 <a:srgbClr val="000000"/>
               </a:solidFill>
@@ -1525,13 +1835,13 @@
       <p:sp>
         <p:nvSpPr>
           <p:cNvPr id="26" name=""/>
-          <p:cNvSpPr txBox="1"/>
+          <p:cNvSpPr/>
           <p:nvPr/>
         </p:nvSpPr>
         <p:spPr>
           <a:xfrm>
-            <a:off x="7132320" y="6575400"/>
-            <a:ext cx="2587680" cy="444600"/>
+            <a:off x="7139160" y="4844520"/>
+            <a:ext cx="2587320" cy="444240"/>
           </a:xfrm>
           <a:prstGeom prst="rect">
             <a:avLst/>
@@ -1541,22 +1851,32 @@
             <a:noFill/>
           </a:ln>
         </p:spPr>
+        <p:style>
+          <a:lnRef idx="0"/>
+          <a:fillRef idx="0"/>
+          <a:effectRef idx="0"/>
+          <a:fontRef idx="minor"/>
+        </p:style>
         <p:txBody>
           <a:bodyPr lIns="90000" rIns="90000" tIns="45000" bIns="45000" anchor="t" anchorCtr="1">
             <a:spAutoFit/>
           </a:bodyPr>
           <a:p>
-            <a:pPr algn="ctr"/>
-            <a:r>
-              <a:rPr b="1" i="1" sz="2000">
-                <a:solidFill>
-                  <a:srgbClr val="000000"/>
-                </a:solidFill>
-                <a:latin typeface="Nimbus Roman"/>
-              </a:rPr>
-              <a:t>$499,900</a:t>
-            </a:r>
-            <a:endParaRPr lang="en-CA" sz="2000" b="0" u="none" strike="noStrike">
+            <a:pPr algn="ctr">
+              <a:lnSpc>
+                <a:spcPct val="100000"/>
+              </a:lnSpc>
+            </a:pPr>
+            <a:r>
+              <a:rPr b="1" i="1" sz="1600">
+                <a:solidFill>
+                  <a:srgbClr val="000000"/>
+                </a:solidFill>
+                <a:latin typeface="Nimbus Roman"/>
+              </a:rPr>
+              <a:t>Bright Brocklehurst Townhome With Space To Grow</a:t>
+            </a:r>
+            <a:endParaRPr lang="en-CA" sz="1600" b="0" u="none" strike="noStrike">
               <a:solidFill>
                 <a:srgbClr val="000000"/>
               </a:solidFill>
@@ -1570,13 +1890,13 @@
       <p:sp>
         <p:nvSpPr>
           <p:cNvPr id="27" name=""/>
-          <p:cNvSpPr txBox="1"/>
+          <p:cNvSpPr/>
           <p:nvPr/>
         </p:nvSpPr>
         <p:spPr>
           <a:xfrm>
-            <a:off x="7132320" y="6130800"/>
-            <a:ext cx="2587680" cy="444600"/>
+            <a:off x="7132320" y="6575400"/>
+            <a:ext cx="2587320" cy="444240"/>
           </a:xfrm>
           <a:prstGeom prst="rect">
             <a:avLst/>
@@ -1586,12 +1906,77 @@
             <a:noFill/>
           </a:ln>
         </p:spPr>
+        <p:style>
+          <a:lnRef idx="0"/>
+          <a:fillRef idx="0"/>
+          <a:effectRef idx="0"/>
+          <a:fontRef idx="minor"/>
+        </p:style>
         <p:txBody>
           <a:bodyPr lIns="90000" rIns="90000" tIns="45000" bIns="45000" anchor="t" anchorCtr="1">
             <a:spAutoFit/>
           </a:bodyPr>
           <a:p>
-            <a:pPr algn="ctr"/>
+            <a:pPr algn="ctr">
+              <a:lnSpc>
+                <a:spcPct val="100000"/>
+              </a:lnSpc>
+            </a:pPr>
+            <a:r>
+              <a:rPr b="1" i="1" sz="2000">
+                <a:solidFill>
+                  <a:srgbClr val="000000"/>
+                </a:solidFill>
+                <a:latin typeface="Nimbus Roman"/>
+              </a:rPr>
+              <a:t>$499,900</a:t>
+            </a:r>
+            <a:endParaRPr lang="en-CA" sz="2000" b="0" u="none" strike="noStrike">
+              <a:solidFill>
+                <a:srgbClr val="000000"/>
+              </a:solidFill>
+              <a:effectLst/>
+              <a:uFillTx/>
+              <a:latin typeface="Arial"/>
+            </a:endParaRPr>
+          </a:p>
+        </p:txBody>
+      </p:sp>
+      <p:sp>
+        <p:nvSpPr>
+          <p:cNvPr id="28" name=""/>
+          <p:cNvSpPr/>
+          <p:nvPr/>
+        </p:nvSpPr>
+        <p:spPr>
+          <a:xfrm>
+            <a:off x="7132320" y="6130800"/>
+            <a:ext cx="2587320" cy="444240"/>
+          </a:xfrm>
+          <a:prstGeom prst="rect">
+            <a:avLst/>
+          </a:prstGeom>
+          <a:noFill/>
+          <a:ln w="0">
+            <a:noFill/>
+          </a:ln>
+        </p:spPr>
+        <p:style>
+          <a:lnRef idx="0"/>
+          <a:fillRef idx="0"/>
+          <a:effectRef idx="0"/>
+          <a:fontRef idx="minor"/>
+        </p:style>
+        <p:txBody>
+          <a:bodyPr lIns="90000" rIns="90000" tIns="45000" bIns="45000" anchor="t" anchorCtr="1">
+            <a:spAutoFit/>
+          </a:bodyPr>
+          <a:p>
+            <a:pPr algn="ctr">
+              <a:lnSpc>
+                <a:spcPct val="100000"/>
+              </a:lnSpc>
+            </a:pPr>
             <a:r>
               <a:rPr b="1" i="1" sz="1600">
                 <a:solidFill>
@@ -1614,7 +1999,7 @@
       </p:sp>
       <p:pic>
         <p:nvPicPr>
-          <p:cNvPr id="28" name="Picture 27" descr="DSC03355.jpg"/>
+          <p:cNvPr id="29" name="Picture 28" descr="DSC03372.jpg"/>
           <p:cNvPicPr>
             <a:picLocks noChangeAspect="1"/>
           </p:cNvPicPr>
@@ -1622,7 +2007,7 @@
         </p:nvPicPr>
         <p:blipFill>
           <a:blip r:embed="rId3"/>
-          <a:srcRect l="6632" r="6632"/>
+          <a:srcRect l="6731" r="6731"/>
           <a:stretch>
             <a:fillRect/>
           </a:stretch>
@@ -1630,7 +2015,7 @@
         <p:spPr>
           <a:xfrm>
             <a:off x="1255320" y="270000"/>
-            <a:ext cx="1765800" cy="1358280"/>
+            <a:ext cx="1765440" cy="1357920"/>
           </a:xfrm>
           <a:prstGeom prst="rect">
             <a:avLst/>
@@ -1639,7 +2024,7 @@
       </p:pic>
       <p:pic>
         <p:nvPicPr>
-          <p:cNvPr id="29" name="Picture 28" descr="DSC03411.jpg"/>
+          <p:cNvPr id="30" name="Picture 29" descr="DSC03381.jpg"/>
           <p:cNvPicPr>
             <a:picLocks noChangeAspect="1"/>
           </p:cNvPicPr>
@@ -1647,7 +2032,7 @@
         </p:nvPicPr>
         <p:blipFill>
           <a:blip r:embed="rId4"/>
-          <a:srcRect l="7507" r="7507"/>
+          <a:srcRect l="7405" r="7405"/>
           <a:stretch>
             <a:fillRect/>
           </a:stretch>
@@ -1655,7 +2040,7 @@
         <p:spPr>
           <a:xfrm>
             <a:off x="240480" y="1755720"/>
-            <a:ext cx="1801800" cy="1411200"/>
+            <a:ext cx="1801440" cy="1410840"/>
           </a:xfrm>
           <a:prstGeom prst="rect">
             <a:avLst/>
@@ -1664,7 +2049,7 @@
       </p:pic>
       <p:pic>
         <p:nvPicPr>
-          <p:cNvPr id="30" name="Picture 29" descr="DSC03378.jpg"/>
+          <p:cNvPr id="31" name="Picture 30" descr="DSC03411.jpg"/>
           <p:cNvPicPr>
             <a:picLocks noChangeAspect="1"/>
           </p:cNvPicPr>
@@ -1672,7 +2057,7 @@
         </p:nvPicPr>
         <p:blipFill>
           <a:blip r:embed="rId5"/>
-          <a:srcRect l="7408" r="7408"/>
+          <a:srcRect l="7505" r="7505"/>
           <a:stretch>
             <a:fillRect/>
           </a:stretch>
@@ -1680,7 +2065,7 @@
         <p:spPr>
           <a:xfrm>
             <a:off x="239760" y="4661640"/>
-            <a:ext cx="1703880" cy="1334520"/>
+            <a:ext cx="1703520" cy="1334160"/>
           </a:xfrm>
           <a:prstGeom prst="rect">
             <a:avLst/>
@@ -1689,7 +2074,7 @@
       </p:pic>
       <p:pic>
         <p:nvPicPr>
-          <p:cNvPr id="31" name="Picture 30" descr="DSC03349.jpg"/>
+          <p:cNvPr id="32" name="Picture 31" descr="DSC03378.jpg"/>
           <p:cNvPicPr>
             <a:picLocks noChangeAspect="1"/>
           </p:cNvPicPr>
@@ -1697,7 +2082,7 @@
         </p:nvPicPr>
         <p:blipFill>
           <a:blip r:embed="rId6"/>
-          <a:srcRect l="6512" r="6512"/>
+          <a:srcRect l="6509" r="6509"/>
           <a:stretch>
             <a:fillRect/>
           </a:stretch>
@@ -1705,7 +2090,7 @@
         <p:spPr>
           <a:xfrm>
             <a:off x="1319760" y="3267720"/>
-            <a:ext cx="1700280" cy="1304280"/>
+            <a:ext cx="1699920" cy="1303920"/>
           </a:xfrm>
           <a:prstGeom prst="rect">
             <a:avLst/>
@@ -1714,7 +2099,7 @@
       </p:pic>
       <p:pic>
         <p:nvPicPr>
-          <p:cNvPr id="32" name="Picture 31" descr="DSC03381.jpg"/>
+          <p:cNvPr id="33" name="Picture 32" descr="DSC03405.jpg"/>
           <p:cNvPicPr>
             <a:picLocks noChangeAspect="1"/>
           </p:cNvPicPr>
@@ -1722,7 +2107,7 @@
         </p:nvPicPr>
         <p:blipFill>
           <a:blip r:embed="rId7"/>
-          <a:srcRect l="7442" r="7442"/>
+          <a:srcRect l="7439" r="7439"/>
           <a:stretch>
             <a:fillRect/>
           </a:stretch>
@@ -1730,7 +2115,7 @@
         <p:spPr>
           <a:xfrm>
             <a:off x="1380960" y="6063840"/>
-            <a:ext cx="1640520" cy="1285920"/>
+            <a:ext cx="1640160" cy="1285560"/>
           </a:xfrm>
           <a:prstGeom prst="rect">
             <a:avLst/>
@@ -1739,7 +2124,7 @@
       </p:pic>
       <p:pic>
         <p:nvPicPr>
-          <p:cNvPr id="33" name="Picture 32" descr="DSC03343.jpg"/>
+          <p:cNvPr id="34" name="Picture 33" descr="DSC03343.jpg"/>
           <p:cNvPicPr>
             <a:picLocks noChangeAspect="1"/>
           </p:cNvPicPr>
@@ -1747,7 +2132,7 @@
         </p:nvPicPr>
         <p:blipFill>
           <a:blip r:embed="rId8"/>
-          <a:srcRect l="4093" r="4093"/>
+          <a:srcRect l="4091" r="4091"/>
           <a:stretch>
             <a:fillRect/>
           </a:stretch>
@@ -1755,7 +2140,7 @@
         <p:spPr>
           <a:xfrm>
             <a:off x="7064640" y="2086920"/>
-            <a:ext cx="2665800" cy="1937160"/>
+            <a:ext cx="2665440" cy="1936800"/>
           </a:xfrm>
           <a:prstGeom prst="rect">
             <a:avLst/>
@@ -1802,14 +2187,14 @@
       </p:grpSpPr>
       <p:sp>
         <p:nvSpPr>
-          <p:cNvPr id="33" name=""/>
-          <p:cNvSpPr txBox="1"/>
+          <p:cNvPr id="34" name=""/>
+          <p:cNvSpPr/>
           <p:nvPr/>
         </p:nvSpPr>
         <p:spPr>
           <a:xfrm>
             <a:off x="315720" y="224640"/>
-            <a:ext cx="996840" cy="1346040"/>
+            <a:ext cx="996480" cy="1345680"/>
           </a:xfrm>
           <a:prstGeom prst="rect">
             <a:avLst/>
@@ -1819,12 +2204,22 @@
             <a:noFill/>
           </a:ln>
         </p:spPr>
+        <p:style>
+          <a:lnRef idx="0"/>
+          <a:fillRef idx="0"/>
+          <a:effectRef idx="0"/>
+          <a:fontRef idx="minor"/>
+        </p:style>
         <p:txBody>
           <a:bodyPr lIns="90000" rIns="90000" tIns="45000" bIns="45000" anchor="t" anchorCtr="1">
             <a:spAutoFit/>
           </a:bodyPr>
           <a:p>
-            <a:pPr algn="ctr"/>
+            <a:pPr algn="ctr">
+              <a:lnSpc>
+                <a:spcPct val="100000"/>
+              </a:lnSpc>
+            </a:pPr>
             <a:r>
               <a:rPr b="0" i="1" sz="1000">
                 <a:solidFill>
@@ -1832,7 +2227,7 @@
                 </a:solidFill>
                 <a:latin typeface="Nimbus Roman"/>
               </a:rPr>
-              <a:t>Covered deck provides space to barbeque, relax, and enjoy the leafy setting.</a:t>
+              <a:t>The fenced yard backs onto green space shaded by mature trees.</a:t>
             </a:r>
             <a:endParaRPr lang="en-CA" sz="1000" b="0" u="none" strike="noStrike">
               <a:solidFill>
@@ -1844,63 +2239,11 @@
             </a:endParaRPr>
           </a:p>
           <a:p>
-            <a:pPr algn="ctr"/>
-            <a:endParaRPr lang="en-CA" sz="1000" b="0" u="none" strike="noStrike">
-              <a:solidFill>
-                <a:srgbClr val="000000"/>
-              </a:solidFill>
-              <a:effectLst/>
-              <a:uFillTx/>
-              <a:latin typeface="Arial"/>
-            </a:endParaRPr>
-          </a:p>
-        </p:txBody>
-      </p:sp>
-      <p:sp>
-        <p:nvSpPr>
-          <p:cNvPr id="34" name=""/>
-          <p:cNvSpPr txBox="1"/>
-          <p:nvPr/>
-        </p:nvSpPr>
-        <p:spPr>
-          <a:xfrm>
-            <a:off x="1975680" y="1650240"/>
-            <a:ext cx="1045800" cy="1337040"/>
-          </a:xfrm>
-          <a:prstGeom prst="rect">
-            <a:avLst/>
-          </a:prstGeom>
-          <a:noFill/>
-          <a:ln w="0">
-            <a:noFill/>
-          </a:ln>
-        </p:spPr>
-        <p:txBody>
-          <a:bodyPr lIns="90000" rIns="90000" tIns="45000" bIns="45000" anchor="t" anchorCtr="1">
-            <a:spAutoFit/>
-          </a:bodyPr>
-          <a:p>
-            <a:pPr algn="ctr"/>
-            <a:r>
-              <a:rPr b="0" i="1" sz="1000">
-                <a:solidFill>
-                  <a:srgbClr val="000000"/>
-                </a:solidFill>
-                <a:latin typeface="Nimbus Roman"/>
-              </a:rPr>
-              <a:t>Bright living room feels welcoming and open with soft natural light throughout.</a:t>
-            </a:r>
-            <a:endParaRPr lang="en-CA" sz="1000" b="0" u="none" strike="noStrike">
-              <a:solidFill>
-                <a:srgbClr val="000000"/>
-              </a:solidFill>
-              <a:effectLst/>
-              <a:uFillTx/>
-              <a:latin typeface="Arial"/>
-            </a:endParaRPr>
-          </a:p>
-          <a:p>
-            <a:pPr algn="ctr"/>
+            <a:pPr algn="ctr">
+              <a:lnSpc>
+                <a:spcPct val="100000"/>
+              </a:lnSpc>
+            </a:pPr>
             <a:endParaRPr lang="en-CA" sz="1000" b="0" u="none" strike="noStrike">
               <a:solidFill>
                 <a:srgbClr val="000000"/>
@@ -1915,13 +2258,13 @@
       <p:sp>
         <p:nvSpPr>
           <p:cNvPr id="35" name=""/>
-          <p:cNvSpPr txBox="1"/>
+          <p:cNvSpPr/>
           <p:nvPr/>
         </p:nvSpPr>
         <p:spPr>
           <a:xfrm>
-            <a:off x="289800" y="3106080"/>
-            <a:ext cx="1033560" cy="1370880"/>
+            <a:off x="1975680" y="1650240"/>
+            <a:ext cx="1045440" cy="1336680"/>
           </a:xfrm>
           <a:prstGeom prst="rect">
             <a:avLst/>
@@ -1931,12 +2274,22 @@
             <a:noFill/>
           </a:ln>
         </p:spPr>
+        <p:style>
+          <a:lnRef idx="0"/>
+          <a:fillRef idx="0"/>
+          <a:effectRef idx="0"/>
+          <a:fontRef idx="minor"/>
+        </p:style>
         <p:txBody>
           <a:bodyPr lIns="90000" rIns="90000" tIns="45000" bIns="45000" anchor="t" anchorCtr="1">
             <a:spAutoFit/>
           </a:bodyPr>
           <a:p>
-            <a:pPr algn="ctr"/>
+            <a:pPr algn="ctr">
+              <a:lnSpc>
+                <a:spcPct val="100000"/>
+              </a:lnSpc>
+            </a:pPr>
             <a:r>
               <a:rPr b="0" i="1" sz="1000">
                 <a:solidFill>
@@ -1944,7 +2297,7 @@
                 </a:solidFill>
                 <a:latin typeface="Nimbus Roman"/>
               </a:rPr>
-              <a:t>Clean full bathroom with natural light and timeless neutral finishes.</a:t>
+              <a:t>A covered balcony overlooks greenery and offers a relaxed spot for grilling.</a:t>
             </a:r>
             <a:endParaRPr lang="en-CA" sz="1000" b="0" u="none" strike="noStrike">
               <a:solidFill>
@@ -1956,7 +2309,11 @@
             </a:endParaRPr>
           </a:p>
           <a:p>
-            <a:pPr algn="ctr"/>
+            <a:pPr algn="ctr">
+              <a:lnSpc>
+                <a:spcPct val="100000"/>
+              </a:lnSpc>
+            </a:pPr>
             <a:endParaRPr lang="en-CA" sz="1000" b="0" u="none" strike="noStrike">
               <a:solidFill>
                 <a:srgbClr val="000000"/>
@@ -1971,13 +2328,13 @@
       <p:sp>
         <p:nvSpPr>
           <p:cNvPr id="36" name=""/>
-          <p:cNvSpPr txBox="1"/>
+          <p:cNvSpPr/>
           <p:nvPr/>
         </p:nvSpPr>
         <p:spPr>
           <a:xfrm>
-            <a:off x="308520" y="6153840"/>
-            <a:ext cx="1023480" cy="1317600"/>
+            <a:off x="289800" y="3106080"/>
+            <a:ext cx="1033200" cy="1370520"/>
           </a:xfrm>
           <a:prstGeom prst="rect">
             <a:avLst/>
@@ -1987,12 +2344,22 @@
             <a:noFill/>
           </a:ln>
         </p:spPr>
+        <p:style>
+          <a:lnRef idx="0"/>
+          <a:fillRef idx="0"/>
+          <a:effectRef idx="0"/>
+          <a:fontRef idx="minor"/>
+        </p:style>
         <p:txBody>
           <a:bodyPr lIns="90000" rIns="90000" tIns="45000" bIns="45000" anchor="t" anchorCtr="1">
             <a:spAutoFit/>
           </a:bodyPr>
           <a:p>
-            <a:pPr algn="ctr"/>
+            <a:pPr algn="ctr">
+              <a:lnSpc>
+                <a:spcPct val="100000"/>
+              </a:lnSpc>
+            </a:pPr>
             <a:r>
               <a:rPr b="0" i="1" sz="1000">
                 <a:solidFill>
@@ -2000,7 +2367,7 @@
                 </a:solidFill>
                 <a:latin typeface="Nimbus Roman"/>
               </a:rPr>
-              <a:t>Neighborhood green space offers an open feel with lovely mountain views nearby.</a:t>
+              <a:t>The finished lower level provides generous flex space for work, fitness, or play.</a:t>
             </a:r>
             <a:endParaRPr lang="en-CA" sz="1000" b="0" u="none" strike="noStrike">
               <a:solidFill>
@@ -2012,7 +2379,11 @@
             </a:endParaRPr>
           </a:p>
           <a:p>
-            <a:pPr algn="ctr"/>
+            <a:pPr algn="ctr">
+              <a:lnSpc>
+                <a:spcPct val="100000"/>
+              </a:lnSpc>
+            </a:pPr>
             <a:endParaRPr lang="en-CA" sz="1000" b="0" u="none" strike="noStrike">
               <a:solidFill>
                 <a:srgbClr val="000000"/>
@@ -2027,13 +2398,13 @@
       <p:sp>
         <p:nvSpPr>
           <p:cNvPr id="37" name=""/>
-          <p:cNvSpPr txBox="1"/>
+          <p:cNvSpPr/>
           <p:nvPr/>
         </p:nvSpPr>
         <p:spPr>
           <a:xfrm>
-            <a:off x="1879200" y="4596840"/>
-            <a:ext cx="1149840" cy="1464840"/>
+            <a:off x="308520" y="6153840"/>
+            <a:ext cx="1023120" cy="1317240"/>
           </a:xfrm>
           <a:prstGeom prst="rect">
             <a:avLst/>
@@ -2043,12 +2414,22 @@
             <a:noFill/>
           </a:ln>
         </p:spPr>
+        <p:style>
+          <a:lnRef idx="0"/>
+          <a:fillRef idx="0"/>
+          <a:effectRef idx="0"/>
+          <a:fontRef idx="minor"/>
+        </p:style>
         <p:txBody>
           <a:bodyPr lIns="90000" rIns="90000" tIns="45000" bIns="45000" anchor="t" anchorCtr="1">
             <a:spAutoFit/>
           </a:bodyPr>
           <a:p>
-            <a:pPr algn="ctr"/>
+            <a:pPr algn="ctr">
+              <a:lnSpc>
+                <a:spcPct val="100000"/>
+              </a:lnSpc>
+            </a:pPr>
             <a:r>
               <a:rPr b="0" i="1" sz="1000">
                 <a:solidFill>
@@ -2056,7 +2437,7 @@
                 </a:solidFill>
                 <a:latin typeface="Nimbus Roman"/>
               </a:rPr>
-              <a:t>Versatile lower-level flex room suits hobbies, workouts, work, or family use.</a:t>
+              <a:t>The exterior highlights an attached garage and generous driveway parking.</a:t>
             </a:r>
             <a:endParaRPr lang="en-CA" sz="1000" b="0" u="none" strike="noStrike">
               <a:solidFill>
@@ -2068,7 +2449,11 @@
             </a:endParaRPr>
           </a:p>
           <a:p>
-            <a:pPr algn="ctr"/>
+            <a:pPr algn="ctr">
+              <a:lnSpc>
+                <a:spcPct val="100000"/>
+              </a:lnSpc>
+            </a:pPr>
             <a:endParaRPr lang="en-CA" sz="1000" b="0" u="none" strike="noStrike">
               <a:solidFill>
                 <a:srgbClr val="000000"/>
@@ -2083,13 +2468,13 @@
       <p:sp>
         <p:nvSpPr>
           <p:cNvPr id="38" name=""/>
-          <p:cNvSpPr txBox="1"/>
+          <p:cNvSpPr/>
           <p:nvPr/>
         </p:nvSpPr>
         <p:spPr>
           <a:xfrm>
-            <a:off x="3778200" y="341640"/>
-            <a:ext cx="2587680" cy="444600"/>
+            <a:off x="1879200" y="4596840"/>
+            <a:ext cx="1149480" cy="1464480"/>
           </a:xfrm>
           <a:prstGeom prst="rect">
             <a:avLst/>
@@ -2099,22 +2484,47 @@
             <a:noFill/>
           </a:ln>
         </p:spPr>
+        <p:style>
+          <a:lnRef idx="0"/>
+          <a:fillRef idx="0"/>
+          <a:effectRef idx="0"/>
+          <a:fontRef idx="minor"/>
+        </p:style>
         <p:txBody>
           <a:bodyPr lIns="90000" rIns="90000" tIns="45000" bIns="45000" anchor="t" anchorCtr="1">
             <a:spAutoFit/>
           </a:bodyPr>
           <a:p>
-            <a:pPr algn="ctr"/>
-            <a:r>
-              <a:rPr b="1" i="1" sz="2000">
-                <a:solidFill>
-                  <a:srgbClr val="000000"/>
-                </a:solidFill>
-                <a:latin typeface="Nimbus Roman"/>
-              </a:rPr>
-              <a:t>4-1616 Happyvale Ave</a:t>
-            </a:r>
-            <a:endParaRPr lang="en-CA" sz="2000" b="0" u="none" strike="noStrike">
+            <a:pPr algn="ctr">
+              <a:lnSpc>
+                <a:spcPct val="100000"/>
+              </a:lnSpc>
+            </a:pPr>
+            <a:r>
+              <a:rPr b="0" i="1" sz="1000">
+                <a:solidFill>
+                  <a:srgbClr val="000000"/>
+                </a:solidFill>
+                <a:latin typeface="Nimbus Roman"/>
+              </a:rPr>
+              <a:t>The full bathroom includes vanity lighting, a tub-shower combo, and natural light.</a:t>
+            </a:r>
+            <a:endParaRPr lang="en-CA" sz="1000" b="0" u="none" strike="noStrike">
+              <a:solidFill>
+                <a:srgbClr val="000000"/>
+              </a:solidFill>
+              <a:effectLst/>
+              <a:uFillTx/>
+              <a:latin typeface="Arial"/>
+            </a:endParaRPr>
+          </a:p>
+          <a:p>
+            <a:pPr algn="ctr">
+              <a:lnSpc>
+                <a:spcPct val="100000"/>
+              </a:lnSpc>
+            </a:pPr>
+            <a:endParaRPr lang="en-CA" sz="1000" b="0" u="none" strike="noStrike">
               <a:solidFill>
                 <a:srgbClr val="000000"/>
               </a:solidFill>
@@ -2128,13 +2538,13 @@
       <p:sp>
         <p:nvSpPr>
           <p:cNvPr id="39" name=""/>
-          <p:cNvSpPr txBox="1"/>
+          <p:cNvSpPr/>
           <p:nvPr/>
         </p:nvSpPr>
         <p:spPr>
           <a:xfrm>
-            <a:off x="7132320" y="342000"/>
-            <a:ext cx="2587680" cy="444600"/>
+            <a:off x="3778200" y="341640"/>
+            <a:ext cx="2587320" cy="444240"/>
           </a:xfrm>
           <a:prstGeom prst="rect">
             <a:avLst/>
@@ -2144,12 +2554,22 @@
             <a:noFill/>
           </a:ln>
         </p:spPr>
+        <p:style>
+          <a:lnRef idx="0"/>
+          <a:fillRef idx="0"/>
+          <a:effectRef idx="0"/>
+          <a:fontRef idx="minor"/>
+        </p:style>
         <p:txBody>
           <a:bodyPr lIns="90000" rIns="90000" tIns="45000" bIns="45000" anchor="t" anchorCtr="1">
             <a:spAutoFit/>
           </a:bodyPr>
           <a:p>
-            <a:pPr algn="ctr"/>
+            <a:pPr algn="ctr">
+              <a:lnSpc>
+                <a:spcPct val="100000"/>
+              </a:lnSpc>
+            </a:pPr>
             <a:r>
               <a:rPr b="1" i="1" sz="2000">
                 <a:solidFill>
@@ -2157,7 +2577,7 @@
                 </a:solidFill>
                 <a:latin typeface="Nimbus Roman"/>
               </a:rPr>
-              <a:t>4-1616 Happyvale Ave</a:t>
+              <a:t>4-1616 Happyvale Avenue</a:t>
             </a:r>
             <a:endParaRPr lang="en-CA" sz="2000" b="0" u="none" strike="noStrike">
               <a:solidFill>
@@ -2173,13 +2593,13 @@
       <p:sp>
         <p:nvSpPr>
           <p:cNvPr id="40" name=""/>
-          <p:cNvSpPr txBox="1"/>
+          <p:cNvSpPr/>
           <p:nvPr/>
         </p:nvSpPr>
         <p:spPr>
           <a:xfrm>
-            <a:off x="3600000" y="786240"/>
-            <a:ext cx="2931480" cy="6593760"/>
+            <a:off x="7132320" y="342000"/>
+            <a:ext cx="2587320" cy="444240"/>
           </a:xfrm>
           <a:prstGeom prst="rect">
             <a:avLst/>
@@ -2189,6 +2609,67 @@
             <a:noFill/>
           </a:ln>
         </p:spPr>
+        <p:style>
+          <a:lnRef idx="0"/>
+          <a:fillRef idx="0"/>
+          <a:effectRef idx="0"/>
+          <a:fontRef idx="minor"/>
+        </p:style>
+        <p:txBody>
+          <a:bodyPr lIns="90000" rIns="90000" tIns="45000" bIns="45000" anchor="t" anchorCtr="1">
+            <a:spAutoFit/>
+          </a:bodyPr>
+          <a:p>
+            <a:pPr algn="ctr">
+              <a:lnSpc>
+                <a:spcPct val="100000"/>
+              </a:lnSpc>
+            </a:pPr>
+            <a:r>
+              <a:rPr b="1" i="1" sz="2000">
+                <a:solidFill>
+                  <a:srgbClr val="000000"/>
+                </a:solidFill>
+                <a:latin typeface="Nimbus Roman"/>
+              </a:rPr>
+              <a:t>4-1616 Happyvale Avenue</a:t>
+            </a:r>
+            <a:endParaRPr lang="en-CA" sz="2000" b="0" u="none" strike="noStrike">
+              <a:solidFill>
+                <a:srgbClr val="000000"/>
+              </a:solidFill>
+              <a:effectLst/>
+              <a:uFillTx/>
+              <a:latin typeface="Arial"/>
+            </a:endParaRPr>
+          </a:p>
+        </p:txBody>
+      </p:sp>
+      <p:sp>
+        <p:nvSpPr>
+          <p:cNvPr id="41" name=""/>
+          <p:cNvSpPr/>
+          <p:nvPr/>
+        </p:nvSpPr>
+        <p:spPr>
+          <a:xfrm>
+            <a:off x="3600000" y="786240"/>
+            <a:ext cx="2931120" cy="6593400"/>
+          </a:xfrm>
+          <a:prstGeom prst="rect">
+            <a:avLst/>
+          </a:prstGeom>
+          <a:noFill/>
+          <a:ln w="0">
+            <a:noFill/>
+          </a:ln>
+        </p:spPr>
+        <p:style>
+          <a:lnRef idx="0"/>
+          <a:fillRef idx="0"/>
+          <a:effectRef idx="0"/>
+          <a:fontRef idx="minor"/>
+        </p:style>
         <p:txBody>
           <a:bodyPr lIns="90000" rIns="90000" tIns="45000" bIns="45000" anchor="t">
             <a:spAutoFit/>
@@ -2559,336 +3040,7 @@
                 </a:solidFill>
                 <a:latin typeface="Nimbus Roman"/>
               </a:rPr>
-              <a:t>Age:	42 Years</a:t>
-            </a:r>
-          </a:p>
-          <a:p>
-            <a:pPr>
-              <a:lnSpc>
-                <a:spcPct val="100000"/>
-              </a:lnSpc>
-              <a:spcBef>
-                <a:spcPts val="2100"/>
-              </a:spcBef>
-              <a:spcAft>
-                <a:spcPts val="0"/>
-              </a:spcAft>
-              <a:tabLst>
-                <a:tab algn="l" pos="0"/>
-                <a:tab algn="l" pos="347040"/>
-                <a:tab algn="l" pos="898200"/>
-                <a:tab algn="l" pos="4027680"/>
-              </a:tabLst>
-            </a:pPr>
-            <a:r>
-              <a:rPr b="1" sz="1400">
-                <a:solidFill>
-                  <a:srgbClr val="000000"/>
-                </a:solidFill>
-                <a:latin typeface="Nimbus Roman"/>
-              </a:rPr>
               <a:t>Taxes:	$3,145 (2025)</a:t>
-            </a:r>
-          </a:p>
-        </p:txBody>
-      </p:sp>
-      <p:sp>
-        <p:nvSpPr>
-          <p:cNvPr id="41" name=""/>
-          <p:cNvSpPr txBox="1"/>
-          <p:nvPr/>
-        </p:nvSpPr>
-        <p:spPr>
-          <a:xfrm>
-            <a:off x="6966720" y="768960"/>
-            <a:ext cx="2952720" cy="5347800"/>
-          </a:xfrm>
-          <a:prstGeom prst="rect">
-            <a:avLst/>
-          </a:prstGeom>
-          <a:noFill/>
-          <a:ln w="0">
-            <a:noFill/>
-          </a:ln>
-        </p:spPr>
-        <p:txBody>
-          <a:bodyPr lIns="90000" rIns="90000" tIns="45000" bIns="45000" anchor="t">
-            <a:spAutoFit/>
-          </a:bodyPr>
-          <a:p>
-            <a:pPr algn="ctr">
-              <a:lnSpc>
-                <a:spcPct val="150000"/>
-              </a:lnSpc>
-              <a:tabLst>
-                <a:tab algn="l" pos="1619280"/>
-              </a:tabLst>
-            </a:pPr>
-            <a:r>
-              <a:rPr b="1" sz="1400" i="1">
-                <a:solidFill>
-                  <a:srgbClr val="000000"/>
-                </a:solidFill>
-                <a:latin typeface="Nimbus Roman"/>
-              </a:rPr>
-              <a:t>Main (1,046 sq. ft.)</a:t>
-            </a:r>
-            <a:endParaRPr lang="en-CA" sz="1400" b="0" u="none" strike="noStrike">
-              <a:solidFill>
-                <a:srgbClr val="000000"/>
-              </a:solidFill>
-              <a:effectLst/>
-              <a:uFillTx/>
-              <a:latin typeface="Arial"/>
-            </a:endParaRPr>
-          </a:p>
-          <a:p/>
-          <a:p>
-            <a:pPr>
-              <a:lnSpc>
-                <a:spcPct val="150000"/>
-              </a:lnSpc>
-              <a:tabLst>
-                <a:tab algn="l" pos="1619280"/>
-              </a:tabLst>
-            </a:pPr>
-            <a:r>
-              <a:rPr b="1" sz="1400">
-                <a:solidFill>
-                  <a:srgbClr val="000000"/>
-                </a:solidFill>
-                <a:latin typeface="Nimbus Roman"/>
-              </a:rPr>
-              <a:t>Kitchen	10' 4" x 13' 11"</a:t>
-            </a:r>
-          </a:p>
-          <a:p>
-            <a:pPr>
-              <a:lnSpc>
-                <a:spcPct val="150000"/>
-              </a:lnSpc>
-              <a:tabLst>
-                <a:tab algn="l" pos="1619280"/>
-              </a:tabLst>
-            </a:pPr>
-            <a:r>
-              <a:rPr b="1" sz="1400">
-                <a:solidFill>
-                  <a:srgbClr val="000000"/>
-                </a:solidFill>
-                <a:latin typeface="Nimbus Roman"/>
-              </a:rPr>
-              <a:t>Living Room	14' 4" x 14' 9"</a:t>
-            </a:r>
-          </a:p>
-          <a:p>
-            <a:pPr>
-              <a:lnSpc>
-                <a:spcPct val="150000"/>
-              </a:lnSpc>
-              <a:tabLst>
-                <a:tab algn="l" pos="1619280"/>
-              </a:tabLst>
-            </a:pPr>
-            <a:r>
-              <a:rPr b="1" sz="1400">
-                <a:solidFill>
-                  <a:srgbClr val="000000"/>
-                </a:solidFill>
-                <a:latin typeface="Nimbus Roman"/>
-              </a:rPr>
-              <a:t>Dining Room	9' 2" x 8' 9"</a:t>
-            </a:r>
-          </a:p>
-          <a:p>
-            <a:pPr>
-              <a:lnSpc>
-                <a:spcPct val="150000"/>
-              </a:lnSpc>
-              <a:tabLst>
-                <a:tab algn="l" pos="1619280"/>
-              </a:tabLst>
-            </a:pPr>
-            <a:r>
-              <a:rPr b="1" sz="1400">
-                <a:solidFill>
-                  <a:srgbClr val="000000"/>
-                </a:solidFill>
-                <a:latin typeface="Nimbus Roman"/>
-              </a:rPr>
-              <a:t>Primary Bedroom	11' 8" x 10' 6"</a:t>
-            </a:r>
-          </a:p>
-          <a:p>
-            <a:pPr>
-              <a:lnSpc>
-                <a:spcPct val="150000"/>
-              </a:lnSpc>
-              <a:tabLst>
-                <a:tab algn="l" pos="1619280"/>
-              </a:tabLst>
-            </a:pPr>
-            <a:r>
-              <a:rPr b="1" sz="1400">
-                <a:solidFill>
-                  <a:srgbClr val="000000"/>
-                </a:solidFill>
-                <a:latin typeface="Nimbus Roman"/>
-              </a:rPr>
-              <a:t>Bedroom	8' 3" x 8' 9"</a:t>
-            </a:r>
-          </a:p>
-          <a:p>
-            <a:pPr>
-              <a:lnSpc>
-                <a:spcPct val="150000"/>
-              </a:lnSpc>
-              <a:tabLst>
-                <a:tab algn="l" pos="1619280"/>
-              </a:tabLst>
-            </a:pPr>
-            <a:r>
-              <a:rPr b="1" sz="1400">
-                <a:solidFill>
-                  <a:srgbClr val="000000"/>
-                </a:solidFill>
-                <a:latin typeface="Nimbus Roman"/>
-              </a:rPr>
-              <a:t>Bathroom - Full	4 piece</a:t>
-            </a:r>
-          </a:p>
-          <a:p>
-            <a:pPr algn="ctr">
-              <a:lnSpc>
-                <a:spcPct val="150000"/>
-              </a:lnSpc>
-              <a:tabLst>
-                <a:tab algn="l" pos="1619280"/>
-              </a:tabLst>
-            </a:pPr>
-            <a:r>
-              <a:rPr b="1" sz="1400" i="1">
-                <a:solidFill>
-                  <a:srgbClr val="000000"/>
-                </a:solidFill>
-                <a:latin typeface="Nimbus Roman"/>
-              </a:rPr>
-              <a:t>Basement (674.9 sq. ft.)</a:t>
-            </a:r>
-          </a:p>
-          <a:p/>
-          <a:p>
-            <a:pPr>
-              <a:lnSpc>
-                <a:spcPct val="150000"/>
-              </a:lnSpc>
-              <a:tabLst>
-                <a:tab algn="l" pos="1619280"/>
-              </a:tabLst>
-            </a:pPr>
-            <a:r>
-              <a:rPr b="1" sz="1400">
-                <a:solidFill>
-                  <a:srgbClr val="000000"/>
-                </a:solidFill>
-                <a:latin typeface="Nimbus Roman"/>
-              </a:rPr>
-              <a:t>Bedroom	12' 7" x 12'</a:t>
-            </a:r>
-          </a:p>
-          <a:p>
-            <a:pPr>
-              <a:lnSpc>
-                <a:spcPct val="150000"/>
-              </a:lnSpc>
-              <a:tabLst>
-                <a:tab algn="l" pos="1619280"/>
-              </a:tabLst>
-            </a:pPr>
-            <a:r>
-              <a:rPr b="1" sz="1400">
-                <a:solidFill>
-                  <a:srgbClr val="000000"/>
-                </a:solidFill>
-                <a:latin typeface="Nimbus Roman"/>
-              </a:rPr>
-              <a:t>Bedroom	9' 8" x 9' 9"</a:t>
-            </a:r>
-          </a:p>
-          <a:p>
-            <a:pPr>
-              <a:lnSpc>
-                <a:spcPct val="150000"/>
-              </a:lnSpc>
-              <a:tabLst>
-                <a:tab algn="l" pos="1619280"/>
-              </a:tabLst>
-            </a:pPr>
-            <a:r>
-              <a:rPr b="1" sz="1400">
-                <a:solidFill>
-                  <a:srgbClr val="000000"/>
-                </a:solidFill>
-                <a:latin typeface="Nimbus Roman"/>
-              </a:rPr>
-              <a:t>Ensuite - Half	2 piece</a:t>
-            </a:r>
-          </a:p>
-          <a:p>
-            <a:pPr>
-              <a:lnSpc>
-                <a:spcPct val="150000"/>
-              </a:lnSpc>
-              <a:tabLst>
-                <a:tab algn="l" pos="1619280"/>
-              </a:tabLst>
-            </a:pPr>
-            <a:r>
-              <a:rPr b="1" sz="1400">
-                <a:solidFill>
-                  <a:srgbClr val="000000"/>
-                </a:solidFill>
-                <a:latin typeface="Nimbus Roman"/>
-              </a:rPr>
-              <a:t>Laundry	9' 3" x 3'</a:t>
-            </a:r>
-          </a:p>
-          <a:p>
-            <a:pPr>
-              <a:lnSpc>
-                <a:spcPct val="150000"/>
-              </a:lnSpc>
-              <a:tabLst>
-                <a:tab algn="l" pos="1619280"/>
-              </a:tabLst>
-            </a:pPr>
-            <a:r>
-              <a:rPr b="1" sz="1400">
-                <a:solidFill>
-                  <a:srgbClr val="000000"/>
-                </a:solidFill>
-                <a:latin typeface="Nimbus Roman"/>
-              </a:rPr>
-              <a:t>Family Room	19' 3" x 12' 6"</a:t>
-            </a:r>
-          </a:p>
-          <a:p>
-            <a:pPr>
-              <a:lnSpc>
-                <a:spcPct val="150000"/>
-              </a:lnSpc>
-              <a:tabLst>
-                <a:tab algn="l" pos="1619280"/>
-              </a:tabLst>
-            </a:pPr>
-            <a:r>
-              <a:rPr b="1" sz="1400">
-                <a:solidFill>
-                  <a:srgbClr val="000000"/>
-                </a:solidFill>
-                <a:latin typeface="Nimbus Roman"/>
-              </a:rPr>
-              <a:t>Storage	18' 9" x 6'</a:t>
             </a:r>
           </a:p>
         </p:txBody>
@@ -2896,13 +3048,13 @@
       <p:sp>
         <p:nvSpPr>
           <p:cNvPr id="42" name=""/>
-          <p:cNvSpPr txBox="1"/>
+          <p:cNvSpPr/>
           <p:nvPr/>
         </p:nvSpPr>
         <p:spPr>
           <a:xfrm>
-            <a:off x="7091640" y="6444720"/>
-            <a:ext cx="2587680" cy="444600"/>
+            <a:off x="6966720" y="768960"/>
+            <a:ext cx="2952360" cy="410400"/>
           </a:xfrm>
           <a:prstGeom prst="rect">
             <a:avLst/>
@@ -2912,12 +3064,329 @@
             <a:noFill/>
           </a:ln>
         </p:spPr>
+        <p:style>
+          <a:lnRef idx="0"/>
+          <a:fillRef idx="0"/>
+          <a:effectRef idx="0"/>
+          <a:fontRef idx="minor"/>
+        </p:style>
+        <p:txBody>
+          <a:bodyPr lIns="90000" rIns="90000" tIns="45000" bIns="45000" anchor="t">
+            <a:spAutoFit/>
+          </a:bodyPr>
+          <a:p>
+            <a:pPr algn="ctr">
+              <a:lnSpc>
+                <a:spcPct val="150000"/>
+              </a:lnSpc>
+              <a:tabLst>
+                <a:tab algn="l" pos="1479240"/>
+              </a:tabLst>
+            </a:pPr>
+            <a:r>
+              <a:rPr b="1" sz="1400" i="1">
+                <a:solidFill>
+                  <a:srgbClr val="000000"/>
+                </a:solidFill>
+                <a:latin typeface="Nimbus Roman"/>
+              </a:rPr>
+              <a:t>Main (1,046 sq. ft.)</a:t>
+            </a:r>
+            <a:endParaRPr lang="en-CA" sz="1400" b="0" u="none" strike="noStrike">
+              <a:solidFill>
+                <a:srgbClr val="000000"/>
+              </a:solidFill>
+              <a:effectLst/>
+              <a:uFillTx/>
+              <a:latin typeface="Arial"/>
+            </a:endParaRPr>
+          </a:p>
+          <a:p/>
+          <a:p>
+            <a:pPr>
+              <a:lnSpc>
+                <a:spcPct val="150000"/>
+              </a:lnSpc>
+              <a:tabLst>
+                <a:tab algn="l" pos="1479240"/>
+              </a:tabLst>
+            </a:pPr>
+            <a:r>
+              <a:rPr b="1" sz="1400">
+                <a:solidFill>
+                  <a:srgbClr val="000000"/>
+                </a:solidFill>
+                <a:latin typeface="Nimbus Roman"/>
+              </a:rPr>
+              <a:t>Kitchen	10' 4" x 13' 11"</a:t>
+            </a:r>
+          </a:p>
+          <a:p>
+            <a:pPr>
+              <a:lnSpc>
+                <a:spcPct val="150000"/>
+              </a:lnSpc>
+              <a:tabLst>
+                <a:tab algn="l" pos="1479240"/>
+              </a:tabLst>
+            </a:pPr>
+            <a:r>
+              <a:rPr b="1" sz="1400">
+                <a:solidFill>
+                  <a:srgbClr val="000000"/>
+                </a:solidFill>
+                <a:latin typeface="Nimbus Roman"/>
+              </a:rPr>
+              <a:t>Living Room	14' 4" x 14' 9"</a:t>
+            </a:r>
+          </a:p>
+          <a:p>
+            <a:pPr>
+              <a:lnSpc>
+                <a:spcPct val="150000"/>
+              </a:lnSpc>
+              <a:tabLst>
+                <a:tab algn="l" pos="1479240"/>
+              </a:tabLst>
+            </a:pPr>
+            <a:r>
+              <a:rPr b="1" sz="1400">
+                <a:solidFill>
+                  <a:srgbClr val="000000"/>
+                </a:solidFill>
+                <a:latin typeface="Nimbus Roman"/>
+              </a:rPr>
+              <a:t>Dining Room	9' 2" x 8' 9"</a:t>
+            </a:r>
+          </a:p>
+          <a:p>
+            <a:pPr>
+              <a:lnSpc>
+                <a:spcPct val="150000"/>
+              </a:lnSpc>
+              <a:tabLst>
+                <a:tab algn="l" pos="1479240"/>
+              </a:tabLst>
+            </a:pPr>
+            <a:r>
+              <a:rPr b="1" sz="1400">
+                <a:solidFill>
+                  <a:srgbClr val="000000"/>
+                </a:solidFill>
+                <a:latin typeface="Nimbus Roman"/>
+              </a:rPr>
+              <a:t>Primary Bedroom	11' 8" x 10' 6"</a:t>
+            </a:r>
+          </a:p>
+          <a:p>
+            <a:pPr>
+              <a:lnSpc>
+                <a:spcPct val="150000"/>
+              </a:lnSpc>
+              <a:tabLst>
+                <a:tab algn="l" pos="1479240"/>
+              </a:tabLst>
+            </a:pPr>
+            <a:r>
+              <a:rPr b="1" sz="1400">
+                <a:solidFill>
+                  <a:srgbClr val="000000"/>
+                </a:solidFill>
+                <a:latin typeface="Nimbus Roman"/>
+              </a:rPr>
+              <a:t>Bedroom	8' 3" x 8' 9"</a:t>
+            </a:r>
+          </a:p>
+          <a:p>
+            <a:pPr>
+              <a:lnSpc>
+                <a:spcPct val="150000"/>
+              </a:lnSpc>
+              <a:tabLst>
+                <a:tab algn="l" pos="1479240"/>
+              </a:tabLst>
+            </a:pPr>
+            <a:r>
+              <a:rPr b="1" sz="1400">
+                <a:solidFill>
+                  <a:srgbClr val="000000"/>
+                </a:solidFill>
+                <a:latin typeface="Nimbus Roman"/>
+              </a:rPr>
+              <a:t>Bedroom	9' 8" x 9' 9"</a:t>
+            </a:r>
+          </a:p>
+          <a:p>
+            <a:pPr>
+              <a:lnSpc>
+                <a:spcPct val="150000"/>
+              </a:lnSpc>
+              <a:tabLst>
+                <a:tab algn="l" pos="1479240"/>
+              </a:tabLst>
+            </a:pPr>
+            <a:r>
+              <a:rPr b="1" sz="1400">
+                <a:solidFill>
+                  <a:srgbClr val="000000"/>
+                </a:solidFill>
+                <a:latin typeface="Nimbus Roman"/>
+              </a:rPr>
+              <a:t>Bathroom - Full	4 PCE</a:t>
+            </a:r>
+          </a:p>
+          <a:p>
+            <a:pPr>
+              <a:lnSpc>
+                <a:spcPct val="150000"/>
+              </a:lnSpc>
+              <a:tabLst>
+                <a:tab algn="l" pos="1479240"/>
+              </a:tabLst>
+            </a:pPr>
+            <a:r>
+              <a:rPr b="1" sz="1400">
+                <a:solidFill>
+                  <a:srgbClr val="000000"/>
+                </a:solidFill>
+                <a:latin typeface="Nimbus Roman"/>
+              </a:rPr>
+              <a:t>Ensuite - Half	2 PCE</a:t>
+            </a:r>
+          </a:p>
+          <a:p>
+            <a:pPr>
+              <a:lnSpc>
+                <a:spcPct val="150000"/>
+              </a:lnSpc>
+              <a:tabLst>
+                <a:tab algn="l" pos="1479240"/>
+              </a:tabLst>
+            </a:pPr>
+            <a:r>
+              <a:rPr b="1" sz="1400">
+                <a:solidFill>
+                  <a:srgbClr val="000000"/>
+                </a:solidFill>
+                <a:latin typeface="Nimbus Roman"/>
+              </a:rPr>
+              <a:t>Laundry	9' 3" x 3'</a:t>
+            </a:r>
+          </a:p>
+          <a:p>
+            <a:pPr algn="ctr">
+              <a:lnSpc>
+                <a:spcPct val="150000"/>
+              </a:lnSpc>
+              <a:tabLst>
+                <a:tab algn="l" pos="1479240"/>
+              </a:tabLst>
+            </a:pPr>
+            <a:r>
+              <a:rPr b="1" sz="1400" i="1">
+                <a:solidFill>
+                  <a:srgbClr val="000000"/>
+                </a:solidFill>
+                <a:latin typeface="Nimbus Roman"/>
+              </a:rPr>
+              <a:t>Basement (674.9 sq. ft.)</a:t>
+            </a:r>
+          </a:p>
+          <a:p/>
+          <a:p>
+            <a:pPr>
+              <a:lnSpc>
+                <a:spcPct val="150000"/>
+              </a:lnSpc>
+              <a:tabLst>
+                <a:tab algn="l" pos="1479240"/>
+              </a:tabLst>
+            </a:pPr>
+            <a:r>
+              <a:rPr b="1" sz="1400">
+                <a:solidFill>
+                  <a:srgbClr val="000000"/>
+                </a:solidFill>
+                <a:latin typeface="Nimbus Roman"/>
+              </a:rPr>
+              <a:t>Bedroom	12' 7" x 12'</a:t>
+            </a:r>
+          </a:p>
+          <a:p>
+            <a:pPr>
+              <a:lnSpc>
+                <a:spcPct val="150000"/>
+              </a:lnSpc>
+              <a:tabLst>
+                <a:tab algn="l" pos="1479240"/>
+              </a:tabLst>
+            </a:pPr>
+            <a:r>
+              <a:rPr b="1" sz="1400">
+                <a:solidFill>
+                  <a:srgbClr val="000000"/>
+                </a:solidFill>
+                <a:latin typeface="Nimbus Roman"/>
+              </a:rPr>
+              <a:t>Family Room	19' 3" x 12' 6"</a:t>
+            </a:r>
+          </a:p>
+          <a:p>
+            <a:pPr>
+              <a:lnSpc>
+                <a:spcPct val="150000"/>
+              </a:lnSpc>
+              <a:tabLst>
+                <a:tab algn="l" pos="1479240"/>
+              </a:tabLst>
+            </a:pPr>
+            <a:r>
+              <a:rPr b="1" sz="1400">
+                <a:solidFill>
+                  <a:srgbClr val="000000"/>
+                </a:solidFill>
+                <a:latin typeface="Nimbus Roman"/>
+              </a:rPr>
+              <a:t>Storage	18' 9" x 6'</a:t>
+            </a:r>
+          </a:p>
+        </p:txBody>
+      </p:sp>
+      <p:sp>
+        <p:nvSpPr>
+          <p:cNvPr id="43" name=""/>
+          <p:cNvSpPr/>
+          <p:nvPr/>
+        </p:nvSpPr>
+        <p:spPr>
+          <a:xfrm>
+            <a:off x="7091640" y="6444720"/>
+            <a:ext cx="2587320" cy="444240"/>
+          </a:xfrm>
+          <a:prstGeom prst="rect">
+            <a:avLst/>
+          </a:prstGeom>
+          <a:noFill/>
+          <a:ln w="0">
+            <a:noFill/>
+          </a:ln>
+        </p:spPr>
+        <p:style>
+          <a:lnRef idx="0"/>
+          <a:fillRef idx="0"/>
+          <a:effectRef idx="0"/>
+          <a:fontRef idx="minor"/>
+        </p:style>
         <p:txBody>
           <a:bodyPr lIns="90000" rIns="90000" tIns="45000" bIns="45000" anchor="t" anchorCtr="1">
             <a:spAutoFit/>
           </a:bodyPr>
           <a:p>
-            <a:pPr algn="ctr"/>
+            <a:pPr algn="ctr">
+              <a:lnSpc>
+                <a:spcPct val="100000"/>
+              </a:lnSpc>
+            </a:pPr>
             <a:r>
               <a:rPr b="1" i="1" sz="1600">
                 <a:solidFill>
@@ -2940,7 +3409,7 @@
       </p:sp>
       <p:pic>
         <p:nvPicPr>
-          <p:cNvPr id="43" name="Picture 42" descr="DSC03388.jpg"/>
+          <p:cNvPr id="44" name="Picture 43" descr="DSC03349.jpg"/>
           <p:cNvPicPr>
             <a:picLocks noChangeAspect="1"/>
           </p:cNvPicPr>
@@ -2948,7 +3417,7 @@
         </p:nvPicPr>
         <p:blipFill>
           <a:blip r:embed="rId3"/>
-          <a:srcRect l="6818" r="6818"/>
+          <a:srcRect l="6815" r="6815"/>
           <a:stretch>
             <a:fillRect/>
           </a:stretch>
@@ -2956,7 +3425,7 @@
         <p:spPr>
           <a:xfrm>
             <a:off x="1322640" y="241560"/>
-            <a:ext cx="1698120" cy="1311840"/>
+            <a:ext cx="1697760" cy="1311480"/>
           </a:xfrm>
           <a:prstGeom prst="rect">
             <a:avLst/>
@@ -2965,7 +3434,7 @@
       </p:pic>
       <p:pic>
         <p:nvPicPr>
-          <p:cNvPr id="44" name="Picture 43" descr="DSC03372.jpg"/>
+          <p:cNvPr id="45" name="Picture 44" descr="DSC03388.jpg"/>
           <p:cNvPicPr>
             <a:picLocks noChangeAspect="1"/>
           </p:cNvPicPr>
@@ -2973,7 +3442,7 @@
         </p:nvPicPr>
         <p:blipFill>
           <a:blip r:embed="rId4"/>
-          <a:srcRect l="8607" r="8607"/>
+          <a:srcRect l="8507" r="8507"/>
           <a:stretch>
             <a:fillRect/>
           </a:stretch>
@@ -2981,32 +3450,7 @@
         <p:spPr>
           <a:xfrm>
             <a:off x="329760" y="1672920"/>
-            <a:ext cx="1645920" cy="1323360"/>
-          </a:xfrm>
-          <a:prstGeom prst="rect">
-            <a:avLst/>
-          </a:prstGeom>
-        </p:spPr>
-      </p:pic>
-      <p:pic>
-        <p:nvPicPr>
-          <p:cNvPr id="45" name="Picture 44" descr="DSC03399.jpg"/>
-          <p:cNvPicPr>
-            <a:picLocks noChangeAspect="1"/>
-          </p:cNvPicPr>
-          <p:nvPr/>
-        </p:nvPicPr>
-        <p:blipFill>
-          <a:blip r:embed="rId5"/>
-          <a:srcRect l="8910" r="8910"/>
-          <a:stretch>
-            <a:fillRect/>
-          </a:stretch>
-        </p:blipFill>
-        <p:spPr>
-          <a:xfrm>
-            <a:off x="1323360" y="3106080"/>
-            <a:ext cx="1697400" cy="1374840"/>
+            <a:ext cx="1645560" cy="1323000"/>
           </a:xfrm>
           <a:prstGeom prst="rect">
             <a:avLst/>
@@ -3022,16 +3466,16 @@
           <p:nvPr/>
         </p:nvPicPr>
         <p:blipFill>
-          <a:blip r:embed="rId6"/>
-          <a:srcRect l="13715" r="13715"/>
+          <a:blip r:embed="rId5"/>
+          <a:srcRect l="8812" r="8812"/>
           <a:stretch>
             <a:fillRect/>
           </a:stretch>
         </p:blipFill>
         <p:spPr>
           <a:xfrm>
-            <a:off x="289800" y="4596840"/>
-            <a:ext cx="1589400" cy="1461240"/>
+            <a:off x="1323360" y="3106080"/>
+            <a:ext cx="1697040" cy="1374480"/>
           </a:xfrm>
           <a:prstGeom prst="rect">
             <a:avLst/>
@@ -3040,7 +3484,32 @@
       </p:pic>
       <p:pic>
         <p:nvPicPr>
-          <p:cNvPr id="47" name="Picture 46" descr="DSC03356.jpg"/>
+          <p:cNvPr id="47" name="Picture 46" descr="DSC03399.jpg"/>
+          <p:cNvPicPr>
+            <a:picLocks noChangeAspect="1"/>
+          </p:cNvPicPr>
+          <p:nvPr/>
+        </p:nvPicPr>
+        <p:blipFill>
+          <a:blip r:embed="rId6"/>
+          <a:srcRect l="13799" r="13799"/>
+          <a:stretch>
+            <a:fillRect/>
+          </a:stretch>
+        </p:blipFill>
+        <p:spPr>
+          <a:xfrm>
+            <a:off x="289800" y="4596840"/>
+            <a:ext cx="1589040" cy="1460880"/>
+          </a:xfrm>
+          <a:prstGeom prst="rect">
+            <a:avLst/>
+          </a:prstGeom>
+        </p:spPr>
+      </p:pic>
+      <p:pic>
+        <p:nvPicPr>
+          <p:cNvPr id="48" name="Picture 47" descr="DSC03442.jpg"/>
           <p:cNvPicPr>
             <a:picLocks noChangeAspect="1"/>
           </p:cNvPicPr>
@@ -3048,7 +3517,7 @@
         </p:nvPicPr>
         <p:blipFill>
           <a:blip r:embed="rId7"/>
-          <a:srcRect l="6816" r="6816"/>
+          <a:srcRect l="6813" r="6813"/>
           <a:stretch>
             <a:fillRect/>
           </a:stretch>
@@ -3056,7 +3525,7 @@
         <p:spPr>
           <a:xfrm>
             <a:off x="1332000" y="6153840"/>
-            <a:ext cx="1696320" cy="1310400"/>
+            <a:ext cx="1695960" cy="1310040"/>
           </a:xfrm>
           <a:prstGeom prst="rect">
             <a:avLst/>

--- a/test_output.pptx
+++ b/test_output.pptx
@@ -43,7 +43,7 @@
         <p:spPr>
           <a:xfrm>
             <a:off x="502920" y="820800"/>
-            <a:ext cx="9051840" cy="274680"/>
+            <a:ext cx="9051480" cy="274680"/>
           </a:xfrm>
           <a:prstGeom prst="rect">
             <a:avLst/>
@@ -59,7 +59,13 @@
           </a:bodyPr>
           <a:p>
             <a:pPr indent="0">
+              <a:lnSpc>
+                <a:spcPct val="100000"/>
+              </a:lnSpc>
               <a:buNone/>
+              <a:tabLst>
+                <a:tab algn="l" pos="0"/>
+              </a:tabLst>
             </a:pPr>
             <a:r>
               <a:rPr lang="en-CA" sz="1800" b="0" u="none" strike="noStrike">
@@ -96,7 +102,7 @@
         <p:spPr>
           <a:xfrm>
             <a:off x="502920" y="1818000"/>
-            <a:ext cx="9051840" cy="4507200"/>
+            <a:ext cx="9051480" cy="4506840"/>
           </a:xfrm>
           <a:prstGeom prst="rect">
             <a:avLst/>
@@ -112,6 +118,9 @@
           </a:bodyPr>
           <a:p>
             <a:pPr marL="432000" indent="-324000">
+              <a:lnSpc>
+                <a:spcPct val="100000"/>
+              </a:lnSpc>
               <a:spcBef>
                 <a:spcPts val="1417"/>
               </a:spcBef>
@@ -144,6 +153,9 @@
           </a:p>
           <a:p>
             <a:pPr marL="864000" lvl="1" indent="-324000">
+              <a:lnSpc>
+                <a:spcPct val="100000"/>
+              </a:lnSpc>
               <a:spcBef>
                 <a:spcPts val="1134"/>
               </a:spcBef>
@@ -176,6 +188,9 @@
           </a:p>
           <a:p>
             <a:pPr marL="1296000" lvl="2" indent="-288000">
+              <a:lnSpc>
+                <a:spcPct val="100000"/>
+              </a:lnSpc>
               <a:spcBef>
                 <a:spcPts val="850"/>
               </a:spcBef>
@@ -208,6 +223,9 @@
           </a:p>
           <a:p>
             <a:pPr marL="1728000" lvl="3" indent="-216000">
+              <a:lnSpc>
+                <a:spcPct val="100000"/>
+              </a:lnSpc>
               <a:spcBef>
                 <a:spcPts val="567"/>
               </a:spcBef>
@@ -240,6 +258,9 @@
           </a:p>
           <a:p>
             <a:pPr marL="2160000" lvl="4" indent="-216000">
+              <a:lnSpc>
+                <a:spcPct val="100000"/>
+              </a:lnSpc>
               <a:spcBef>
                 <a:spcPts val="283"/>
               </a:spcBef>
@@ -272,6 +293,9 @@
           </a:p>
           <a:p>
             <a:pPr marL="2592000" lvl="5" indent="-216000">
+              <a:lnSpc>
+                <a:spcPct val="100000"/>
+              </a:lnSpc>
               <a:spcBef>
                 <a:spcPts val="283"/>
               </a:spcBef>
@@ -304,6 +328,9 @@
           </a:p>
           <a:p>
             <a:pPr marL="3024000" lvl="6" indent="-216000">
+              <a:lnSpc>
+                <a:spcPct val="100000"/>
+              </a:lnSpc>
               <a:spcBef>
                 <a:spcPts val="283"/>
               </a:spcBef>
@@ -349,7 +376,7 @@
         <p:spPr>
           <a:xfrm>
             <a:off x="3439440" y="7080120"/>
-            <a:ext cx="3187800" cy="535320"/>
+            <a:ext cx="3187440" cy="534960"/>
           </a:xfrm>
           <a:prstGeom prst="rect">
             <a:avLst/>
@@ -427,7 +454,7 @@
         <p:spPr>
           <a:xfrm>
             <a:off x="7211160" y="7080120"/>
-            <a:ext cx="2342880" cy="535320"/>
+            <a:ext cx="2342520" cy="534960"/>
           </a:xfrm>
           <a:prstGeom prst="rect">
             <a:avLst/>
@@ -470,7 +497,7 @@
                 <a:tab algn="l" pos="0"/>
               </a:tabLst>
             </a:pPr>
-            <a:fld id="{81952E31-A23B-4DEC-8964-D0E38E3DDF2D}" type="slidenum">
+            <a:fld id="{190B3A3F-89E4-4D28-AAD4-4D349F5C9963}" type="slidenum">
               <a:rPr lang="en-CA" sz="1400" b="0" u="none" strike="noStrike">
                 <a:solidFill>
                   <a:srgbClr val="000000"/>
@@ -505,7 +532,7 @@
         <p:spPr>
           <a:xfrm>
             <a:off x="502920" y="7080120"/>
-            <a:ext cx="2342880" cy="535320"/>
+            <a:ext cx="2342520" cy="534960"/>
           </a:xfrm>
           <a:prstGeom prst="rect">
             <a:avLst/>
@@ -521,7 +548,13 @@
           </a:bodyPr>
           <a:lstStyle>
             <a:lvl1pPr indent="0">
+              <a:lnSpc>
+                <a:spcPct val="100000"/>
+              </a:lnSpc>
               <a:buNone/>
+              <a:tabLst>
+                <a:tab algn="l" pos="0"/>
+              </a:tabLst>
               <a:defRPr lang="en-CA" sz="1400" b="0" u="none" strike="noStrike">
                 <a:solidFill>
                   <a:srgbClr val="000000"/>
@@ -534,7 +567,13 @@
           </a:lstStyle>
           <a:p>
             <a:pPr indent="0">
+              <a:lnSpc>
+                <a:spcPct val="100000"/>
+              </a:lnSpc>
               <a:buNone/>
+              <a:tabLst>
+                <a:tab algn="l" pos="0"/>
+              </a:tabLst>
             </a:pPr>
             <a:r>
               <a:rPr lang="en-CA" sz="1400" b="0" u="none" strike="noStrike">
@@ -593,7 +632,7 @@
         <p:spPr>
           <a:xfrm>
             <a:off x="502920" y="820800"/>
-            <a:ext cx="9051840" cy="274680"/>
+            <a:ext cx="9051480" cy="274680"/>
           </a:xfrm>
           <a:prstGeom prst="rect">
             <a:avLst/>
@@ -609,7 +648,13 @@
           </a:bodyPr>
           <a:p>
             <a:pPr indent="0">
+              <a:lnSpc>
+                <a:spcPct val="100000"/>
+              </a:lnSpc>
               <a:buNone/>
+              <a:tabLst>
+                <a:tab algn="l" pos="0"/>
+              </a:tabLst>
             </a:pPr>
             <a:r>
               <a:rPr lang="en-CA" sz="1800" b="0" u="none" strike="noStrike">
@@ -646,7 +691,7 @@
         <p:spPr>
           <a:xfrm>
             <a:off x="3439440" y="7080120"/>
-            <a:ext cx="3187800" cy="535320"/>
+            <a:ext cx="3187440" cy="534960"/>
           </a:xfrm>
           <a:prstGeom prst="rect">
             <a:avLst/>
@@ -724,7 +769,7 @@
         <p:spPr>
           <a:xfrm>
             <a:off x="7211160" y="7080120"/>
-            <a:ext cx="2342880" cy="535320"/>
+            <a:ext cx="2342520" cy="534960"/>
           </a:xfrm>
           <a:prstGeom prst="rect">
             <a:avLst/>
@@ -767,7 +812,7 @@
                 <a:tab algn="l" pos="0"/>
               </a:tabLst>
             </a:pPr>
-            <a:fld id="{7DF18875-C1AF-4AC0-BC80-21A96445EAB5}" type="slidenum">
+            <a:fld id="{3FBE0CCD-27BA-4FD2-A4CA-60195DFF7F81}" type="slidenum">
               <a:rPr lang="en-CA" sz="1400" b="0" u="none" strike="noStrike">
                 <a:solidFill>
                   <a:srgbClr val="000000"/>
@@ -802,7 +847,7 @@
         <p:spPr>
           <a:xfrm>
             <a:off x="502920" y="7080120"/>
-            <a:ext cx="2342880" cy="535320"/>
+            <a:ext cx="2342520" cy="534960"/>
           </a:xfrm>
           <a:prstGeom prst="rect">
             <a:avLst/>
@@ -818,7 +863,13 @@
           </a:bodyPr>
           <a:lstStyle>
             <a:lvl1pPr indent="0">
+              <a:lnSpc>
+                <a:spcPct val="100000"/>
+              </a:lnSpc>
               <a:buNone/>
+              <a:tabLst>
+                <a:tab algn="l" pos="0"/>
+              </a:tabLst>
               <a:defRPr lang="en-CA" sz="1400" b="0" u="none" strike="noStrike">
                 <a:solidFill>
                   <a:srgbClr val="000000"/>
@@ -831,7 +882,13 @@
           </a:lstStyle>
           <a:p>
             <a:pPr indent="0">
+              <a:lnSpc>
+                <a:spcPct val="100000"/>
+              </a:lnSpc>
               <a:buNone/>
+              <a:tabLst>
+                <a:tab algn="l" pos="0"/>
+              </a:tabLst>
             </a:pPr>
             <a:r>
               <a:rPr lang="en-CA" sz="1400" b="0" u="none" strike="noStrike">
@@ -868,7 +925,7 @@
         <p:spPr>
           <a:xfrm>
             <a:off x="502920" y="1818720"/>
-            <a:ext cx="9052200" cy="4507560"/>
+            <a:ext cx="9051840" cy="4507200"/>
           </a:xfrm>
           <a:prstGeom prst="rect">
             <a:avLst/>
@@ -884,6 +941,9 @@
           </a:bodyPr>
           <a:p>
             <a:pPr marL="432000" indent="-324000">
+              <a:lnSpc>
+                <a:spcPct val="100000"/>
+              </a:lnSpc>
               <a:spcBef>
                 <a:spcPts val="1417"/>
               </a:spcBef>
@@ -916,6 +976,9 @@
           </a:p>
           <a:p>
             <a:pPr marL="864000" lvl="1" indent="-324000">
+              <a:lnSpc>
+                <a:spcPct val="100000"/>
+              </a:lnSpc>
               <a:spcBef>
                 <a:spcPts val="1134"/>
               </a:spcBef>
@@ -948,6 +1011,9 @@
           </a:p>
           <a:p>
             <a:pPr marL="1296000" lvl="2" indent="-288000">
+              <a:lnSpc>
+                <a:spcPct val="100000"/>
+              </a:lnSpc>
               <a:spcBef>
                 <a:spcPts val="850"/>
               </a:spcBef>
@@ -980,6 +1046,9 @@
           </a:p>
           <a:p>
             <a:pPr marL="1728000" lvl="3" indent="-216000">
+              <a:lnSpc>
+                <a:spcPct val="100000"/>
+              </a:lnSpc>
               <a:spcBef>
                 <a:spcPts val="567"/>
               </a:spcBef>
@@ -1012,6 +1081,9 @@
           </a:p>
           <a:p>
             <a:pPr marL="2160000" lvl="4" indent="-216000">
+              <a:lnSpc>
+                <a:spcPct val="100000"/>
+              </a:lnSpc>
               <a:spcBef>
                 <a:spcPts val="283"/>
               </a:spcBef>
@@ -1044,6 +1116,9 @@
           </a:p>
           <a:p>
             <a:pPr marL="2592000" lvl="5" indent="-216000">
+              <a:lnSpc>
+                <a:spcPct val="100000"/>
+              </a:lnSpc>
               <a:spcBef>
                 <a:spcPts val="283"/>
               </a:spcBef>
@@ -1076,6 +1151,9 @@
           </a:p>
           <a:p>
             <a:pPr marL="3024000" lvl="6" indent="-216000">
+              <a:lnSpc>
+                <a:spcPct val="100000"/>
+              </a:lnSpc>
               <a:spcBef>
                 <a:spcPts val="283"/>
               </a:spcBef>
@@ -1173,8 +1251,358 @@
         </p:nvSpPr>
         <p:spPr>
           <a:xfrm>
-            <a:off x="244800" y="282600"/>
-            <a:ext cx="996480" cy="1345680"/>
+            <a:off x="244800" y="757080"/>
+            <a:ext cx="996120" cy="396000"/>
+          </a:xfrm>
+          <a:prstGeom prst="rect">
+            <a:avLst/>
+          </a:prstGeom>
+          <a:noFill/>
+          <a:ln w="0">
+            <a:noFill/>
+          </a:ln>
+        </p:spPr>
+        <p:style>
+          <a:lnRef idx="0"/>
+          <a:fillRef idx="0"/>
+          <a:effectRef idx="0"/>
+          <a:fontRef idx="minor"/>
+        </p:style>
+        <p:txBody>
+          <a:bodyPr lIns="90000" rIns="90000" tIns="45000" bIns="45000" anchor="ctr" anchorCtr="1">
+            <a:spAutoFit/>
+          </a:bodyPr>
+          <a:p>
+            <a:pPr algn="ctr">
+              <a:lnSpc>
+                <a:spcPct val="100000"/>
+              </a:lnSpc>
+            </a:pPr>
+            <a:r>
+              <a:rPr b="0" i="1" sz="1000">
+                <a:solidFill>
+                  <a:srgbClr val="000000"/>
+                </a:solidFill>
+                <a:latin typeface="Nimbus Roman"/>
+              </a:rPr>
+              <a:t>A bright living room offers comfortable space and a wide front window.</a:t>
+            </a:r>
+            <a:endParaRPr lang="en-CA" sz="1000" b="0" u="none" strike="noStrike">
+              <a:solidFill>
+                <a:srgbClr val="000000"/>
+              </a:solidFill>
+              <a:effectLst/>
+              <a:uFillTx/>
+              <a:latin typeface="Arial"/>
+            </a:endParaRPr>
+          </a:p>
+          <a:p>
+            <a:pPr algn="ctr">
+              <a:lnSpc>
+                <a:spcPct val="100000"/>
+              </a:lnSpc>
+            </a:pPr>
+            <a:endParaRPr lang="en-CA" sz="1000" b="0" u="none" strike="noStrike">
+              <a:solidFill>
+                <a:srgbClr val="000000"/>
+              </a:solidFill>
+              <a:effectLst/>
+              <a:uFillTx/>
+              <a:latin typeface="Arial"/>
+            </a:endParaRPr>
+          </a:p>
+        </p:txBody>
+      </p:sp>
+      <p:sp>
+        <p:nvSpPr>
+          <p:cNvPr id="13" name=""/>
+          <p:cNvSpPr/>
+          <p:nvPr/>
+        </p:nvSpPr>
+        <p:spPr>
+          <a:xfrm>
+            <a:off x="2037600" y="2250720"/>
+            <a:ext cx="996120" cy="396000"/>
+          </a:xfrm>
+          <a:prstGeom prst="rect">
+            <a:avLst/>
+          </a:prstGeom>
+          <a:noFill/>
+          <a:ln w="0">
+            <a:noFill/>
+          </a:ln>
+        </p:spPr>
+        <p:style>
+          <a:lnRef idx="0"/>
+          <a:fillRef idx="0"/>
+          <a:effectRef idx="0"/>
+          <a:fontRef idx="minor"/>
+        </p:style>
+        <p:txBody>
+          <a:bodyPr lIns="90000" rIns="90000" tIns="45000" bIns="45000" anchor="ctr" anchorCtr="1">
+            <a:spAutoFit/>
+          </a:bodyPr>
+          <a:p>
+            <a:pPr algn="ctr">
+              <a:lnSpc>
+                <a:spcPct val="100000"/>
+              </a:lnSpc>
+            </a:pPr>
+            <a:r>
+              <a:rPr b="0" i="1" sz="1000">
+                <a:solidFill>
+                  <a:srgbClr val="000000"/>
+                </a:solidFill>
+                <a:latin typeface="Nimbus Roman"/>
+              </a:rPr>
+              <a:t>The kitchen and dining area pair ample cabinetry with leafy window views.</a:t>
+            </a:r>
+            <a:endParaRPr lang="en-CA" sz="1000" b="0" u="none" strike="noStrike">
+              <a:solidFill>
+                <a:srgbClr val="000000"/>
+              </a:solidFill>
+              <a:effectLst/>
+              <a:uFillTx/>
+              <a:latin typeface="Arial"/>
+            </a:endParaRPr>
+          </a:p>
+          <a:p>
+            <a:pPr algn="ctr">
+              <a:lnSpc>
+                <a:spcPct val="100000"/>
+              </a:lnSpc>
+            </a:pPr>
+            <a:endParaRPr lang="en-CA" sz="1000" b="0" u="none" strike="noStrike">
+              <a:solidFill>
+                <a:srgbClr val="000000"/>
+              </a:solidFill>
+              <a:effectLst/>
+              <a:uFillTx/>
+              <a:latin typeface="Arial"/>
+            </a:endParaRPr>
+          </a:p>
+        </p:txBody>
+      </p:sp>
+      <p:sp>
+        <p:nvSpPr>
+          <p:cNvPr id="14" name=""/>
+          <p:cNvSpPr/>
+          <p:nvPr/>
+        </p:nvSpPr>
+        <p:spPr>
+          <a:xfrm>
+            <a:off x="254160" y="3718800"/>
+            <a:ext cx="996120" cy="396000"/>
+          </a:xfrm>
+          <a:prstGeom prst="rect">
+            <a:avLst/>
+          </a:prstGeom>
+          <a:noFill/>
+          <a:ln w="0">
+            <a:noFill/>
+          </a:ln>
+        </p:spPr>
+        <p:style>
+          <a:lnRef idx="0"/>
+          <a:fillRef idx="0"/>
+          <a:effectRef idx="0"/>
+          <a:fontRef idx="minor"/>
+        </p:style>
+        <p:txBody>
+          <a:bodyPr lIns="90000" rIns="90000" tIns="45000" bIns="45000" anchor="ctr" anchorCtr="1">
+            <a:spAutoFit/>
+          </a:bodyPr>
+          <a:p>
+            <a:pPr algn="ctr">
+              <a:lnSpc>
+                <a:spcPct val="100000"/>
+              </a:lnSpc>
+            </a:pPr>
+            <a:r>
+              <a:rPr b="0" i="1" sz="1000">
+                <a:solidFill>
+                  <a:srgbClr val="000000"/>
+                </a:solidFill>
+                <a:latin typeface="Nimbus Roman"/>
+              </a:rPr>
+              <a:t>The dining area connects easily to the kitchen and greenery beyond.</a:t>
+            </a:r>
+            <a:endParaRPr lang="en-CA" sz="1000" b="0" u="none" strike="noStrike">
+              <a:solidFill>
+                <a:srgbClr val="000000"/>
+              </a:solidFill>
+              <a:effectLst/>
+              <a:uFillTx/>
+              <a:latin typeface="Arial"/>
+            </a:endParaRPr>
+          </a:p>
+          <a:p>
+            <a:pPr algn="ctr">
+              <a:lnSpc>
+                <a:spcPct val="100000"/>
+              </a:lnSpc>
+            </a:pPr>
+            <a:endParaRPr lang="en-CA" sz="1000" b="0" u="none" strike="noStrike">
+              <a:solidFill>
+                <a:srgbClr val="000000"/>
+              </a:solidFill>
+              <a:effectLst/>
+              <a:uFillTx/>
+              <a:latin typeface="Arial"/>
+            </a:endParaRPr>
+          </a:p>
+        </p:txBody>
+      </p:sp>
+      <p:sp>
+        <p:nvSpPr>
+          <p:cNvPr id="15" name=""/>
+          <p:cNvSpPr/>
+          <p:nvPr/>
+        </p:nvSpPr>
+        <p:spPr>
+          <a:xfrm>
+            <a:off x="1995120" y="5122080"/>
+            <a:ext cx="996120" cy="396000"/>
+          </a:xfrm>
+          <a:prstGeom prst="rect">
+            <a:avLst/>
+          </a:prstGeom>
+          <a:noFill/>
+          <a:ln w="0">
+            <a:noFill/>
+          </a:ln>
+        </p:spPr>
+        <p:style>
+          <a:lnRef idx="0"/>
+          <a:fillRef idx="0"/>
+          <a:effectRef idx="0"/>
+          <a:fontRef idx="minor"/>
+        </p:style>
+        <p:txBody>
+          <a:bodyPr lIns="90000" rIns="90000" tIns="45000" bIns="45000" anchor="ctr" anchorCtr="1">
+            <a:spAutoFit/>
+          </a:bodyPr>
+          <a:p>
+            <a:pPr algn="ctr">
+              <a:lnSpc>
+                <a:spcPct val="100000"/>
+              </a:lnSpc>
+            </a:pPr>
+            <a:r>
+              <a:rPr b="0" i="1" sz="1000">
+                <a:solidFill>
+                  <a:srgbClr val="000000"/>
+                </a:solidFill>
+                <a:latin typeface="Nimbus Roman"/>
+              </a:rPr>
+              <a:t>The spacious primary bedroom features a large window and calming accent walls.</a:t>
+            </a:r>
+            <a:endParaRPr lang="en-CA" sz="1000" b="0" u="none" strike="noStrike">
+              <a:solidFill>
+                <a:srgbClr val="000000"/>
+              </a:solidFill>
+              <a:effectLst/>
+              <a:uFillTx/>
+              <a:latin typeface="Arial"/>
+            </a:endParaRPr>
+          </a:p>
+          <a:p>
+            <a:pPr algn="ctr">
+              <a:lnSpc>
+                <a:spcPct val="100000"/>
+              </a:lnSpc>
+            </a:pPr>
+            <a:endParaRPr lang="en-CA" sz="1000" b="0" u="none" strike="noStrike">
+              <a:solidFill>
+                <a:srgbClr val="000000"/>
+              </a:solidFill>
+              <a:effectLst/>
+              <a:uFillTx/>
+              <a:latin typeface="Arial"/>
+            </a:endParaRPr>
+          </a:p>
+        </p:txBody>
+      </p:sp>
+      <p:sp>
+        <p:nvSpPr>
+          <p:cNvPr id="16" name=""/>
+          <p:cNvSpPr/>
+          <p:nvPr/>
+        </p:nvSpPr>
+        <p:spPr>
+          <a:xfrm>
+            <a:off x="280440" y="6542280"/>
+            <a:ext cx="996120" cy="396000"/>
+          </a:xfrm>
+          <a:prstGeom prst="rect">
+            <a:avLst/>
+          </a:prstGeom>
+          <a:noFill/>
+          <a:ln w="0">
+            <a:noFill/>
+          </a:ln>
+        </p:spPr>
+        <p:style>
+          <a:lnRef idx="0"/>
+          <a:fillRef idx="0"/>
+          <a:effectRef idx="0"/>
+          <a:fontRef idx="minor"/>
+        </p:style>
+        <p:txBody>
+          <a:bodyPr lIns="90000" rIns="90000" tIns="45000" bIns="45000" anchor="ctr" anchorCtr="1">
+            <a:spAutoFit/>
+          </a:bodyPr>
+          <a:p>
+            <a:pPr algn="ctr">
+              <a:lnSpc>
+                <a:spcPct val="100000"/>
+              </a:lnSpc>
+            </a:pPr>
+            <a:r>
+              <a:rPr b="0" i="1" sz="1000">
+                <a:solidFill>
+                  <a:srgbClr val="000000"/>
+                </a:solidFill>
+                <a:latin typeface="Nimbus Roman"/>
+              </a:rPr>
+              <a:t>A bright secondary bedroom is staged as a practical home office.</a:t>
+            </a:r>
+            <a:endParaRPr lang="en-CA" sz="1000" b="0" u="none" strike="noStrike">
+              <a:solidFill>
+                <a:srgbClr val="000000"/>
+              </a:solidFill>
+              <a:effectLst/>
+              <a:uFillTx/>
+              <a:latin typeface="Arial"/>
+            </a:endParaRPr>
+          </a:p>
+          <a:p>
+            <a:pPr algn="ctr">
+              <a:lnSpc>
+                <a:spcPct val="100000"/>
+              </a:lnSpc>
+            </a:pPr>
+            <a:endParaRPr lang="en-CA" sz="1000" b="0" u="none" strike="noStrike">
+              <a:solidFill>
+                <a:srgbClr val="000000"/>
+              </a:solidFill>
+              <a:effectLst/>
+              <a:uFillTx/>
+              <a:latin typeface="Arial"/>
+            </a:endParaRPr>
+          </a:p>
+        </p:txBody>
+      </p:sp>
+      <p:sp>
+        <p:nvSpPr>
+          <p:cNvPr id="22" name=""/>
+          <p:cNvSpPr/>
+          <p:nvPr/>
+        </p:nvSpPr>
+        <p:spPr>
+          <a:xfrm>
+            <a:off x="3778200" y="341280"/>
+            <a:ext cx="2586960" cy="443880"/>
           </a:xfrm>
           <a:prstGeom prst="rect">
             <a:avLst/>
@@ -1201,30 +1629,15 @@
               </a:lnSpc>
             </a:pPr>
             <a:r>
-              <a:rPr b="0" i="1" sz="1000">
-                <a:solidFill>
-                  <a:srgbClr val="000000"/>
-                </a:solidFill>
-                <a:latin typeface="Nimbus Roman"/>
-              </a:rPr>
-              <a:t>A bright living room offers comfortable space for relaxing or entertaining.</a:t>
-            </a:r>
-            <a:endParaRPr lang="en-CA" sz="1000" b="0" u="none" strike="noStrike">
-              <a:solidFill>
-                <a:srgbClr val="000000"/>
-              </a:solidFill>
-              <a:effectLst/>
-              <a:uFillTx/>
-              <a:latin typeface="Arial"/>
-            </a:endParaRPr>
-          </a:p>
-          <a:p>
-            <a:pPr algn="ctr">
-              <a:lnSpc>
-                <a:spcPct val="100000"/>
-              </a:lnSpc>
-            </a:pPr>
-            <a:endParaRPr lang="en-CA" sz="1000" b="0" u="none" strike="noStrike">
+              <a:rPr b="1" i="1" sz="2000">
+                <a:solidFill>
+                  <a:srgbClr val="000000"/>
+                </a:solidFill>
+                <a:latin typeface="Nimbus Roman"/>
+              </a:rPr>
+              <a:t>4-1616 Happyvale Ave</a:t>
+            </a:r>
+            <a:endParaRPr lang="en-CA" sz="2000" b="0" u="none" strike="noStrike">
               <a:solidFill>
                 <a:srgbClr val="000000"/>
               </a:solidFill>
@@ -1237,14 +1650,221 @@
       </p:sp>
       <p:sp>
         <p:nvSpPr>
-          <p:cNvPr id="13" name=""/>
+          <p:cNvPr id="23" name=""/>
           <p:cNvSpPr/>
           <p:nvPr/>
         </p:nvSpPr>
         <p:spPr>
           <a:xfrm>
-            <a:off x="2037600" y="1746360"/>
-            <a:ext cx="996480" cy="1405440"/>
+            <a:off x="3651120" y="785880"/>
+            <a:ext cx="2824920" cy="5513400"/>
+          </a:xfrm>
+          <a:prstGeom prst="rect">
+            <a:avLst/>
+          </a:prstGeom>
+          <a:noFill/>
+          <a:ln w="0">
+            <a:noFill/>
+          </a:ln>
+        </p:spPr>
+        <p:style>
+          <a:lnRef idx="0"/>
+          <a:fillRef idx="0"/>
+          <a:effectRef idx="0"/>
+          <a:fontRef idx="minor"/>
+        </p:style>
+        <p:txBody>
+          <a:bodyPr lIns="90000" rIns="90000" tIns="431800" bIns="45000" anchor="t">
+            <a:noAutofit/>
+          </a:bodyPr>
+          <a:p>
+            <a:pPr marL="216000" indent="-216000">
+              <a:lnSpc>
+                <a:spcPct val="100000"/>
+              </a:lnSpc>
+              <a:spcBef>
+                <a:spcPts val="0"/>
+              </a:spcBef>
+              <a:spcAft>
+                <a:spcPts val="0"/>
+              </a:spcAft>
+              <a:buClr>
+                <a:srgbClr val="000000"/>
+              </a:buClr>
+              <a:buSzPct val="70000"/>
+              <a:buFont typeface="Wingdings" charset="2"/>
+              <a:buChar char=""/>
+            </a:pPr>
+            <a:r>
+              <a:rPr b="1" i="1" sz="1100">
+                <a:solidFill>
+                  <a:srgbClr val="000000"/>
+                </a:solidFill>
+                <a:latin typeface="Nimbus Roman"/>
+              </a:rPr>
+              <a:t>This 4-bedroom, 2-bath cathedral-entry townhome offers over 1,700 square feet across a practical three-level split layout.</a:t>
+            </a:r>
+            <a:endParaRPr lang="en-CA" sz="1100" b="0" u="none" strike="noStrike">
+              <a:solidFill>
+                <a:srgbClr val="000000"/>
+              </a:solidFill>
+              <a:effectLst/>
+              <a:uFillTx/>
+              <a:latin typeface="Arial"/>
+            </a:endParaRPr>
+          </a:p>
+          <a:p>
+            <a:pPr marL="216000" indent="-216000">
+              <a:lnSpc>
+                <a:spcPct val="100000"/>
+              </a:lnSpc>
+              <a:spcBef>
+                <a:spcPts val="2782"/>
+              </a:spcBef>
+              <a:spcAft>
+                <a:spcPts val="0"/>
+              </a:spcAft>
+              <a:buClr>
+                <a:srgbClr val="000000"/>
+              </a:buClr>
+              <a:buSzPct val="70000"/>
+              <a:buFont typeface="Wingdings" charset="2"/>
+              <a:buChar char=""/>
+            </a:pPr>
+            <a:r>
+              <a:rPr b="1" i="1" sz="1100">
+                <a:solidFill>
+                  <a:srgbClr val="000000"/>
+                </a:solidFill>
+                <a:latin typeface="Nimbus Roman"/>
+              </a:rPr>
+              <a:t>Set on desirable Happyvale Avenue, the home backs onto peaceful school district land for privacy and open outlooks.</a:t>
+            </a:r>
+          </a:p>
+          <a:p>
+            <a:pPr marL="216000" indent="-216000">
+              <a:lnSpc>
+                <a:spcPct val="100000"/>
+              </a:lnSpc>
+              <a:spcBef>
+                <a:spcPts val="2782"/>
+              </a:spcBef>
+              <a:spcAft>
+                <a:spcPts val="0"/>
+              </a:spcAft>
+              <a:buClr>
+                <a:srgbClr val="000000"/>
+              </a:buClr>
+              <a:buSzPct val="70000"/>
+              <a:buFont typeface="Wingdings" charset="2"/>
+              <a:buChar char=""/>
+            </a:pPr>
+            <a:r>
+              <a:rPr b="1" i="1" sz="1100">
+                <a:solidFill>
+                  <a:srgbClr val="000000"/>
+                </a:solidFill>
+                <a:latin typeface="Nimbus Roman"/>
+              </a:rPr>
+              <a:t>Thoughtful 2012 updates include the kitchen, flooring, appliances, windows, roof, decks, and railings for lasting value.</a:t>
+            </a:r>
+          </a:p>
+          <a:p>
+            <a:pPr marL="216000" indent="-216000">
+              <a:lnSpc>
+                <a:spcPct val="100000"/>
+              </a:lnSpc>
+              <a:spcBef>
+                <a:spcPts val="2782"/>
+              </a:spcBef>
+              <a:spcAft>
+                <a:spcPts val="0"/>
+              </a:spcAft>
+              <a:buClr>
+                <a:srgbClr val="000000"/>
+              </a:buClr>
+              <a:buSzPct val="70000"/>
+              <a:buFont typeface="Wingdings" charset="2"/>
+              <a:buChar char=""/>
+            </a:pPr>
+            <a:r>
+              <a:rPr b="1" i="1" sz="1100">
+                <a:solidFill>
+                  <a:srgbClr val="000000"/>
+                </a:solidFill>
+                <a:latin typeface="Nimbus Roman"/>
+              </a:rPr>
+              <a:t>The sunny dining room opens to a sundeck overlooking the fenced backyard and mature green space beyond.</a:t>
+            </a:r>
+          </a:p>
+          <a:p>
+            <a:pPr marL="216000" indent="-216000">
+              <a:lnSpc>
+                <a:spcPct val="100000"/>
+              </a:lnSpc>
+              <a:spcBef>
+                <a:spcPts val="2782"/>
+              </a:spcBef>
+              <a:spcAft>
+                <a:spcPts val="0"/>
+              </a:spcAft>
+              <a:buClr>
+                <a:srgbClr val="000000"/>
+              </a:buClr>
+              <a:buSzPct val="70000"/>
+              <a:buFont typeface="Wingdings" charset="2"/>
+              <a:buChar char=""/>
+            </a:pPr>
+            <a:r>
+              <a:rPr b="1" i="1" sz="1100">
+                <a:solidFill>
+                  <a:srgbClr val="000000"/>
+                </a:solidFill>
+                <a:latin typeface="Nimbus Roman"/>
+              </a:rPr>
+              <a:t>Flexible living includes main-floor laundry, a generous rec room, and a basement bedroom ideal for guests or office use.</a:t>
+            </a:r>
+          </a:p>
+          <a:p>
+            <a:pPr marL="216000" indent="-216000">
+              <a:lnSpc>
+                <a:spcPct val="100000"/>
+              </a:lnSpc>
+              <a:spcBef>
+                <a:spcPts val="2782"/>
+              </a:spcBef>
+              <a:spcAft>
+                <a:spcPts val="0"/>
+              </a:spcAft>
+              <a:buClr>
+                <a:srgbClr val="000000"/>
+              </a:buClr>
+              <a:buSzPct val="70000"/>
+              <a:buFont typeface="Wingdings" charset="2"/>
+              <a:buChar char=""/>
+            </a:pPr>
+            <a:r>
+              <a:rPr b="1" i="1" sz="1100">
+                <a:solidFill>
+                  <a:srgbClr val="000000"/>
+                </a:solidFill>
+                <a:latin typeface="Nimbus Roman"/>
+              </a:rPr>
+              <a:t>A double garage with workshop space, rear yard pass-through, and four total parking spaces adds everyday convenience.</a:t>
+            </a:r>
+          </a:p>
+        </p:txBody>
+      </p:sp>
+      <p:sp>
+        <p:nvSpPr>
+          <p:cNvPr id="24" name=""/>
+          <p:cNvSpPr/>
+          <p:nvPr/>
+        </p:nvSpPr>
+        <p:spPr>
+          <a:xfrm>
+            <a:off x="7111800" y="1428840"/>
+            <a:ext cx="2586960" cy="443880"/>
           </a:xfrm>
           <a:prstGeom prst="rect">
             <a:avLst/>
@@ -1271,30 +1891,15 @@
               </a:lnSpc>
             </a:pPr>
             <a:r>
-              <a:rPr b="0" i="1" sz="1000">
-                <a:solidFill>
-                  <a:srgbClr val="000000"/>
-                </a:solidFill>
-                <a:latin typeface="Nimbus Roman"/>
-              </a:rPr>
-              <a:t>The open kitchen features ample cabinetry and an easy connection to dining.</a:t>
-            </a:r>
-            <a:endParaRPr lang="en-CA" sz="1000" b="0" u="none" strike="noStrike">
-              <a:solidFill>
-                <a:srgbClr val="000000"/>
-              </a:solidFill>
-              <a:effectLst/>
-              <a:uFillTx/>
-              <a:latin typeface="Arial"/>
-            </a:endParaRPr>
-          </a:p>
-          <a:p>
-            <a:pPr algn="ctr">
-              <a:lnSpc>
-                <a:spcPct val="100000"/>
-              </a:lnSpc>
-            </a:pPr>
-            <a:endParaRPr lang="en-CA" sz="1000" b="0" u="none" strike="noStrike">
+              <a:rPr b="1" i="1" sz="2000">
+                <a:solidFill>
+                  <a:srgbClr val="000000"/>
+                </a:solidFill>
+                <a:latin typeface="Nimbus Roman"/>
+              </a:rPr>
+              <a:t>4-1616 Happyvale Ave</a:t>
+            </a:r>
+            <a:endParaRPr lang="en-CA" sz="2000" b="0" u="none" strike="noStrike">
               <a:solidFill>
                 <a:srgbClr val="000000"/>
               </a:solidFill>
@@ -1307,14 +1912,14 @@
       </p:sp>
       <p:sp>
         <p:nvSpPr>
-          <p:cNvPr id="14" name=""/>
+          <p:cNvPr id="26" name=""/>
           <p:cNvSpPr/>
           <p:nvPr/>
         </p:nvSpPr>
         <p:spPr>
           <a:xfrm>
-            <a:off x="254160" y="3244320"/>
-            <a:ext cx="996480" cy="1345680"/>
+            <a:off x="7139160" y="4844520"/>
+            <a:ext cx="2586960" cy="443880"/>
           </a:xfrm>
           <a:prstGeom prst="rect">
             <a:avLst/>
@@ -1341,30 +1946,15 @@
               </a:lnSpc>
             </a:pPr>
             <a:r>
-              <a:rPr b="0" i="1" sz="1000">
-                <a:solidFill>
-                  <a:srgbClr val="000000"/>
-                </a:solidFill>
-                <a:latin typeface="Nimbus Roman"/>
-              </a:rPr>
-              <a:t>Sliding doors bring natural light into the dining area and extend living outdoors.</a:t>
-            </a:r>
-            <a:endParaRPr lang="en-CA" sz="1000" b="0" u="none" strike="noStrike">
-              <a:solidFill>
-                <a:srgbClr val="000000"/>
-              </a:solidFill>
-              <a:effectLst/>
-              <a:uFillTx/>
-              <a:latin typeface="Arial"/>
-            </a:endParaRPr>
-          </a:p>
-          <a:p>
-            <a:pPr algn="ctr">
-              <a:lnSpc>
-                <a:spcPct val="100000"/>
-              </a:lnSpc>
-            </a:pPr>
-            <a:endParaRPr lang="en-CA" sz="1000" b="0" u="none" strike="noStrike">
+              <a:rPr b="1" i="1" sz="1600">
+                <a:solidFill>
+                  <a:srgbClr val="000000"/>
+                </a:solidFill>
+                <a:latin typeface="Nimbus Roman"/>
+              </a:rPr>
+              <a:t>Bright Brocklehurst Living With Private Green Space Views</a:t>
+            </a:r>
+            <a:endParaRPr lang="en-CA" sz="1600" b="0" u="none" strike="noStrike">
               <a:solidFill>
                 <a:srgbClr val="000000"/>
               </a:solidFill>
@@ -1377,14 +1967,14 @@
       </p:sp>
       <p:sp>
         <p:nvSpPr>
-          <p:cNvPr id="15" name=""/>
+          <p:cNvPr id="27" name=""/>
           <p:cNvSpPr/>
           <p:nvPr/>
         </p:nvSpPr>
         <p:spPr>
           <a:xfrm>
-            <a:off x="1995120" y="4647600"/>
-            <a:ext cx="996480" cy="1345680"/>
+            <a:off x="7132320" y="6575400"/>
+            <a:ext cx="2586960" cy="443880"/>
           </a:xfrm>
           <a:prstGeom prst="rect">
             <a:avLst/>
@@ -1411,518 +2001,6 @@
               </a:lnSpc>
             </a:pPr>
             <a:r>
-              <a:rPr b="0" i="1" sz="1000">
-                <a:solidFill>
-                  <a:srgbClr val="000000"/>
-                </a:solidFill>
-                <a:latin typeface="Nimbus Roman"/>
-              </a:rPr>
-              <a:t>The primary bedroom feels calm and comfortable with a large window and accent wall.</a:t>
-            </a:r>
-            <a:endParaRPr lang="en-CA" sz="1000" b="0" u="none" strike="noStrike">
-              <a:solidFill>
-                <a:srgbClr val="000000"/>
-              </a:solidFill>
-              <a:effectLst/>
-              <a:uFillTx/>
-              <a:latin typeface="Arial"/>
-            </a:endParaRPr>
-          </a:p>
-          <a:p>
-            <a:pPr algn="ctr">
-              <a:lnSpc>
-                <a:spcPct val="100000"/>
-              </a:lnSpc>
-            </a:pPr>
-            <a:endParaRPr lang="en-CA" sz="1000" b="0" u="none" strike="noStrike">
-              <a:solidFill>
-                <a:srgbClr val="000000"/>
-              </a:solidFill>
-              <a:effectLst/>
-              <a:uFillTx/>
-              <a:latin typeface="Arial"/>
-            </a:endParaRPr>
-          </a:p>
-        </p:txBody>
-      </p:sp>
-      <p:sp>
-        <p:nvSpPr>
-          <p:cNvPr id="16" name=""/>
-          <p:cNvSpPr/>
-          <p:nvPr/>
-        </p:nvSpPr>
-        <p:spPr>
-          <a:xfrm>
-            <a:off x="280440" y="6067800"/>
-            <a:ext cx="996480" cy="1345680"/>
-          </a:xfrm>
-          <a:prstGeom prst="rect">
-            <a:avLst/>
-          </a:prstGeom>
-          <a:noFill/>
-          <a:ln w="0">
-            <a:noFill/>
-          </a:ln>
-        </p:spPr>
-        <p:style>
-          <a:lnRef idx="0"/>
-          <a:fillRef idx="0"/>
-          <a:effectRef idx="0"/>
-          <a:fontRef idx="minor"/>
-        </p:style>
-        <p:txBody>
-          <a:bodyPr lIns="90000" rIns="90000" tIns="45000" bIns="45000" anchor="t" anchorCtr="1">
-            <a:spAutoFit/>
-          </a:bodyPr>
-          <a:p>
-            <a:pPr algn="ctr">
-              <a:lnSpc>
-                <a:spcPct val="100000"/>
-              </a:lnSpc>
-            </a:pPr>
-            <a:r>
-              <a:rPr b="0" i="1" sz="1000">
-                <a:solidFill>
-                  <a:srgbClr val="000000"/>
-                </a:solidFill>
-                <a:latin typeface="Nimbus Roman"/>
-              </a:rPr>
-              <a:t>A flexible bonus room suits reading, media, hobbies, or a quiet workspace.</a:t>
-            </a:r>
-            <a:endParaRPr lang="en-CA" sz="1000" b="0" u="none" strike="noStrike">
-              <a:solidFill>
-                <a:srgbClr val="000000"/>
-              </a:solidFill>
-              <a:effectLst/>
-              <a:uFillTx/>
-              <a:latin typeface="Arial"/>
-            </a:endParaRPr>
-          </a:p>
-          <a:p>
-            <a:pPr algn="ctr">
-              <a:lnSpc>
-                <a:spcPct val="100000"/>
-              </a:lnSpc>
-            </a:pPr>
-            <a:endParaRPr lang="en-CA" sz="1000" b="0" u="none" strike="noStrike">
-              <a:solidFill>
-                <a:srgbClr val="000000"/>
-              </a:solidFill>
-              <a:effectLst/>
-              <a:uFillTx/>
-              <a:latin typeface="Arial"/>
-            </a:endParaRPr>
-          </a:p>
-        </p:txBody>
-      </p:sp>
-      <p:sp>
-        <p:nvSpPr>
-          <p:cNvPr id="22" name=""/>
-          <p:cNvSpPr/>
-          <p:nvPr/>
-        </p:nvSpPr>
-        <p:spPr>
-          <a:xfrm>
-            <a:off x="3778200" y="341280"/>
-            <a:ext cx="2587320" cy="444240"/>
-          </a:xfrm>
-          <a:prstGeom prst="rect">
-            <a:avLst/>
-          </a:prstGeom>
-          <a:noFill/>
-          <a:ln w="0">
-            <a:noFill/>
-          </a:ln>
-        </p:spPr>
-        <p:style>
-          <a:lnRef idx="0"/>
-          <a:fillRef idx="0"/>
-          <a:effectRef idx="0"/>
-          <a:fontRef idx="minor"/>
-        </p:style>
-        <p:txBody>
-          <a:bodyPr lIns="90000" rIns="90000" tIns="45000" bIns="45000" anchor="t" anchorCtr="1">
-            <a:spAutoFit/>
-          </a:bodyPr>
-          <a:p>
-            <a:pPr algn="ctr">
-              <a:lnSpc>
-                <a:spcPct val="100000"/>
-              </a:lnSpc>
-            </a:pPr>
-            <a:r>
-              <a:rPr b="1" i="1" sz="2000">
-                <a:solidFill>
-                  <a:srgbClr val="000000"/>
-                </a:solidFill>
-                <a:latin typeface="Nimbus Roman"/>
-              </a:rPr>
-              <a:t>4-1616 Happyvale Avenue</a:t>
-            </a:r>
-            <a:endParaRPr lang="en-CA" sz="2000" b="0" u="none" strike="noStrike">
-              <a:solidFill>
-                <a:srgbClr val="000000"/>
-              </a:solidFill>
-              <a:effectLst/>
-              <a:uFillTx/>
-              <a:latin typeface="Arial"/>
-            </a:endParaRPr>
-          </a:p>
-        </p:txBody>
-      </p:sp>
-      <p:sp>
-        <p:nvSpPr>
-          <p:cNvPr id="23" name=""/>
-          <p:cNvSpPr/>
-          <p:nvPr/>
-        </p:nvSpPr>
-        <p:spPr>
-          <a:xfrm>
-            <a:off x="3651120" y="785880"/>
-            <a:ext cx="2825280" cy="5513760"/>
-          </a:xfrm>
-          <a:prstGeom prst="rect">
-            <a:avLst/>
-          </a:prstGeom>
-          <a:noFill/>
-          <a:ln w="0">
-            <a:noFill/>
-          </a:ln>
-        </p:spPr>
-        <p:style>
-          <a:lnRef idx="0"/>
-          <a:fillRef idx="0"/>
-          <a:effectRef idx="0"/>
-          <a:fontRef idx="minor"/>
-        </p:style>
-        <p:txBody>
-          <a:bodyPr lIns="90000" rIns="90000" tIns="45000" bIns="45000" anchor="t">
-            <a:noAutofit/>
-          </a:bodyPr>
-          <a:p>
-            <a:pPr marL="216000" indent="-216000">
-              <a:lnSpc>
-                <a:spcPct val="100000"/>
-              </a:lnSpc>
-              <a:spcBef>
-                <a:spcPts val="0"/>
-              </a:spcBef>
-              <a:spcAft>
-                <a:spcPts val="0"/>
-              </a:spcAft>
-              <a:buClr>
-                <a:srgbClr val="000000"/>
-              </a:buClr>
-              <a:buSzPct val="70000"/>
-              <a:buFont typeface="Wingdings" charset="2"/>
-              <a:buChar char=""/>
-            </a:pPr>
-            <a:r>
-              <a:rPr b="1" i="1" sz="1100">
-                <a:solidFill>
-                  <a:srgbClr val="000000"/>
-                </a:solidFill>
-                <a:latin typeface="Nimbus Roman"/>
-              </a:rPr>
-              <a:t>Enjoy a functional three-level split design offering over 1,700 square feet for family living, guests, or home office needs.</a:t>
-            </a:r>
-            <a:endParaRPr lang="en-CA" sz="1100" b="0" u="none" strike="noStrike">
-              <a:solidFill>
-                <a:srgbClr val="000000"/>
-              </a:solidFill>
-              <a:effectLst/>
-              <a:uFillTx/>
-              <a:latin typeface="Arial"/>
-            </a:endParaRPr>
-          </a:p>
-          <a:p>
-            <a:pPr marL="216000" indent="-216000">
-              <a:lnSpc>
-                <a:spcPct val="100000"/>
-              </a:lnSpc>
-              <a:spcBef>
-                <a:spcPts val="1800"/>
-              </a:spcBef>
-              <a:spcAft>
-                <a:spcPts val="0"/>
-              </a:spcAft>
-              <a:buClr>
-                <a:srgbClr val="000000"/>
-              </a:buClr>
-              <a:buSzPct val="70000"/>
-              <a:buFont typeface="Wingdings" charset="2"/>
-              <a:buChar char=""/>
-            </a:pPr>
-            <a:r>
-              <a:rPr b="1" i="1" sz="1100">
-                <a:solidFill>
-                  <a:srgbClr val="000000"/>
-                </a:solidFill>
-                <a:latin typeface="Nimbus Roman"/>
-              </a:rPr>
-              <a:t>The sunny dining room opens to a sundeck with views over the fenced backyard and green space beyond.</a:t>
-            </a:r>
-          </a:p>
-          <a:p>
-            <a:pPr marL="216000" indent="-216000">
-              <a:lnSpc>
-                <a:spcPct val="100000"/>
-              </a:lnSpc>
-              <a:spcBef>
-                <a:spcPts val="1800"/>
-              </a:spcBef>
-              <a:spcAft>
-                <a:spcPts val="0"/>
-              </a:spcAft>
-              <a:buClr>
-                <a:srgbClr val="000000"/>
-              </a:buClr>
-              <a:buSzPct val="70000"/>
-              <a:buFont typeface="Wingdings" charset="2"/>
-              <a:buChar char=""/>
-            </a:pPr>
-            <a:r>
-              <a:rPr b="1" i="1" sz="1100">
-                <a:solidFill>
-                  <a:srgbClr val="000000"/>
-                </a:solidFill>
-                <a:latin typeface="Nimbus Roman"/>
-              </a:rPr>
-              <a:t>Thoughtful 2012 updates include the kitchen, flooring, appliances, windows, roof, lighting, decks, and railings.</a:t>
-            </a:r>
-          </a:p>
-          <a:p>
-            <a:pPr marL="216000" indent="-216000">
-              <a:lnSpc>
-                <a:spcPct val="100000"/>
-              </a:lnSpc>
-              <a:spcBef>
-                <a:spcPts val="1800"/>
-              </a:spcBef>
-              <a:spcAft>
-                <a:spcPts val="0"/>
-              </a:spcAft>
-              <a:buClr>
-                <a:srgbClr val="000000"/>
-              </a:buClr>
-              <a:buSzPct val="70000"/>
-              <a:buFont typeface="Wingdings" charset="2"/>
-              <a:buChar char=""/>
-            </a:pPr>
-            <a:r>
-              <a:rPr b="1" i="1" sz="1100">
-                <a:solidFill>
-                  <a:srgbClr val="000000"/>
-                </a:solidFill>
-                <a:latin typeface="Nimbus Roman"/>
-              </a:rPr>
-              <a:t>A double garage with workshop space, rear pass-through access, and four total parking spots adds everyday convenience.</a:t>
-            </a:r>
-          </a:p>
-          <a:p>
-            <a:pPr marL="216000" indent="-216000">
-              <a:lnSpc>
-                <a:spcPct val="100000"/>
-              </a:lnSpc>
-              <a:spcBef>
-                <a:spcPts val="1800"/>
-              </a:spcBef>
-              <a:spcAft>
-                <a:spcPts val="0"/>
-              </a:spcAft>
-              <a:buClr>
-                <a:srgbClr val="000000"/>
-              </a:buClr>
-              <a:buSzPct val="70000"/>
-              <a:buFont typeface="Wingdings" charset="2"/>
-              <a:buChar char=""/>
-            </a:pPr>
-            <a:r>
-              <a:rPr b="1" i="1" sz="1100">
-                <a:solidFill>
-                  <a:srgbClr val="000000"/>
-                </a:solidFill>
-                <a:latin typeface="Nimbus Roman"/>
-              </a:rPr>
-              <a:t>This pet- and rental-friendly complex offers flexibility for owners, investors, and households with changing needs.</a:t>
-            </a:r>
-          </a:p>
-          <a:p>
-            <a:pPr marL="216000" indent="-216000">
-              <a:lnSpc>
-                <a:spcPct val="100000"/>
-              </a:lnSpc>
-              <a:spcBef>
-                <a:spcPts val="1800"/>
-              </a:spcBef>
-              <a:spcAft>
-                <a:spcPts val="0"/>
-              </a:spcAft>
-              <a:buClr>
-                <a:srgbClr val="000000"/>
-              </a:buClr>
-              <a:buSzPct val="70000"/>
-              <a:buFont typeface="Wingdings" charset="2"/>
-              <a:buChar char=""/>
-            </a:pPr>
-            <a:r>
-              <a:rPr b="1" i="1" sz="1100">
-                <a:solidFill>
-                  <a:srgbClr val="000000"/>
-                </a:solidFill>
-                <a:latin typeface="Nimbus Roman"/>
-              </a:rPr>
-              <a:t>Set in Brocklehurst near schools, shopping, McArthur Island Park, and the scenic River’s Trail.</a:t>
-            </a:r>
-          </a:p>
-        </p:txBody>
-      </p:sp>
-      <p:sp>
-        <p:nvSpPr>
-          <p:cNvPr id="24" name=""/>
-          <p:cNvSpPr/>
-          <p:nvPr/>
-        </p:nvSpPr>
-        <p:spPr>
-          <a:xfrm>
-            <a:off x="7111800" y="1428840"/>
-            <a:ext cx="2587320" cy="444240"/>
-          </a:xfrm>
-          <a:prstGeom prst="rect">
-            <a:avLst/>
-          </a:prstGeom>
-          <a:noFill/>
-          <a:ln w="0">
-            <a:noFill/>
-          </a:ln>
-        </p:spPr>
-        <p:style>
-          <a:lnRef idx="0"/>
-          <a:fillRef idx="0"/>
-          <a:effectRef idx="0"/>
-          <a:fontRef idx="minor"/>
-        </p:style>
-        <p:txBody>
-          <a:bodyPr lIns="90000" rIns="90000" tIns="45000" bIns="45000" anchor="t" anchorCtr="1">
-            <a:spAutoFit/>
-          </a:bodyPr>
-          <a:p>
-            <a:pPr algn="ctr">
-              <a:lnSpc>
-                <a:spcPct val="100000"/>
-              </a:lnSpc>
-            </a:pPr>
-            <a:r>
-              <a:rPr b="1" i="1" sz="2000">
-                <a:solidFill>
-                  <a:srgbClr val="000000"/>
-                </a:solidFill>
-                <a:latin typeface="Nimbus Roman"/>
-              </a:rPr>
-              <a:t>4-1616 Happyvale Avenue</a:t>
-            </a:r>
-            <a:endParaRPr lang="en-CA" sz="2000" b="0" u="none" strike="noStrike">
-              <a:solidFill>
-                <a:srgbClr val="000000"/>
-              </a:solidFill>
-              <a:effectLst/>
-              <a:uFillTx/>
-              <a:latin typeface="Arial"/>
-            </a:endParaRPr>
-          </a:p>
-        </p:txBody>
-      </p:sp>
-      <p:sp>
-        <p:nvSpPr>
-          <p:cNvPr id="26" name=""/>
-          <p:cNvSpPr/>
-          <p:nvPr/>
-        </p:nvSpPr>
-        <p:spPr>
-          <a:xfrm>
-            <a:off x="7139160" y="4844520"/>
-            <a:ext cx="2587320" cy="444240"/>
-          </a:xfrm>
-          <a:prstGeom prst="rect">
-            <a:avLst/>
-          </a:prstGeom>
-          <a:noFill/>
-          <a:ln w="0">
-            <a:noFill/>
-          </a:ln>
-        </p:spPr>
-        <p:style>
-          <a:lnRef idx="0"/>
-          <a:fillRef idx="0"/>
-          <a:effectRef idx="0"/>
-          <a:fontRef idx="minor"/>
-        </p:style>
-        <p:txBody>
-          <a:bodyPr lIns="90000" rIns="90000" tIns="45000" bIns="45000" anchor="t" anchorCtr="1">
-            <a:spAutoFit/>
-          </a:bodyPr>
-          <a:p>
-            <a:pPr algn="ctr">
-              <a:lnSpc>
-                <a:spcPct val="100000"/>
-              </a:lnSpc>
-            </a:pPr>
-            <a:r>
-              <a:rPr b="1" i="1" sz="1600">
-                <a:solidFill>
-                  <a:srgbClr val="000000"/>
-                </a:solidFill>
-                <a:latin typeface="Nimbus Roman"/>
-              </a:rPr>
-              <a:t>Bright Brocklehurst Townhome With Space To Grow</a:t>
-            </a:r>
-            <a:endParaRPr lang="en-CA" sz="1600" b="0" u="none" strike="noStrike">
-              <a:solidFill>
-                <a:srgbClr val="000000"/>
-              </a:solidFill>
-              <a:effectLst/>
-              <a:uFillTx/>
-              <a:latin typeface="Arial"/>
-            </a:endParaRPr>
-          </a:p>
-        </p:txBody>
-      </p:sp>
-      <p:sp>
-        <p:nvSpPr>
-          <p:cNvPr id="27" name=""/>
-          <p:cNvSpPr/>
-          <p:nvPr/>
-        </p:nvSpPr>
-        <p:spPr>
-          <a:xfrm>
-            <a:off x="7132320" y="6575400"/>
-            <a:ext cx="2587320" cy="444240"/>
-          </a:xfrm>
-          <a:prstGeom prst="rect">
-            <a:avLst/>
-          </a:prstGeom>
-          <a:noFill/>
-          <a:ln w="0">
-            <a:noFill/>
-          </a:ln>
-        </p:spPr>
-        <p:style>
-          <a:lnRef idx="0"/>
-          <a:fillRef idx="0"/>
-          <a:effectRef idx="0"/>
-          <a:fontRef idx="minor"/>
-        </p:style>
-        <p:txBody>
-          <a:bodyPr lIns="90000" rIns="90000" tIns="45000" bIns="45000" anchor="t" anchorCtr="1">
-            <a:spAutoFit/>
-          </a:bodyPr>
-          <a:p>
-            <a:pPr algn="ctr">
-              <a:lnSpc>
-                <a:spcPct val="100000"/>
-              </a:lnSpc>
-            </a:pPr>
-            <a:r>
               <a:rPr b="1" i="1" sz="2000">
                 <a:solidFill>
                   <a:srgbClr val="000000"/>
@@ -1951,7 +2029,7 @@
         <p:spPr>
           <a:xfrm>
             <a:off x="7132320" y="6130800"/>
-            <a:ext cx="2587320" cy="444240"/>
+            <a:ext cx="2586960" cy="443880"/>
           </a:xfrm>
           <a:prstGeom prst="rect">
             <a:avLst/>
@@ -2007,7 +2085,7 @@
         </p:nvPicPr>
         <p:blipFill>
           <a:blip r:embed="rId3"/>
-          <a:srcRect l="6731" r="6731"/>
+          <a:srcRect l="6728" r="6728"/>
           <a:stretch>
             <a:fillRect/>
           </a:stretch>
@@ -2015,7 +2093,7 @@
         <p:spPr>
           <a:xfrm>
             <a:off x="1255320" y="270000"/>
-            <a:ext cx="1765440" cy="1357920"/>
+            <a:ext cx="1765080" cy="1357560"/>
           </a:xfrm>
           <a:prstGeom prst="rect">
             <a:avLst/>
@@ -2032,7 +2110,7 @@
         </p:nvPicPr>
         <p:blipFill>
           <a:blip r:embed="rId4"/>
-          <a:srcRect l="7405" r="7405"/>
+          <a:srcRect l="7403" r="7403"/>
           <a:stretch>
             <a:fillRect/>
           </a:stretch>
@@ -2040,7 +2118,7 @@
         <p:spPr>
           <a:xfrm>
             <a:off x="240480" y="1755720"/>
-            <a:ext cx="1801440" cy="1410840"/>
+            <a:ext cx="1801080" cy="1410480"/>
           </a:xfrm>
           <a:prstGeom prst="rect">
             <a:avLst/>
@@ -2057,7 +2135,7 @@
         </p:nvPicPr>
         <p:blipFill>
           <a:blip r:embed="rId5"/>
-          <a:srcRect l="7505" r="7505"/>
+          <a:srcRect l="7502" r="7502"/>
           <a:stretch>
             <a:fillRect/>
           </a:stretch>
@@ -2065,7 +2143,7 @@
         <p:spPr>
           <a:xfrm>
             <a:off x="239760" y="4661640"/>
-            <a:ext cx="1703520" cy="1334160"/>
+            <a:ext cx="1703160" cy="1333800"/>
           </a:xfrm>
           <a:prstGeom prst="rect">
             <a:avLst/>
@@ -2082,7 +2160,7 @@
         </p:nvPicPr>
         <p:blipFill>
           <a:blip r:embed="rId6"/>
-          <a:srcRect l="6509" r="6509"/>
+          <a:srcRect l="6507" r="6507"/>
           <a:stretch>
             <a:fillRect/>
           </a:stretch>
@@ -2090,7 +2168,7 @@
         <p:spPr>
           <a:xfrm>
             <a:off x="1319760" y="3267720"/>
-            <a:ext cx="1699920" cy="1303920"/>
+            <a:ext cx="1699560" cy="1303560"/>
           </a:xfrm>
           <a:prstGeom prst="rect">
             <a:avLst/>
@@ -2099,7 +2177,7 @@
       </p:pic>
       <p:pic>
         <p:nvPicPr>
-          <p:cNvPr id="33" name="Picture 32" descr="DSC03405.jpg"/>
+          <p:cNvPr id="33" name="Picture 32" descr="DSC03408.jpg"/>
           <p:cNvPicPr>
             <a:picLocks noChangeAspect="1"/>
           </p:cNvPicPr>
@@ -2107,7 +2185,7 @@
         </p:nvPicPr>
         <p:blipFill>
           <a:blip r:embed="rId7"/>
-          <a:srcRect l="7439" r="7439"/>
+          <a:srcRect l="7536" r="7536"/>
           <a:stretch>
             <a:fillRect/>
           </a:stretch>
@@ -2115,7 +2193,7 @@
         <p:spPr>
           <a:xfrm>
             <a:off x="1380960" y="6063840"/>
-            <a:ext cx="1640160" cy="1285560"/>
+            <a:ext cx="1639800" cy="1285200"/>
           </a:xfrm>
           <a:prstGeom prst="rect">
             <a:avLst/>
@@ -2132,7 +2210,7 @@
         </p:nvPicPr>
         <p:blipFill>
           <a:blip r:embed="rId8"/>
-          <a:srcRect l="4091" r="4091"/>
+          <a:srcRect l="4088" r="4088"/>
           <a:stretch>
             <a:fillRect/>
           </a:stretch>
@@ -2140,7 +2218,7 @@
         <p:spPr>
           <a:xfrm>
             <a:off x="7064640" y="2086920"/>
-            <a:ext cx="2665440" cy="1936800"/>
+            <a:ext cx="2665080" cy="1936440"/>
           </a:xfrm>
           <a:prstGeom prst="rect">
             <a:avLst/>
@@ -2193,8 +2271,358 @@
         </p:nvSpPr>
         <p:spPr>
           <a:xfrm>
-            <a:off x="315720" y="224640"/>
-            <a:ext cx="996480" cy="1345680"/>
+            <a:off x="315720" y="699120"/>
+            <a:ext cx="996120" cy="396000"/>
+          </a:xfrm>
+          <a:prstGeom prst="rect">
+            <a:avLst/>
+          </a:prstGeom>
+          <a:noFill/>
+          <a:ln w="0">
+            <a:noFill/>
+          </a:ln>
+        </p:spPr>
+        <p:style>
+          <a:lnRef idx="0"/>
+          <a:fillRef idx="0"/>
+          <a:effectRef idx="0"/>
+          <a:fontRef idx="minor"/>
+        </p:style>
+        <p:txBody>
+          <a:bodyPr lIns="90000" rIns="90000" tIns="45000" bIns="45000" anchor="ctr" anchorCtr="1">
+            <a:spAutoFit/>
+          </a:bodyPr>
+          <a:p>
+            <a:pPr algn="ctr">
+              <a:lnSpc>
+                <a:spcPct val="100000"/>
+              </a:lnSpc>
+            </a:pPr>
+            <a:r>
+              <a:rPr b="0" i="1" sz="1000">
+                <a:solidFill>
+                  <a:srgbClr val="000000"/>
+                </a:solidFill>
+                <a:latin typeface="Nimbus Roman"/>
+              </a:rPr>
+              <a:t>The fenced backyard offers mature shade trees and open lawn views.</a:t>
+            </a:r>
+            <a:endParaRPr lang="en-CA" sz="1000" b="0" u="none" strike="noStrike">
+              <a:solidFill>
+                <a:srgbClr val="000000"/>
+              </a:solidFill>
+              <a:effectLst/>
+              <a:uFillTx/>
+              <a:latin typeface="Arial"/>
+            </a:endParaRPr>
+          </a:p>
+          <a:p>
+            <a:pPr algn="ctr">
+              <a:lnSpc>
+                <a:spcPct val="100000"/>
+              </a:lnSpc>
+            </a:pPr>
+            <a:endParaRPr lang="en-CA" sz="1000" b="0" u="none" strike="noStrike">
+              <a:solidFill>
+                <a:srgbClr val="000000"/>
+              </a:solidFill>
+              <a:effectLst/>
+              <a:uFillTx/>
+              <a:latin typeface="Arial"/>
+            </a:endParaRPr>
+          </a:p>
+        </p:txBody>
+      </p:sp>
+      <p:sp>
+        <p:nvSpPr>
+          <p:cNvPr id="35" name=""/>
+          <p:cNvSpPr/>
+          <p:nvPr/>
+        </p:nvSpPr>
+        <p:spPr>
+          <a:xfrm>
+            <a:off x="1975680" y="2120400"/>
+            <a:ext cx="1045080" cy="396000"/>
+          </a:xfrm>
+          <a:prstGeom prst="rect">
+            <a:avLst/>
+          </a:prstGeom>
+          <a:noFill/>
+          <a:ln w="0">
+            <a:noFill/>
+          </a:ln>
+        </p:spPr>
+        <p:style>
+          <a:lnRef idx="0"/>
+          <a:fillRef idx="0"/>
+          <a:effectRef idx="0"/>
+          <a:fontRef idx="minor"/>
+        </p:style>
+        <p:txBody>
+          <a:bodyPr lIns="90000" rIns="90000" tIns="45000" bIns="45000" anchor="ctr" anchorCtr="1">
+            <a:spAutoFit/>
+          </a:bodyPr>
+          <a:p>
+            <a:pPr algn="ctr">
+              <a:lnSpc>
+                <a:spcPct val="100000"/>
+              </a:lnSpc>
+            </a:pPr>
+            <a:r>
+              <a:rPr b="0" i="1" sz="1000">
+                <a:solidFill>
+                  <a:srgbClr val="000000"/>
+                </a:solidFill>
+                <a:latin typeface="Nimbus Roman"/>
+              </a:rPr>
+              <a:t>A covered balcony overlooks green space, creating an inviting outdoor retreat.</a:t>
+            </a:r>
+            <a:endParaRPr lang="en-CA" sz="1000" b="0" u="none" strike="noStrike">
+              <a:solidFill>
+                <a:srgbClr val="000000"/>
+              </a:solidFill>
+              <a:effectLst/>
+              <a:uFillTx/>
+              <a:latin typeface="Arial"/>
+            </a:endParaRPr>
+          </a:p>
+          <a:p>
+            <a:pPr algn="ctr">
+              <a:lnSpc>
+                <a:spcPct val="100000"/>
+              </a:lnSpc>
+            </a:pPr>
+            <a:endParaRPr lang="en-CA" sz="1000" b="0" u="none" strike="noStrike">
+              <a:solidFill>
+                <a:srgbClr val="000000"/>
+              </a:solidFill>
+              <a:effectLst/>
+              <a:uFillTx/>
+              <a:latin typeface="Arial"/>
+            </a:endParaRPr>
+          </a:p>
+        </p:txBody>
+      </p:sp>
+      <p:sp>
+        <p:nvSpPr>
+          <p:cNvPr id="36" name=""/>
+          <p:cNvSpPr/>
+          <p:nvPr/>
+        </p:nvSpPr>
+        <p:spPr>
+          <a:xfrm>
+            <a:off x="289800" y="3593160"/>
+            <a:ext cx="1032840" cy="396000"/>
+          </a:xfrm>
+          <a:prstGeom prst="rect">
+            <a:avLst/>
+          </a:prstGeom>
+          <a:noFill/>
+          <a:ln w="0">
+            <a:noFill/>
+          </a:ln>
+        </p:spPr>
+        <p:style>
+          <a:lnRef idx="0"/>
+          <a:fillRef idx="0"/>
+          <a:effectRef idx="0"/>
+          <a:fontRef idx="minor"/>
+        </p:style>
+        <p:txBody>
+          <a:bodyPr lIns="90000" rIns="90000" tIns="45000" bIns="45000" anchor="ctr" anchorCtr="1">
+            <a:spAutoFit/>
+          </a:bodyPr>
+          <a:p>
+            <a:pPr algn="ctr">
+              <a:lnSpc>
+                <a:spcPct val="100000"/>
+              </a:lnSpc>
+            </a:pPr>
+            <a:r>
+              <a:rPr b="0" i="1" sz="1000">
+                <a:solidFill>
+                  <a:srgbClr val="000000"/>
+                </a:solidFill>
+                <a:latin typeface="Nimbus Roman"/>
+              </a:rPr>
+              <a:t>The lower-level rec room provides flexible space for work, fitness, or relaxing.</a:t>
+            </a:r>
+            <a:endParaRPr lang="en-CA" sz="1000" b="0" u="none" strike="noStrike">
+              <a:solidFill>
+                <a:srgbClr val="000000"/>
+              </a:solidFill>
+              <a:effectLst/>
+              <a:uFillTx/>
+              <a:latin typeface="Arial"/>
+            </a:endParaRPr>
+          </a:p>
+          <a:p>
+            <a:pPr algn="ctr">
+              <a:lnSpc>
+                <a:spcPct val="100000"/>
+              </a:lnSpc>
+            </a:pPr>
+            <a:endParaRPr lang="en-CA" sz="1000" b="0" u="none" strike="noStrike">
+              <a:solidFill>
+                <a:srgbClr val="000000"/>
+              </a:solidFill>
+              <a:effectLst/>
+              <a:uFillTx/>
+              <a:latin typeface="Arial"/>
+            </a:endParaRPr>
+          </a:p>
+        </p:txBody>
+      </p:sp>
+      <p:sp>
+        <p:nvSpPr>
+          <p:cNvPr id="37" name=""/>
+          <p:cNvSpPr/>
+          <p:nvPr/>
+        </p:nvSpPr>
+        <p:spPr>
+          <a:xfrm>
+            <a:off x="308520" y="6614280"/>
+            <a:ext cx="1022760" cy="396000"/>
+          </a:xfrm>
+          <a:prstGeom prst="rect">
+            <a:avLst/>
+          </a:prstGeom>
+          <a:noFill/>
+          <a:ln w="0">
+            <a:noFill/>
+          </a:ln>
+        </p:spPr>
+        <p:style>
+          <a:lnRef idx="0"/>
+          <a:fillRef idx="0"/>
+          <a:effectRef idx="0"/>
+          <a:fontRef idx="minor"/>
+        </p:style>
+        <p:txBody>
+          <a:bodyPr lIns="90000" rIns="90000" tIns="45000" bIns="45000" anchor="ctr" anchorCtr="1">
+            <a:spAutoFit/>
+          </a:bodyPr>
+          <a:p>
+            <a:pPr algn="ctr">
+              <a:lnSpc>
+                <a:spcPct val="100000"/>
+              </a:lnSpc>
+            </a:pPr>
+            <a:r>
+              <a:rPr b="0" i="1" sz="1000">
+                <a:solidFill>
+                  <a:srgbClr val="000000"/>
+                </a:solidFill>
+                <a:latin typeface="Nimbus Roman"/>
+              </a:rPr>
+              <a:t>A wide exterior view highlights driveway access and surrounding open space.</a:t>
+            </a:r>
+            <a:endParaRPr lang="en-CA" sz="1000" b="0" u="none" strike="noStrike">
+              <a:solidFill>
+                <a:srgbClr val="000000"/>
+              </a:solidFill>
+              <a:effectLst/>
+              <a:uFillTx/>
+              <a:latin typeface="Arial"/>
+            </a:endParaRPr>
+          </a:p>
+          <a:p>
+            <a:pPr algn="ctr">
+              <a:lnSpc>
+                <a:spcPct val="100000"/>
+              </a:lnSpc>
+            </a:pPr>
+            <a:endParaRPr lang="en-CA" sz="1000" b="0" u="none" strike="noStrike">
+              <a:solidFill>
+                <a:srgbClr val="000000"/>
+              </a:solidFill>
+              <a:effectLst/>
+              <a:uFillTx/>
+              <a:latin typeface="Arial"/>
+            </a:endParaRPr>
+          </a:p>
+        </p:txBody>
+      </p:sp>
+      <p:sp>
+        <p:nvSpPr>
+          <p:cNvPr id="38" name=""/>
+          <p:cNvSpPr/>
+          <p:nvPr/>
+        </p:nvSpPr>
+        <p:spPr>
+          <a:xfrm>
+            <a:off x="1879200" y="5130720"/>
+            <a:ext cx="1149120" cy="396000"/>
+          </a:xfrm>
+          <a:prstGeom prst="rect">
+            <a:avLst/>
+          </a:prstGeom>
+          <a:noFill/>
+          <a:ln w="0">
+            <a:noFill/>
+          </a:ln>
+        </p:spPr>
+        <p:style>
+          <a:lnRef idx="0"/>
+          <a:fillRef idx="0"/>
+          <a:effectRef idx="0"/>
+          <a:fontRef idx="minor"/>
+        </p:style>
+        <p:txBody>
+          <a:bodyPr lIns="90000" rIns="90000" tIns="45000" bIns="45000" anchor="ctr" anchorCtr="1">
+            <a:spAutoFit/>
+          </a:bodyPr>
+          <a:p>
+            <a:pPr algn="ctr">
+              <a:lnSpc>
+                <a:spcPct val="100000"/>
+              </a:lnSpc>
+            </a:pPr>
+            <a:r>
+              <a:rPr b="0" i="1" sz="1000">
+                <a:solidFill>
+                  <a:srgbClr val="000000"/>
+                </a:solidFill>
+                <a:latin typeface="Nimbus Roman"/>
+              </a:rPr>
+              <a:t>The full bathroom includes a large vanity mirror and natural window light.</a:t>
+            </a:r>
+            <a:endParaRPr lang="en-CA" sz="1000" b="0" u="none" strike="noStrike">
+              <a:solidFill>
+                <a:srgbClr val="000000"/>
+              </a:solidFill>
+              <a:effectLst/>
+              <a:uFillTx/>
+              <a:latin typeface="Arial"/>
+            </a:endParaRPr>
+          </a:p>
+          <a:p>
+            <a:pPr algn="ctr">
+              <a:lnSpc>
+                <a:spcPct val="100000"/>
+              </a:lnSpc>
+            </a:pPr>
+            <a:endParaRPr lang="en-CA" sz="1000" b="0" u="none" strike="noStrike">
+              <a:solidFill>
+                <a:srgbClr val="000000"/>
+              </a:solidFill>
+              <a:effectLst/>
+              <a:uFillTx/>
+              <a:latin typeface="Arial"/>
+            </a:endParaRPr>
+          </a:p>
+        </p:txBody>
+      </p:sp>
+      <p:sp>
+        <p:nvSpPr>
+          <p:cNvPr id="39" name=""/>
+          <p:cNvSpPr/>
+          <p:nvPr/>
+        </p:nvSpPr>
+        <p:spPr>
+          <a:xfrm>
+            <a:off x="3778200" y="341640"/>
+            <a:ext cx="2586960" cy="443880"/>
           </a:xfrm>
           <a:prstGeom prst="rect">
             <a:avLst/>
@@ -2221,30 +2649,15 @@
               </a:lnSpc>
             </a:pPr>
             <a:r>
-              <a:rPr b="0" i="1" sz="1000">
-                <a:solidFill>
-                  <a:srgbClr val="000000"/>
-                </a:solidFill>
-                <a:latin typeface="Nimbus Roman"/>
-              </a:rPr>
-              <a:t>The fenced yard backs onto green space shaded by mature trees.</a:t>
-            </a:r>
-            <a:endParaRPr lang="en-CA" sz="1000" b="0" u="none" strike="noStrike">
-              <a:solidFill>
-                <a:srgbClr val="000000"/>
-              </a:solidFill>
-              <a:effectLst/>
-              <a:uFillTx/>
-              <a:latin typeface="Arial"/>
-            </a:endParaRPr>
-          </a:p>
-          <a:p>
-            <a:pPr algn="ctr">
-              <a:lnSpc>
-                <a:spcPct val="100000"/>
-              </a:lnSpc>
-            </a:pPr>
-            <a:endParaRPr lang="en-CA" sz="1000" b="0" u="none" strike="noStrike">
+              <a:rPr b="1" i="1" sz="2000">
+                <a:solidFill>
+                  <a:srgbClr val="000000"/>
+                </a:solidFill>
+                <a:latin typeface="Nimbus Roman"/>
+              </a:rPr>
+              <a:t>4-1616 Happyvale Ave</a:t>
+            </a:r>
+            <a:endParaRPr lang="en-CA" sz="2000" b="0" u="none" strike="noStrike">
               <a:solidFill>
                 <a:srgbClr val="000000"/>
               </a:solidFill>
@@ -2257,14 +2670,14 @@
       </p:sp>
       <p:sp>
         <p:nvSpPr>
-          <p:cNvPr id="35" name=""/>
+          <p:cNvPr id="40" name=""/>
           <p:cNvSpPr/>
           <p:nvPr/>
         </p:nvSpPr>
         <p:spPr>
           <a:xfrm>
-            <a:off x="1975680" y="1650240"/>
-            <a:ext cx="1045440" cy="1336680"/>
+            <a:off x="7132320" y="342000"/>
+            <a:ext cx="2586960" cy="443880"/>
           </a:xfrm>
           <a:prstGeom prst="rect">
             <a:avLst/>
@@ -2291,348 +2704,13 @@
               </a:lnSpc>
             </a:pPr>
             <a:r>
-              <a:rPr b="0" i="1" sz="1000">
-                <a:solidFill>
-                  <a:srgbClr val="000000"/>
-                </a:solidFill>
-                <a:latin typeface="Nimbus Roman"/>
-              </a:rPr>
-              <a:t>A covered balcony overlooks greenery and offers a relaxed spot for grilling.</a:t>
-            </a:r>
-            <a:endParaRPr lang="en-CA" sz="1000" b="0" u="none" strike="noStrike">
-              <a:solidFill>
-                <a:srgbClr val="000000"/>
-              </a:solidFill>
-              <a:effectLst/>
-              <a:uFillTx/>
-              <a:latin typeface="Arial"/>
-            </a:endParaRPr>
-          </a:p>
-          <a:p>
-            <a:pPr algn="ctr">
-              <a:lnSpc>
-                <a:spcPct val="100000"/>
-              </a:lnSpc>
-            </a:pPr>
-            <a:endParaRPr lang="en-CA" sz="1000" b="0" u="none" strike="noStrike">
-              <a:solidFill>
-                <a:srgbClr val="000000"/>
-              </a:solidFill>
-              <a:effectLst/>
-              <a:uFillTx/>
-              <a:latin typeface="Arial"/>
-            </a:endParaRPr>
-          </a:p>
-        </p:txBody>
-      </p:sp>
-      <p:sp>
-        <p:nvSpPr>
-          <p:cNvPr id="36" name=""/>
-          <p:cNvSpPr/>
-          <p:nvPr/>
-        </p:nvSpPr>
-        <p:spPr>
-          <a:xfrm>
-            <a:off x="289800" y="3106080"/>
-            <a:ext cx="1033200" cy="1370520"/>
-          </a:xfrm>
-          <a:prstGeom prst="rect">
-            <a:avLst/>
-          </a:prstGeom>
-          <a:noFill/>
-          <a:ln w="0">
-            <a:noFill/>
-          </a:ln>
-        </p:spPr>
-        <p:style>
-          <a:lnRef idx="0"/>
-          <a:fillRef idx="0"/>
-          <a:effectRef idx="0"/>
-          <a:fontRef idx="minor"/>
-        </p:style>
-        <p:txBody>
-          <a:bodyPr lIns="90000" rIns="90000" tIns="45000" bIns="45000" anchor="t" anchorCtr="1">
-            <a:spAutoFit/>
-          </a:bodyPr>
-          <a:p>
-            <a:pPr algn="ctr">
-              <a:lnSpc>
-                <a:spcPct val="100000"/>
-              </a:lnSpc>
-            </a:pPr>
-            <a:r>
-              <a:rPr b="0" i="1" sz="1000">
-                <a:solidFill>
-                  <a:srgbClr val="000000"/>
-                </a:solidFill>
-                <a:latin typeface="Nimbus Roman"/>
-              </a:rPr>
-              <a:t>The finished lower level provides generous flex space for work, fitness, or play.</a:t>
-            </a:r>
-            <a:endParaRPr lang="en-CA" sz="1000" b="0" u="none" strike="noStrike">
-              <a:solidFill>
-                <a:srgbClr val="000000"/>
-              </a:solidFill>
-              <a:effectLst/>
-              <a:uFillTx/>
-              <a:latin typeface="Arial"/>
-            </a:endParaRPr>
-          </a:p>
-          <a:p>
-            <a:pPr algn="ctr">
-              <a:lnSpc>
-                <a:spcPct val="100000"/>
-              </a:lnSpc>
-            </a:pPr>
-            <a:endParaRPr lang="en-CA" sz="1000" b="0" u="none" strike="noStrike">
-              <a:solidFill>
-                <a:srgbClr val="000000"/>
-              </a:solidFill>
-              <a:effectLst/>
-              <a:uFillTx/>
-              <a:latin typeface="Arial"/>
-            </a:endParaRPr>
-          </a:p>
-        </p:txBody>
-      </p:sp>
-      <p:sp>
-        <p:nvSpPr>
-          <p:cNvPr id="37" name=""/>
-          <p:cNvSpPr/>
-          <p:nvPr/>
-        </p:nvSpPr>
-        <p:spPr>
-          <a:xfrm>
-            <a:off x="308520" y="6153840"/>
-            <a:ext cx="1023120" cy="1317240"/>
-          </a:xfrm>
-          <a:prstGeom prst="rect">
-            <a:avLst/>
-          </a:prstGeom>
-          <a:noFill/>
-          <a:ln w="0">
-            <a:noFill/>
-          </a:ln>
-        </p:spPr>
-        <p:style>
-          <a:lnRef idx="0"/>
-          <a:fillRef idx="0"/>
-          <a:effectRef idx="0"/>
-          <a:fontRef idx="minor"/>
-        </p:style>
-        <p:txBody>
-          <a:bodyPr lIns="90000" rIns="90000" tIns="45000" bIns="45000" anchor="t" anchorCtr="1">
-            <a:spAutoFit/>
-          </a:bodyPr>
-          <a:p>
-            <a:pPr algn="ctr">
-              <a:lnSpc>
-                <a:spcPct val="100000"/>
-              </a:lnSpc>
-            </a:pPr>
-            <a:r>
-              <a:rPr b="0" i="1" sz="1000">
-                <a:solidFill>
-                  <a:srgbClr val="000000"/>
-                </a:solidFill>
-                <a:latin typeface="Nimbus Roman"/>
-              </a:rPr>
-              <a:t>The exterior highlights an attached garage and generous driveway parking.</a:t>
-            </a:r>
-            <a:endParaRPr lang="en-CA" sz="1000" b="0" u="none" strike="noStrike">
-              <a:solidFill>
-                <a:srgbClr val="000000"/>
-              </a:solidFill>
-              <a:effectLst/>
-              <a:uFillTx/>
-              <a:latin typeface="Arial"/>
-            </a:endParaRPr>
-          </a:p>
-          <a:p>
-            <a:pPr algn="ctr">
-              <a:lnSpc>
-                <a:spcPct val="100000"/>
-              </a:lnSpc>
-            </a:pPr>
-            <a:endParaRPr lang="en-CA" sz="1000" b="0" u="none" strike="noStrike">
-              <a:solidFill>
-                <a:srgbClr val="000000"/>
-              </a:solidFill>
-              <a:effectLst/>
-              <a:uFillTx/>
-              <a:latin typeface="Arial"/>
-            </a:endParaRPr>
-          </a:p>
-        </p:txBody>
-      </p:sp>
-      <p:sp>
-        <p:nvSpPr>
-          <p:cNvPr id="38" name=""/>
-          <p:cNvSpPr/>
-          <p:nvPr/>
-        </p:nvSpPr>
-        <p:spPr>
-          <a:xfrm>
-            <a:off x="1879200" y="4596840"/>
-            <a:ext cx="1149480" cy="1464480"/>
-          </a:xfrm>
-          <a:prstGeom prst="rect">
-            <a:avLst/>
-          </a:prstGeom>
-          <a:noFill/>
-          <a:ln w="0">
-            <a:noFill/>
-          </a:ln>
-        </p:spPr>
-        <p:style>
-          <a:lnRef idx="0"/>
-          <a:fillRef idx="0"/>
-          <a:effectRef idx="0"/>
-          <a:fontRef idx="minor"/>
-        </p:style>
-        <p:txBody>
-          <a:bodyPr lIns="90000" rIns="90000" tIns="45000" bIns="45000" anchor="t" anchorCtr="1">
-            <a:spAutoFit/>
-          </a:bodyPr>
-          <a:p>
-            <a:pPr algn="ctr">
-              <a:lnSpc>
-                <a:spcPct val="100000"/>
-              </a:lnSpc>
-            </a:pPr>
-            <a:r>
-              <a:rPr b="0" i="1" sz="1000">
-                <a:solidFill>
-                  <a:srgbClr val="000000"/>
-                </a:solidFill>
-                <a:latin typeface="Nimbus Roman"/>
-              </a:rPr>
-              <a:t>The full bathroom includes vanity lighting, a tub-shower combo, and natural light.</a:t>
-            </a:r>
-            <a:endParaRPr lang="en-CA" sz="1000" b="0" u="none" strike="noStrike">
-              <a:solidFill>
-                <a:srgbClr val="000000"/>
-              </a:solidFill>
-              <a:effectLst/>
-              <a:uFillTx/>
-              <a:latin typeface="Arial"/>
-            </a:endParaRPr>
-          </a:p>
-          <a:p>
-            <a:pPr algn="ctr">
-              <a:lnSpc>
-                <a:spcPct val="100000"/>
-              </a:lnSpc>
-            </a:pPr>
-            <a:endParaRPr lang="en-CA" sz="1000" b="0" u="none" strike="noStrike">
-              <a:solidFill>
-                <a:srgbClr val="000000"/>
-              </a:solidFill>
-              <a:effectLst/>
-              <a:uFillTx/>
-              <a:latin typeface="Arial"/>
-            </a:endParaRPr>
-          </a:p>
-        </p:txBody>
-      </p:sp>
-      <p:sp>
-        <p:nvSpPr>
-          <p:cNvPr id="39" name=""/>
-          <p:cNvSpPr/>
-          <p:nvPr/>
-        </p:nvSpPr>
-        <p:spPr>
-          <a:xfrm>
-            <a:off x="3778200" y="341640"/>
-            <a:ext cx="2587320" cy="444240"/>
-          </a:xfrm>
-          <a:prstGeom prst="rect">
-            <a:avLst/>
-          </a:prstGeom>
-          <a:noFill/>
-          <a:ln w="0">
-            <a:noFill/>
-          </a:ln>
-        </p:spPr>
-        <p:style>
-          <a:lnRef idx="0"/>
-          <a:fillRef idx="0"/>
-          <a:effectRef idx="0"/>
-          <a:fontRef idx="minor"/>
-        </p:style>
-        <p:txBody>
-          <a:bodyPr lIns="90000" rIns="90000" tIns="45000" bIns="45000" anchor="t" anchorCtr="1">
-            <a:spAutoFit/>
-          </a:bodyPr>
-          <a:p>
-            <a:pPr algn="ctr">
-              <a:lnSpc>
-                <a:spcPct val="100000"/>
-              </a:lnSpc>
-            </a:pPr>
-            <a:r>
               <a:rPr b="1" i="1" sz="2000">
                 <a:solidFill>
                   <a:srgbClr val="000000"/>
                 </a:solidFill>
                 <a:latin typeface="Nimbus Roman"/>
               </a:rPr>
-              <a:t>4-1616 Happyvale Avenue</a:t>
-            </a:r>
-            <a:endParaRPr lang="en-CA" sz="2000" b="0" u="none" strike="noStrike">
-              <a:solidFill>
-                <a:srgbClr val="000000"/>
-              </a:solidFill>
-              <a:effectLst/>
-              <a:uFillTx/>
-              <a:latin typeface="Arial"/>
-            </a:endParaRPr>
-          </a:p>
-        </p:txBody>
-      </p:sp>
-      <p:sp>
-        <p:nvSpPr>
-          <p:cNvPr id="40" name=""/>
-          <p:cNvSpPr/>
-          <p:nvPr/>
-        </p:nvSpPr>
-        <p:spPr>
-          <a:xfrm>
-            <a:off x="7132320" y="342000"/>
-            <a:ext cx="2587320" cy="444240"/>
-          </a:xfrm>
-          <a:prstGeom prst="rect">
-            <a:avLst/>
-          </a:prstGeom>
-          <a:noFill/>
-          <a:ln w="0">
-            <a:noFill/>
-          </a:ln>
-        </p:spPr>
-        <p:style>
-          <a:lnRef idx="0"/>
-          <a:fillRef idx="0"/>
-          <a:effectRef idx="0"/>
-          <a:fontRef idx="minor"/>
-        </p:style>
-        <p:txBody>
-          <a:bodyPr lIns="90000" rIns="90000" tIns="45000" bIns="45000" anchor="t" anchorCtr="1">
-            <a:spAutoFit/>
-          </a:bodyPr>
-          <a:p>
-            <a:pPr algn="ctr">
-              <a:lnSpc>
-                <a:spcPct val="100000"/>
-              </a:lnSpc>
-            </a:pPr>
-            <a:r>
-              <a:rPr b="1" i="1" sz="2000">
-                <a:solidFill>
-                  <a:srgbClr val="000000"/>
-                </a:solidFill>
-                <a:latin typeface="Nimbus Roman"/>
-              </a:rPr>
-              <a:t>4-1616 Happyvale Avenue</a:t>
+              <a:t>4-1616 Happyvale Ave</a:t>
             </a:r>
             <a:endParaRPr lang="en-CA" sz="2000" b="0" u="none" strike="noStrike">
               <a:solidFill>
@@ -2654,7 +2732,7 @@
         <p:spPr>
           <a:xfrm>
             <a:off x="3600000" y="786240"/>
-            <a:ext cx="2931120" cy="6593400"/>
+            <a:ext cx="2930760" cy="6593040"/>
           </a:xfrm>
           <a:prstGeom prst="rect">
             <a:avLst/>
@@ -2671,7 +2749,7 @@
           <a:fontRef idx="minor"/>
         </p:style>
         <p:txBody>
-          <a:bodyPr lIns="90000" rIns="90000" tIns="45000" bIns="45000" anchor="t">
+          <a:bodyPr lIns="90000" rIns="90000" tIns="508000" bIns="45000" anchor="t">
             <a:spAutoFit/>
           </a:bodyPr>
           <a:p>
@@ -3054,7 +3132,7 @@
         <p:spPr>
           <a:xfrm>
             <a:off x="6966720" y="768960"/>
-            <a:ext cx="2952360" cy="410400"/>
+            <a:ext cx="2952000" cy="5334000"/>
           </a:xfrm>
           <a:prstGeom prst="rect">
             <a:avLst/>
@@ -3071,7 +3149,7 @@
           <a:fontRef idx="minor"/>
         </p:style>
         <p:txBody>
-          <a:bodyPr lIns="90000" rIns="90000" tIns="45000" bIns="45000" anchor="t">
+          <a:bodyPr lIns="90000" rIns="90000" tIns="381000" bIns="45000" anchor="t">
             <a:spAutoFit/>
           </a:bodyPr>
           <a:p>
@@ -3079,12 +3157,18 @@
               <a:lnSpc>
                 <a:spcPct val="150000"/>
               </a:lnSpc>
+              <a:spcBef>
+                <a:spcPts val="0"/>
+              </a:spcBef>
+              <a:spcAft>
+                <a:spcPts val="200"/>
+              </a:spcAft>
               <a:tabLst>
                 <a:tab algn="l" pos="1479240"/>
               </a:tabLst>
             </a:pPr>
             <a:r>
-              <a:rPr b="1" sz="1400" i="1">
+              <a:rPr b="1" i="1" sz="1400">
                 <a:solidFill>
                   <a:srgbClr val="000000"/>
                 </a:solidFill>
@@ -3101,18 +3185,23 @@
               <a:latin typeface="Arial"/>
             </a:endParaRPr>
           </a:p>
-          <a:p/>
           <a:p>
             <a:pPr>
               <a:lnSpc>
                 <a:spcPct val="150000"/>
               </a:lnSpc>
+              <a:spcBef>
+                <a:spcPts val="0"/>
+              </a:spcBef>
+              <a:spcAft>
+                <a:spcPts val="0"/>
+              </a:spcAft>
               <a:tabLst>
                 <a:tab algn="l" pos="1479240"/>
               </a:tabLst>
             </a:pPr>
             <a:r>
-              <a:rPr b="1" sz="1400">
+              <a:rPr b="1" i="1" sz="1400">
                 <a:solidFill>
                   <a:srgbClr val="000000"/>
                 </a:solidFill>
@@ -3126,12 +3215,18 @@
               <a:lnSpc>
                 <a:spcPct val="150000"/>
               </a:lnSpc>
+              <a:spcBef>
+                <a:spcPts val="0"/>
+              </a:spcBef>
+              <a:spcAft>
+                <a:spcPts val="0"/>
+              </a:spcAft>
               <a:tabLst>
                 <a:tab algn="l" pos="1479240"/>
               </a:tabLst>
             </a:pPr>
             <a:r>
-              <a:rPr b="1" sz="1400">
+              <a:rPr b="1" i="1" sz="1400">
                 <a:solidFill>
                   <a:srgbClr val="000000"/>
                 </a:solidFill>
@@ -3145,12 +3240,18 @@
               <a:lnSpc>
                 <a:spcPct val="150000"/>
               </a:lnSpc>
+              <a:spcBef>
+                <a:spcPts val="0"/>
+              </a:spcBef>
+              <a:spcAft>
+                <a:spcPts val="0"/>
+              </a:spcAft>
               <a:tabLst>
                 <a:tab algn="l" pos="1479240"/>
               </a:tabLst>
             </a:pPr>
             <a:r>
-              <a:rPr b="1" sz="1400">
+              <a:rPr b="1" i="1" sz="1400">
                 <a:solidFill>
                   <a:srgbClr val="000000"/>
                 </a:solidFill>
@@ -3164,12 +3265,18 @@
               <a:lnSpc>
                 <a:spcPct val="150000"/>
               </a:lnSpc>
+              <a:spcBef>
+                <a:spcPts val="0"/>
+              </a:spcBef>
+              <a:spcAft>
+                <a:spcPts val="0"/>
+              </a:spcAft>
               <a:tabLst>
                 <a:tab algn="l" pos="1479240"/>
               </a:tabLst>
             </a:pPr>
             <a:r>
-              <a:rPr b="1" sz="1400">
+              <a:rPr b="1" i="1" sz="1400">
                 <a:solidFill>
                   <a:srgbClr val="000000"/>
                 </a:solidFill>
@@ -3183,12 +3290,18 @@
               <a:lnSpc>
                 <a:spcPct val="150000"/>
               </a:lnSpc>
+              <a:spcBef>
+                <a:spcPts val="0"/>
+              </a:spcBef>
+              <a:spcAft>
+                <a:spcPts val="0"/>
+              </a:spcAft>
               <a:tabLst>
                 <a:tab algn="l" pos="1479240"/>
               </a:tabLst>
             </a:pPr>
             <a:r>
-              <a:rPr b="1" sz="1400">
+              <a:rPr b="1" i="1" sz="1400">
                 <a:solidFill>
                   <a:srgbClr val="000000"/>
                 </a:solidFill>
@@ -3202,12 +3315,18 @@
               <a:lnSpc>
                 <a:spcPct val="150000"/>
               </a:lnSpc>
+              <a:spcBef>
+                <a:spcPts val="0"/>
+              </a:spcBef>
+              <a:spcAft>
+                <a:spcPts val="0"/>
+              </a:spcAft>
               <a:tabLst>
                 <a:tab algn="l" pos="1479240"/>
               </a:tabLst>
             </a:pPr>
             <a:r>
-              <a:rPr b="1" sz="1400">
+              <a:rPr b="1" i="1" sz="1400">
                 <a:solidFill>
                   <a:srgbClr val="000000"/>
                 </a:solidFill>
@@ -3221,12 +3340,18 @@
               <a:lnSpc>
                 <a:spcPct val="150000"/>
               </a:lnSpc>
+              <a:spcBef>
+                <a:spcPts val="0"/>
+              </a:spcBef>
+              <a:spcAft>
+                <a:spcPts val="0"/>
+              </a:spcAft>
               <a:tabLst>
                 <a:tab algn="l" pos="1479240"/>
               </a:tabLst>
             </a:pPr>
             <a:r>
-              <a:rPr b="1" sz="1400">
+              <a:rPr b="1" i="1" sz="1400">
                 <a:solidFill>
                   <a:srgbClr val="000000"/>
                 </a:solidFill>
@@ -3240,12 +3365,18 @@
               <a:lnSpc>
                 <a:spcPct val="150000"/>
               </a:lnSpc>
+              <a:spcBef>
+                <a:spcPts val="0"/>
+              </a:spcBef>
+              <a:spcAft>
+                <a:spcPts val="0"/>
+              </a:spcAft>
               <a:tabLst>
                 <a:tab algn="l" pos="1479240"/>
               </a:tabLst>
             </a:pPr>
             <a:r>
-              <a:rPr b="1" sz="1400">
+              <a:rPr b="1" i="1" sz="1400">
                 <a:solidFill>
                   <a:srgbClr val="000000"/>
                 </a:solidFill>
@@ -3259,12 +3390,18 @@
               <a:lnSpc>
                 <a:spcPct val="150000"/>
               </a:lnSpc>
+              <a:spcBef>
+                <a:spcPts val="0"/>
+              </a:spcBef>
+              <a:spcAft>
+                <a:spcPts val="0"/>
+              </a:spcAft>
               <a:tabLst>
                 <a:tab algn="l" pos="1479240"/>
               </a:tabLst>
             </a:pPr>
             <a:r>
-              <a:rPr b="1" sz="1400">
+              <a:rPr b="1" i="1" sz="1400">
                 <a:solidFill>
                   <a:srgbClr val="000000"/>
                 </a:solidFill>
@@ -3278,12 +3415,18 @@
               <a:lnSpc>
                 <a:spcPct val="150000"/>
               </a:lnSpc>
+              <a:spcBef>
+                <a:spcPts val="1200"/>
+              </a:spcBef>
+              <a:spcAft>
+                <a:spcPts val="200"/>
+              </a:spcAft>
               <a:tabLst>
                 <a:tab algn="l" pos="1479240"/>
               </a:tabLst>
             </a:pPr>
             <a:r>
-              <a:rPr b="1" sz="1400" i="1">
+              <a:rPr b="1" i="1" sz="1400">
                 <a:solidFill>
                   <a:srgbClr val="000000"/>
                 </a:solidFill>
@@ -3292,18 +3435,23 @@
               <a:t>Basement (674.9 sq. ft.)</a:t>
             </a:r>
           </a:p>
-          <a:p/>
           <a:p>
             <a:pPr>
               <a:lnSpc>
                 <a:spcPct val="150000"/>
               </a:lnSpc>
+              <a:spcBef>
+                <a:spcPts val="0"/>
+              </a:spcBef>
+              <a:spcAft>
+                <a:spcPts val="0"/>
+              </a:spcAft>
               <a:tabLst>
                 <a:tab algn="l" pos="1479240"/>
               </a:tabLst>
             </a:pPr>
             <a:r>
-              <a:rPr b="1" sz="1400">
+              <a:rPr b="1" i="1" sz="1400">
                 <a:solidFill>
                   <a:srgbClr val="000000"/>
                 </a:solidFill>
@@ -3317,12 +3465,18 @@
               <a:lnSpc>
                 <a:spcPct val="150000"/>
               </a:lnSpc>
+              <a:spcBef>
+                <a:spcPts val="0"/>
+              </a:spcBef>
+              <a:spcAft>
+                <a:spcPts val="0"/>
+              </a:spcAft>
               <a:tabLst>
                 <a:tab algn="l" pos="1479240"/>
               </a:tabLst>
             </a:pPr>
             <a:r>
-              <a:rPr b="1" sz="1400">
+              <a:rPr b="1" i="1" sz="1400">
                 <a:solidFill>
                   <a:srgbClr val="000000"/>
                 </a:solidFill>
@@ -3336,12 +3490,18 @@
               <a:lnSpc>
                 <a:spcPct val="150000"/>
               </a:lnSpc>
+              <a:spcBef>
+                <a:spcPts val="0"/>
+              </a:spcBef>
+              <a:spcAft>
+                <a:spcPts val="0"/>
+              </a:spcAft>
               <a:tabLst>
                 <a:tab algn="l" pos="1479240"/>
               </a:tabLst>
             </a:pPr>
             <a:r>
-              <a:rPr b="1" sz="1400">
+              <a:rPr b="1" i="1" sz="1400">
                 <a:solidFill>
                   <a:srgbClr val="000000"/>
                 </a:solidFill>
@@ -3361,7 +3521,7 @@
         <p:spPr>
           <a:xfrm>
             <a:off x="7091640" y="6444720"/>
-            <a:ext cx="2587320" cy="444240"/>
+            <a:ext cx="2586960" cy="443880"/>
           </a:xfrm>
           <a:prstGeom prst="rect">
             <a:avLst/>
@@ -3417,7 +3577,7 @@
         </p:nvPicPr>
         <p:blipFill>
           <a:blip r:embed="rId3"/>
-          <a:srcRect l="6815" r="6815"/>
+          <a:srcRect l="6812" r="6812"/>
           <a:stretch>
             <a:fillRect/>
           </a:stretch>
@@ -3425,7 +3585,7 @@
         <p:spPr>
           <a:xfrm>
             <a:off x="1322640" y="241560"/>
-            <a:ext cx="1697760" cy="1311480"/>
+            <a:ext cx="1697400" cy="1311120"/>
           </a:xfrm>
           <a:prstGeom prst="rect">
             <a:avLst/>
@@ -3442,7 +3602,7 @@
         </p:nvPicPr>
         <p:blipFill>
           <a:blip r:embed="rId4"/>
-          <a:srcRect l="8507" r="8507"/>
+          <a:srcRect l="8505" r="8505"/>
           <a:stretch>
             <a:fillRect/>
           </a:stretch>
@@ -3450,7 +3610,7 @@
         <p:spPr>
           <a:xfrm>
             <a:off x="329760" y="1672920"/>
-            <a:ext cx="1645560" cy="1323000"/>
+            <a:ext cx="1645200" cy="1322640"/>
           </a:xfrm>
           <a:prstGeom prst="rect">
             <a:avLst/>
@@ -3467,7 +3627,7 @@
         </p:nvPicPr>
         <p:blipFill>
           <a:blip r:embed="rId5"/>
-          <a:srcRect l="8812" r="8812"/>
+          <a:srcRect l="8810" r="8810"/>
           <a:stretch>
             <a:fillRect/>
           </a:stretch>
@@ -3475,7 +3635,7 @@
         <p:spPr>
           <a:xfrm>
             <a:off x="1323360" y="3106080"/>
-            <a:ext cx="1697040" cy="1374480"/>
+            <a:ext cx="1696680" cy="1374120"/>
           </a:xfrm>
           <a:prstGeom prst="rect">
             <a:avLst/>
@@ -3492,7 +3652,7 @@
         </p:nvPicPr>
         <p:blipFill>
           <a:blip r:embed="rId6"/>
-          <a:srcRect l="13799" r="13799"/>
+          <a:srcRect l="13798" r="13798"/>
           <a:stretch>
             <a:fillRect/>
           </a:stretch>
@@ -3500,7 +3660,7 @@
         <p:spPr>
           <a:xfrm>
             <a:off x="289800" y="4596840"/>
-            <a:ext cx="1589040" cy="1460880"/>
+            <a:ext cx="1588680" cy="1460520"/>
           </a:xfrm>
           <a:prstGeom prst="rect">
             <a:avLst/>
@@ -3517,7 +3677,7 @@
         </p:nvPicPr>
         <p:blipFill>
           <a:blip r:embed="rId7"/>
-          <a:srcRect l="6813" r="6813"/>
+          <a:srcRect l="6811" r="6811"/>
           <a:stretch>
             <a:fillRect/>
           </a:stretch>
@@ -3525,7 +3685,7 @@
         <p:spPr>
           <a:xfrm>
             <a:off x="1332000" y="6153840"/>
-            <a:ext cx="1695960" cy="1310040"/>
+            <a:ext cx="1695600" cy="1309680"/>
           </a:xfrm>
           <a:prstGeom prst="rect">
             <a:avLst/>
